--- a/KHBD_Tin_học/Lớp_7/Tuần_04/Slide_Tin_hoc_Lớp_7_Tiet03_Bai_3_Quan_ly_du_lieu_trong_may_tinh.pptx
+++ b/KHBD_Tin_học/Lớp_7/Tuần_04/Slide_Tin_hoc_Lớp_7_Tiet03_Bai_3_Quan_ly_du_lieu_trong_may_tinh.pptx
@@ -5,16 +5,14 @@
     <p:sldMasterId id="2147483648" r:id="rId1"/>
   </p:sldMasterIdLst>
   <p:sldIdLst>
-    <p:sldId id="256" r:id="rId2"/>
+    <p:sldId id="256" r:id="rId5"/>
+    <p:sldId id="257" r:id="rId4"/>
     <p:sldId id="258" r:id="rId3"/>
-    <p:sldId id="259" r:id="rId4"/>
-    <p:sldId id="257" r:id="rId5"/>
+    <p:sldId id="259" r:id="rId2"/>
     <p:sldId id="260" r:id="rId10"/>
     <p:sldId id="261" r:id="rId11"/>
     <p:sldId id="262" r:id="rId12"/>
     <p:sldId id="263" r:id="rId13"/>
-    <p:sldId id="264" r:id="rId14"/>
-    <p:sldId id="265" r:id="rId15"/>
   </p:sldIdLst>
   <p:sldSz cx="12192000" cy="6858000"/>
   <p:notesSz cx="6858000" cy="9144000"/>
@@ -3387,119 +3385,6 @@
 </file>
 
 <file path=ppt/slides/slide1.xml><?xml version="1.0" encoding="utf-8"?>
-<p:sld xmlns:a="http://schemas.openxmlformats.org/drawingml/2006/main" xmlns:r="http://schemas.openxmlformats.org/officeDocument/2006/relationships" xmlns:p="http://schemas.openxmlformats.org/presentationml/2006/main">
-  <p:cSld>
-    <p:spTree>
-      <p:nvGrpSpPr>
-        <p:cNvPr id="1" name=""/>
-        <p:cNvGrpSpPr/>
-        <p:nvPr/>
-      </p:nvGrpSpPr>
-      <p:grpSpPr>
-        <a:xfrm>
-          <a:off x="0" y="0"/>
-          <a:ext cx="0" cy="0"/>
-          <a:chOff x="0" y="0"/>
-          <a:chExt cx="0" cy="0"/>
-        </a:xfrm>
-      </p:grpSpPr>
-      <p:sp>
-        <p:nvSpPr>
-          <p:cNvPr id="5" name="TextBox 5">
-            <a:extLst>
-              <a:ext uri="{FF2B5EF4-FFF2-40B4-BE49-F238E27FC236}">
-                <a16:creationId xmlns:a16="http://schemas.microsoft.com/office/drawing/2014/main" id="{261CADFC-E468-A9CF-CA9D-3603C11068A9}"/>
-              </a:ext>
-            </a:extLst>
-          </p:cNvPr>
-          <p:cNvSpPr txBox="1"/>
-          <p:nvPr/>
-        </p:nvSpPr>
-        <p:spPr>
-          <a:xfrm>
-            <a:off x="844216" y="471493"/>
-            <a:ext cx="10503568" cy="1128707"/>
-          </a:xfrm>
-          <a:prstGeom prst="rect">
-            <a:avLst/>
-          </a:prstGeom>
-        </p:spPr>
-        <p:txBody>
-          <a:bodyPr wrap="square" lIns="0" tIns="0" rIns="0" bIns="0" rtlCol="0" anchor="t">
-            <a:spAutoFit/>
-          </a:bodyPr>
-          <a:lstStyle/>
-          <a:p>
-            <a:pPr algn="ctr">
-              <a:lnSpc>
-                <a:spcPts val="10360"/>
-              </a:lnSpc>
-            </a:pPr>
-            <a:r>
-              <a:rPr lang="en-US" sz="4400" b="1" dirty="0">
-                <a:solidFill>
-                  <a:srgbClr val="244498"/>
-                </a:solidFill>
-                <a:latin typeface="Arial" panose="020B0604020202020204" pitchFamily="34" charset="0"/>
-                <a:ea typeface="Crimson Pro Bold"/>
-                <a:cs typeface="Arial" panose="020B0604020202020204" pitchFamily="34" charset="0"/>
-                <a:sym typeface="Crimson Pro Bold"/>
-              </a:rPr>
-              <a:t>TRƯỜNG TIỂU HỌC VÀ THCS UNIGO</a:t>
-            </a:r>
-          </a:p>
-        </p:txBody>
-      </p:sp>
-      <p:pic>
-        <p:nvPicPr>
-          <p:cNvPr id="7" name="Picture 6">
-            <a:extLst>
-              <a:ext uri="{FF2B5EF4-FFF2-40B4-BE49-F238E27FC236}">
-                <a16:creationId xmlns:a16="http://schemas.microsoft.com/office/drawing/2014/main" id="{BACCC6F9-9D0B-8FA1-C7A3-6C656AB9CDE5}"/>
-              </a:ext>
-            </a:extLst>
-          </p:cNvPr>
-          <p:cNvPicPr>
-            <a:picLocks noChangeAspect="1"/>
-          </p:cNvPicPr>
-          <p:nvPr/>
-        </p:nvPicPr>
-        <p:blipFill>
-          <a:blip r:embed="rId2" cstate="print">
-            <a:extLst>
-              <a:ext uri="{28A0092B-C50C-407E-A947-70E740481C1C}">
-                <a14:useLocalDpi xmlns:a14="http://schemas.microsoft.com/office/drawing/2010/main" val="0"/>
-              </a:ext>
-            </a:extLst>
-          </a:blip>
-          <a:stretch>
-            <a:fillRect/>
-          </a:stretch>
-        </p:blipFill>
-        <p:spPr>
-          <a:xfrm>
-            <a:off x="152400" y="1780673"/>
-            <a:ext cx="11887200" cy="3764661"/>
-          </a:xfrm>
-          <a:prstGeom prst="rect">
-            <a:avLst/>
-          </a:prstGeom>
-        </p:spPr>
-      </p:pic>
-    </p:spTree>
-    <p:extLst>
-      <p:ext uri="{BB962C8B-B14F-4D97-AF65-F5344CB8AC3E}">
-        <p14:creationId xmlns:p14="http://schemas.microsoft.com/office/powerpoint/2010/main" val="1786245849"/>
-      </p:ext>
-    </p:extLst>
-  </p:cSld>
-  <p:clrMapOvr>
-    <a:masterClrMapping/>
-  </p:clrMapOvr>
-</p:sld>
-</file>
-
-<file path=ppt/slides/slide10.xml><?xml version="1.0" encoding="utf-8"?>
 <p:sld xmlns:a="http://schemas.openxmlformats.org/drawingml/2006/main" xmlns:p="http://schemas.openxmlformats.org/presentationml/2006/main" xmlns:r="http://schemas.openxmlformats.org/officeDocument/2006/relationships">
   <p:cSld>
     <p:spTree>
@@ -3554,14 +3439,102 @@
       </p:sp>
       <p:sp>
         <p:nvSpPr>
-          <p:cNvPr id="3" name="TextBox 2"/>
+          <p:cNvPr id="3" name="Rounded Rectangle 2"/>
+          <p:cNvSpPr/>
+          <p:nvPr/>
+        </p:nvSpPr>
+        <p:spPr>
+          <a:xfrm>
+            <a:off x="1097280" y="1463040"/>
+            <a:ext cx="9994392" cy="3657599"/>
+          </a:xfrm>
+          <a:prstGeom prst="roundRect">
+            <a:avLst/>
+          </a:prstGeom>
+          <a:solidFill>
+            <a:srgbClr val="FFFFFF"/>
+          </a:solidFill>
+          <a:ln w="19050">
+            <a:solidFill>
+              <a:srgbClr val="0EA5E9"/>
+            </a:solidFill>
+          </a:ln>
+        </p:spPr>
+        <p:style>
+          <a:lnRef idx="1">
+            <a:schemeClr val="accent1"/>
+          </a:lnRef>
+          <a:fillRef idx="3">
+            <a:schemeClr val="accent1"/>
+          </a:fillRef>
+          <a:effectRef idx="2">
+            <a:schemeClr val="accent1"/>
+          </a:effectRef>
+          <a:fontRef idx="minor">
+            <a:schemeClr val="lt1"/>
+          </a:fontRef>
+        </p:style>
+        <p:txBody>
+          <a:bodyPr rtlCol="0" anchor="ctr"/>
+          <a:lstStyle/>
+          <a:p>
+            <a:pPr algn="ctr"/>
+          </a:p>
+        </p:txBody>
+      </p:sp>
+      <p:sp>
+        <p:nvSpPr>
+          <p:cNvPr id="4" name="Rounded Rectangle 3"/>
+          <p:cNvSpPr/>
+          <p:nvPr/>
+        </p:nvSpPr>
+        <p:spPr>
+          <a:xfrm>
+            <a:off x="1097280" y="1463040"/>
+            <a:ext cx="9994392" cy="182879"/>
+          </a:xfrm>
+          <a:prstGeom prst="roundRect">
+            <a:avLst/>
+          </a:prstGeom>
+          <a:solidFill>
+            <a:srgbClr val="0EA5E9"/>
+          </a:solidFill>
+          <a:ln>
+            <a:noFill/>
+          </a:ln>
+        </p:spPr>
+        <p:style>
+          <a:lnRef idx="1">
+            <a:schemeClr val="accent1"/>
+          </a:lnRef>
+          <a:fillRef idx="3">
+            <a:schemeClr val="accent1"/>
+          </a:fillRef>
+          <a:effectRef idx="2">
+            <a:schemeClr val="accent1"/>
+          </a:effectRef>
+          <a:fontRef idx="minor">
+            <a:schemeClr val="lt1"/>
+          </a:fontRef>
+        </p:style>
+        <p:txBody>
+          <a:bodyPr rtlCol="0" anchor="ctr"/>
+          <a:lstStyle/>
+          <a:p>
+            <a:pPr algn="ctr"/>
+          </a:p>
+        </p:txBody>
+      </p:sp>
+      <p:sp>
+        <p:nvSpPr>
+          <p:cNvPr id="5" name="TextBox 4"/>
           <p:cNvSpPr txBox="1"/>
           <p:nvPr/>
         </p:nvSpPr>
         <p:spPr>
           <a:xfrm>
-            <a:off x="914400" y="1828800"/>
-            <a:ext cx="10360152" cy="1097280"/>
+            <a:off x="1371600" y="1828800"/>
+            <a:ext cx="9445752" cy="457200"/>
           </a:xfrm>
           <a:prstGeom prst="rect">
             <a:avLst/>
@@ -3569,13 +3542,268 @@
           <a:noFill/>
         </p:spPr>
         <p:txBody>
-          <a:bodyPr wrap="square" lIns="73152" rIns="73152">
+          <a:bodyPr wrap="square" lIns="73152" rIns="73152" tIns="54864" bIns="54864">
             <a:spAutoFit/>
           </a:bodyPr>
           <a:lstStyle/>
           <a:p>
             <a:pPr algn="ctr">
-              <a:defRPr sz="3600" b="1">
+              <a:defRPr sz="1500" b="1">
+                <a:solidFill>
+                  <a:srgbClr val="0369A1"/>
+                </a:solidFill>
+                <a:latin typeface="Arial"/>
+              </a:defRPr>
+            </a:pPr>
+            <a:r>
+              <a:t>TRƯỜNG TIỂU HỌC &amp; THCS UNIGO</a:t>
+            </a:r>
+          </a:p>
+        </p:txBody>
+      </p:sp>
+      <p:sp>
+        <p:nvSpPr>
+          <p:cNvPr id="6" name="TextBox 5"/>
+          <p:cNvSpPr txBox="1"/>
+          <p:nvPr/>
+        </p:nvSpPr>
+        <p:spPr>
+          <a:xfrm>
+            <a:off x="1371600" y="2377440"/>
+            <a:ext cx="9445752" cy="1280160"/>
+          </a:xfrm>
+          <a:prstGeom prst="rect">
+            <a:avLst/>
+          </a:prstGeom>
+          <a:noFill/>
+        </p:spPr>
+        <p:txBody>
+          <a:bodyPr wrap="square" lIns="73152" rIns="73152" tIns="54864" bIns="54864">
+            <a:spAutoFit/>
+          </a:bodyPr>
+          <a:lstStyle/>
+          <a:p>
+            <a:pPr algn="ctr">
+              <a:defRPr sz="2800" b="1">
+                <a:solidFill>
+                  <a:srgbClr val="0F172A"/>
+                </a:solidFill>
+                <a:latin typeface="Arial"/>
+              </a:defRPr>
+            </a:pPr>
+            <a:r>
+              <a:t>BÀI 3. QUẢN LÝ DỮ LIỆU</a:t>
+            </a:r>
+            <a:br/>
+            <a:r>
+              <a:t>TRONG MÁY TÍNH</a:t>
+            </a:r>
+          </a:p>
+        </p:txBody>
+      </p:sp>
+      <p:sp>
+        <p:nvSpPr>
+          <p:cNvPr id="7" name="TextBox 6"/>
+          <p:cNvSpPr txBox="1"/>
+          <p:nvPr/>
+        </p:nvSpPr>
+        <p:spPr>
+          <a:xfrm>
+            <a:off x="1371600" y="3749039"/>
+            <a:ext cx="9445752" cy="548639"/>
+          </a:xfrm>
+          <a:prstGeom prst="rect">
+            <a:avLst/>
+          </a:prstGeom>
+          <a:noFill/>
+        </p:spPr>
+        <p:txBody>
+          <a:bodyPr wrap="square" lIns="73152" rIns="73152" tIns="54864" bIns="54864">
+            <a:spAutoFit/>
+          </a:bodyPr>
+          <a:lstStyle/>
+          <a:p>
+            <a:pPr algn="ctr">
+              <a:defRPr sz="1800" b="0">
+                <a:solidFill>
+                  <a:srgbClr val="0369A1"/>
+                </a:solidFill>
+                <a:latin typeface="Arial"/>
+              </a:defRPr>
+            </a:pPr>
+            <a:r>
+              <a:t>Tin học • Lớp 7 • Tiết 3 (Chủ đề 2)</a:t>
+            </a:r>
+          </a:p>
+        </p:txBody>
+      </p:sp>
+      <p:sp>
+        <p:nvSpPr>
+          <p:cNvPr id="8" name="TextBox 7"/>
+          <p:cNvSpPr txBox="1"/>
+          <p:nvPr/>
+        </p:nvSpPr>
+        <p:spPr>
+          <a:xfrm>
+            <a:off x="1371600" y="4389120"/>
+            <a:ext cx="9445752" cy="365760"/>
+          </a:xfrm>
+          <a:prstGeom prst="rect">
+            <a:avLst/>
+          </a:prstGeom>
+          <a:noFill/>
+        </p:spPr>
+        <p:txBody>
+          <a:bodyPr wrap="square" lIns="73152" rIns="73152" tIns="54864" bIns="54864">
+            <a:spAutoFit/>
+          </a:bodyPr>
+          <a:lstStyle/>
+          <a:p>
+            <a:pPr algn="ctr">
+              <a:defRPr sz="1400" b="0">
+                <a:solidFill>
+                  <a:srgbClr val="64748B"/>
+                </a:solidFill>
+                <a:latin typeface="Arial"/>
+              </a:defRPr>
+            </a:pPr>
+            <a:r>
+              <a:t>GV: Đậu Đình Nguyên • Bộ môn Tin học</a:t>
+            </a:r>
+          </a:p>
+        </p:txBody>
+      </p:sp>
+    </p:spTree>
+  </p:cSld>
+  <p:clrMapOvr>
+    <a:masterClrMapping/>
+  </p:clrMapOvr>
+  <p:transition spd="med">
+    <p:wipe/>
+  </p:transition>
+</p:sld>
+</file>
+
+<file path=ppt/slides/slide2.xml><?xml version="1.0" encoding="utf-8"?>
+<p:sld xmlns:a="http://schemas.openxmlformats.org/drawingml/2006/main" xmlns:p="http://schemas.openxmlformats.org/presentationml/2006/main" xmlns:r="http://schemas.openxmlformats.org/officeDocument/2006/relationships">
+  <p:cSld>
+    <p:spTree>
+      <p:nvGrpSpPr>
+        <p:cNvPr id="1" name=""/>
+        <p:cNvGrpSpPr/>
+        <p:nvPr/>
+      </p:nvGrpSpPr>
+      <p:grpSpPr/>
+      <p:sp>
+        <p:nvSpPr>
+          <p:cNvPr id="2" name="Rectangle 1"/>
+          <p:cNvSpPr/>
+          <p:nvPr/>
+        </p:nvSpPr>
+        <p:spPr>
+          <a:xfrm>
+            <a:off x="0" y="1051560"/>
+            <a:ext cx="12188952" cy="4754879"/>
+          </a:xfrm>
+          <a:prstGeom prst="rect">
+            <a:avLst/>
+          </a:prstGeom>
+          <a:solidFill>
+            <a:srgbClr val="F0F9FF"/>
+          </a:solidFill>
+          <a:ln>
+            <a:noFill/>
+          </a:ln>
+        </p:spPr>
+        <p:style>
+          <a:lnRef idx="1">
+            <a:schemeClr val="accent1"/>
+          </a:lnRef>
+          <a:fillRef idx="3">
+            <a:schemeClr val="accent1"/>
+          </a:fillRef>
+          <a:effectRef idx="2">
+            <a:schemeClr val="accent1"/>
+          </a:effectRef>
+          <a:fontRef idx="minor">
+            <a:schemeClr val="lt1"/>
+          </a:fontRef>
+        </p:style>
+        <p:txBody>
+          <a:bodyPr rtlCol="0" anchor="ctr"/>
+          <a:lstStyle/>
+          <a:p>
+            <a:pPr algn="ctr"/>
+          </a:p>
+        </p:txBody>
+      </p:sp>
+      <p:sp>
+        <p:nvSpPr>
+          <p:cNvPr id="3" name="Rounded Rectangle 2"/>
+          <p:cNvSpPr/>
+          <p:nvPr/>
+        </p:nvSpPr>
+        <p:spPr>
+          <a:xfrm>
+            <a:off x="365760" y="1143000"/>
+            <a:ext cx="2926080" cy="347471"/>
+          </a:xfrm>
+          <a:prstGeom prst="roundRect">
+            <a:avLst/>
+          </a:prstGeom>
+          <a:solidFill>
+            <a:srgbClr val="0369A1"/>
+          </a:solidFill>
+          <a:ln>
+            <a:noFill/>
+          </a:ln>
+        </p:spPr>
+        <p:style>
+          <a:lnRef idx="1">
+            <a:schemeClr val="accent1"/>
+          </a:lnRef>
+          <a:fillRef idx="3">
+            <a:schemeClr val="accent1"/>
+          </a:fillRef>
+          <a:effectRef idx="2">
+            <a:schemeClr val="accent1"/>
+          </a:effectRef>
+          <a:fontRef idx="minor">
+            <a:schemeClr val="lt1"/>
+          </a:fontRef>
+        </p:style>
+        <p:txBody>
+          <a:bodyPr rtlCol="0" anchor="ctr"/>
+          <a:lstStyle/>
+          <a:p>
+            <a:pPr algn="ctr"/>
+          </a:p>
+        </p:txBody>
+      </p:sp>
+      <p:sp>
+        <p:nvSpPr>
+          <p:cNvPr id="4" name="TextBox 3"/>
+          <p:cNvSpPr txBox="1"/>
+          <p:nvPr/>
+        </p:nvSpPr>
+        <p:spPr>
+          <a:xfrm>
+            <a:off x="365760" y="1143000"/>
+            <a:ext cx="2926080" cy="347471"/>
+          </a:xfrm>
+          <a:prstGeom prst="rect">
+            <a:avLst/>
+          </a:prstGeom>
+          <a:noFill/>
+        </p:spPr>
+        <p:txBody>
+          <a:bodyPr wrap="square" lIns="73152" rIns="73152" tIns="54864" bIns="54864">
+            <a:spAutoFit/>
+          </a:bodyPr>
+          <a:lstStyle/>
+          <a:p>
+            <a:pPr algn="ctr">
+              <a:defRPr sz="1300" b="1">
                 <a:solidFill>
                   <a:srgbClr val="FFFFFF"/>
                 </a:solidFill>
@@ -3583,21 +3811,21 @@
               </a:defRPr>
             </a:pPr>
             <a:r>
-              <a:t>Hoàn thành Tiết 3! 🚀</a:t>
-            </a:r>
-          </a:p>
-        </p:txBody>
-      </p:sp>
-      <p:sp>
-        <p:nvSpPr>
-          <p:cNvPr id="4" name="TextBox 3"/>
+              <a:t>HOẠT ĐỘNG KHÁM PHÁ</a:t>
+            </a:r>
+          </a:p>
+        </p:txBody>
+      </p:sp>
+      <p:sp>
+        <p:nvSpPr>
+          <p:cNvPr id="5" name="TextBox 4"/>
           <p:cNvSpPr txBox="1"/>
           <p:nvPr/>
         </p:nvSpPr>
         <p:spPr>
           <a:xfrm>
-            <a:off x="914400" y="3200400"/>
-            <a:ext cx="10360152" cy="914400"/>
+            <a:off x="3474720" y="1115568"/>
+            <a:ext cx="8046720" cy="411479"/>
           </a:xfrm>
           <a:prstGeom prst="rect">
             <a:avLst/>
@@ -3605,25 +3833,326 @@
           <a:noFill/>
         </p:spPr>
         <p:txBody>
-          <a:bodyPr wrap="square" lIns="73152" rIns="73152">
+          <a:bodyPr wrap="square" lIns="73152" rIns="73152" tIns="54864" bIns="54864">
             <a:spAutoFit/>
           </a:bodyPr>
           <a:lstStyle/>
           <a:p>
-            <a:pPr algn="ctr">
-              <a:defRPr sz="2200" b="0">
+            <a:pPr algn="l">
+              <a:defRPr sz="2100" b="1">
                 <a:solidFill>
-                  <a:srgbClr val="FFFFFF"/>
+                  <a:srgbClr val="0C4A6E"/>
                 </a:solidFill>
                 <a:latin typeface="Arial"/>
               </a:defRPr>
             </a:pPr>
             <a:r>
-              <a:t>Chuẩn bị bài tiếp theo: Mạng xã hội (Tiết 4) nhé!</a:t>
-            </a:r>
-          </a:p>
-        </p:txBody>
-      </p:sp>
+              <a:t>Tên tệp và Thư mục trong máy tính</a:t>
+            </a:r>
+          </a:p>
+        </p:txBody>
+      </p:sp>
+      <p:sp>
+        <p:nvSpPr>
+          <p:cNvPr id="6" name="Rounded Rectangle 5"/>
+          <p:cNvSpPr/>
+          <p:nvPr/>
+        </p:nvSpPr>
+        <p:spPr>
+          <a:xfrm>
+            <a:off x="365760" y="1645920"/>
+            <a:ext cx="3840480" cy="3977639"/>
+          </a:xfrm>
+          <a:prstGeom prst="roundRect">
+            <a:avLst/>
+          </a:prstGeom>
+          <a:solidFill>
+            <a:srgbClr val="FFFFFF"/>
+          </a:solidFill>
+          <a:ln w="19050">
+            <a:solidFill>
+              <a:srgbClr val="0EA5E9"/>
+            </a:solidFill>
+          </a:ln>
+        </p:spPr>
+        <p:style>
+          <a:lnRef idx="1">
+            <a:schemeClr val="accent1"/>
+          </a:lnRef>
+          <a:fillRef idx="3">
+            <a:schemeClr val="accent1"/>
+          </a:fillRef>
+          <a:effectRef idx="2">
+            <a:schemeClr val="accent1"/>
+          </a:effectRef>
+          <a:fontRef idx="minor">
+            <a:schemeClr val="lt1"/>
+          </a:fontRef>
+        </p:style>
+        <p:txBody>
+          <a:bodyPr rtlCol="0" anchor="ctr"/>
+          <a:lstStyle/>
+          <a:p>
+            <a:pPr algn="ctr"/>
+          </a:p>
+        </p:txBody>
+      </p:sp>
+      <p:sp>
+        <p:nvSpPr>
+          <p:cNvPr id="7" name="Rounded Rectangle 6"/>
+          <p:cNvSpPr/>
+          <p:nvPr/>
+        </p:nvSpPr>
+        <p:spPr>
+          <a:xfrm>
+            <a:off x="365760" y="1645920"/>
+            <a:ext cx="164592" cy="3977639"/>
+          </a:xfrm>
+          <a:prstGeom prst="roundRect">
+            <a:avLst/>
+          </a:prstGeom>
+          <a:solidFill>
+            <a:srgbClr val="0EA5E9"/>
+          </a:solidFill>
+          <a:ln>
+            <a:noFill/>
+          </a:ln>
+        </p:spPr>
+        <p:style>
+          <a:lnRef idx="1">
+            <a:schemeClr val="accent1"/>
+          </a:lnRef>
+          <a:fillRef idx="3">
+            <a:schemeClr val="accent1"/>
+          </a:fillRef>
+          <a:effectRef idx="2">
+            <a:schemeClr val="accent1"/>
+          </a:effectRef>
+          <a:fontRef idx="minor">
+            <a:schemeClr val="lt1"/>
+          </a:fontRef>
+        </p:style>
+        <p:txBody>
+          <a:bodyPr rtlCol="0" anchor="ctr"/>
+          <a:lstStyle/>
+          <a:p>
+            <a:pPr algn="ctr"/>
+          </a:p>
+        </p:txBody>
+      </p:sp>
+      <p:sp>
+        <p:nvSpPr>
+          <p:cNvPr id="8" name="TextBox 7"/>
+          <p:cNvSpPr txBox="1"/>
+          <p:nvPr/>
+        </p:nvSpPr>
+        <p:spPr>
+          <a:xfrm>
+            <a:off x="640080" y="1783080"/>
+            <a:ext cx="3429000" cy="640080"/>
+          </a:xfrm>
+          <a:prstGeom prst="rect">
+            <a:avLst/>
+          </a:prstGeom>
+          <a:noFill/>
+        </p:spPr>
+        <p:txBody>
+          <a:bodyPr wrap="square" lIns="73152" rIns="73152" tIns="54864" bIns="54864">
+            <a:spAutoFit/>
+          </a:bodyPr>
+          <a:lstStyle/>
+          <a:p>
+            <a:pPr algn="l">
+              <a:defRPr sz="1500" b="1">
+                <a:solidFill>
+                  <a:srgbClr val="0F172A"/>
+                </a:solidFill>
+                <a:latin typeface="Arial"/>
+              </a:defRPr>
+            </a:pPr>
+            <a:r>
+              <a:t>• Tên tệp gồm 2 phần: [Tên chính].[Phần mở rộng]</a:t>
+            </a:r>
+          </a:p>
+        </p:txBody>
+      </p:sp>
+      <p:sp>
+        <p:nvSpPr>
+          <p:cNvPr id="9" name="TextBox 8"/>
+          <p:cNvSpPr txBox="1"/>
+          <p:nvPr/>
+        </p:nvSpPr>
+        <p:spPr>
+          <a:xfrm>
+            <a:off x="640080" y="2468880"/>
+            <a:ext cx="3429000" cy="640080"/>
+          </a:xfrm>
+          <a:prstGeom prst="rect">
+            <a:avLst/>
+          </a:prstGeom>
+          <a:noFill/>
+        </p:spPr>
+        <p:txBody>
+          <a:bodyPr wrap="square" lIns="73152" rIns="73152" tIns="54864" bIns="54864">
+            <a:spAutoFit/>
+          </a:bodyPr>
+          <a:lstStyle/>
+          <a:p>
+            <a:pPr algn="l">
+              <a:defRPr sz="1500" b="1">
+                <a:solidFill>
+                  <a:srgbClr val="0F172A"/>
+                </a:solidFill>
+                <a:latin typeface="Arial"/>
+              </a:defRPr>
+            </a:pPr>
+            <a:r>
+              <a:t>• Phần mở rộng cho biết loại tệp và ứng dụng mở tệp</a:t>
+            </a:r>
+          </a:p>
+        </p:txBody>
+      </p:sp>
+      <p:sp>
+        <p:nvSpPr>
+          <p:cNvPr id="10" name="TextBox 9"/>
+          <p:cNvSpPr txBox="1"/>
+          <p:nvPr/>
+        </p:nvSpPr>
+        <p:spPr>
+          <a:xfrm>
+            <a:off x="640080" y="3154680"/>
+            <a:ext cx="3429000" cy="640080"/>
+          </a:xfrm>
+          <a:prstGeom prst="rect">
+            <a:avLst/>
+          </a:prstGeom>
+          <a:noFill/>
+        </p:spPr>
+        <p:txBody>
+          <a:bodyPr wrap="square" lIns="73152" rIns="73152" tIns="54864" bIns="54864">
+            <a:spAutoFit/>
+          </a:bodyPr>
+          <a:lstStyle/>
+          <a:p>
+            <a:pPr algn="l">
+              <a:defRPr sz="1500" b="1">
+                <a:solidFill>
+                  <a:srgbClr val="0F172A"/>
+                </a:solidFill>
+                <a:latin typeface="Arial"/>
+              </a:defRPr>
+            </a:pPr>
+            <a:r>
+              <a:t>• Đặt tên tệp ngắn gọn, có ý nghĩa, dễ tìm kiếm</a:t>
+            </a:r>
+          </a:p>
+        </p:txBody>
+      </p:sp>
+      <p:sp>
+        <p:nvSpPr>
+          <p:cNvPr id="11" name="TextBox 10"/>
+          <p:cNvSpPr txBox="1"/>
+          <p:nvPr/>
+        </p:nvSpPr>
+        <p:spPr>
+          <a:xfrm>
+            <a:off x="640080" y="3840480"/>
+            <a:ext cx="3429000" cy="640080"/>
+          </a:xfrm>
+          <a:prstGeom prst="rect">
+            <a:avLst/>
+          </a:prstGeom>
+          <a:noFill/>
+        </p:spPr>
+        <p:txBody>
+          <a:bodyPr wrap="square" lIns="73152" rIns="73152" tIns="54864" bIns="54864">
+            <a:spAutoFit/>
+          </a:bodyPr>
+          <a:lstStyle/>
+          <a:p>
+            <a:pPr algn="l">
+              <a:defRPr sz="1500" b="1">
+                <a:solidFill>
+                  <a:srgbClr val="0F172A"/>
+                </a:solidFill>
+                <a:latin typeface="Arial"/>
+              </a:defRPr>
+            </a:pPr>
+            <a:r>
+              <a:t>• Phân loại tệp vào các thư mục theo chủ đề</a:t>
+            </a:r>
+          </a:p>
+        </p:txBody>
+      </p:sp>
+      <p:sp>
+        <p:nvSpPr>
+          <p:cNvPr id="12" name="Rounded Rectangle 11"/>
+          <p:cNvSpPr/>
+          <p:nvPr/>
+        </p:nvSpPr>
+        <p:spPr>
+          <a:xfrm>
+            <a:off x="4480560" y="1645920"/>
+            <a:ext cx="7223760" cy="3977639"/>
+          </a:xfrm>
+          <a:prstGeom prst="roundRect">
+            <a:avLst/>
+          </a:prstGeom>
+          <a:solidFill>
+            <a:srgbClr val="FFFFFF"/>
+          </a:solidFill>
+          <a:ln w="19050">
+            <a:solidFill>
+              <a:srgbClr val="CBD5E1"/>
+            </a:solidFill>
+          </a:ln>
+        </p:spPr>
+        <p:style>
+          <a:lnRef idx="1">
+            <a:schemeClr val="accent1"/>
+          </a:lnRef>
+          <a:fillRef idx="3">
+            <a:schemeClr val="accent1"/>
+          </a:fillRef>
+          <a:effectRef idx="2">
+            <a:schemeClr val="accent1"/>
+          </a:effectRef>
+          <a:fontRef idx="minor">
+            <a:schemeClr val="lt1"/>
+          </a:fontRef>
+        </p:style>
+        <p:txBody>
+          <a:bodyPr rtlCol="0" anchor="ctr"/>
+          <a:lstStyle/>
+          <a:p>
+            <a:pPr algn="ctr"/>
+          </a:p>
+        </p:txBody>
+      </p:sp>
+      <p:pic>
+        <p:nvPicPr>
+          <p:cNvPr id="13" name="Picture 12" descr="sgk_lop7_bai3_hinh31_cay_thu_muc.png"/>
+          <p:cNvPicPr>
+            <a:picLocks noChangeAspect="1"/>
+          </p:cNvPicPr>
+          <p:nvPr/>
+        </p:nvPicPr>
+        <p:blipFill>
+          <a:blip r:embed="rId2"/>
+          <a:stretch>
+            <a:fillRect/>
+          </a:stretch>
+        </p:blipFill>
+        <p:spPr>
+          <a:xfrm>
+            <a:off x="4572000" y="1737360"/>
+            <a:ext cx="7040880" cy="3794760"/>
+          </a:xfrm>
+          <a:prstGeom prst="rect">
+            <a:avLst/>
+          </a:prstGeom>
+        </p:spPr>
+      </p:pic>
     </p:spTree>
   </p:cSld>
   <p:clrMapOvr>
@@ -3635,8 +4164,8 @@
 </p:sld>
 </file>
 
-<file path=ppt/slides/slide2.xml><?xml version="1.0" encoding="utf-8"?>
-<p:sld xmlns:a="http://schemas.openxmlformats.org/drawingml/2006/main" xmlns:r="http://schemas.openxmlformats.org/officeDocument/2006/relationships" xmlns:p="http://schemas.openxmlformats.org/presentationml/2006/main">
+<file path=ppt/slides/slide3.xml><?xml version="1.0" encoding="utf-8"?>
+<p:sld xmlns:a="http://schemas.openxmlformats.org/drawingml/2006/main" xmlns:p="http://schemas.openxmlformats.org/presentationml/2006/main" xmlns:r="http://schemas.openxmlformats.org/officeDocument/2006/relationships">
   <p:cSld>
     <p:spTree>
       <p:nvGrpSpPr>
@@ -3644,237 +4173,642 @@
         <p:cNvGrpSpPr/>
         <p:nvPr/>
       </p:nvGrpSpPr>
-      <p:grpSpPr>
-        <a:xfrm>
-          <a:off x="0" y="0"/>
-          <a:ext cx="0" cy="0"/>
-          <a:chOff x="0" y="0"/>
-          <a:chExt cx="0" cy="0"/>
-        </a:xfrm>
-      </p:grpSpPr>
-      <p:sp>
-        <p:nvSpPr>
-          <p:cNvPr id="2" name="Title 1">
-            <a:extLst>
-              <a:ext uri="{FF2B5EF4-FFF2-40B4-BE49-F238E27FC236}">
-                <a16:creationId xmlns:a16="http://schemas.microsoft.com/office/drawing/2014/main" id="{19A0AB71-A960-5C29-67C4-E061282DF716}"/>
-              </a:ext>
-            </a:extLst>
-          </p:cNvPr>
-          <p:cNvSpPr>
-            <a:spLocks noGrp="1"/>
-          </p:cNvSpPr>
-          <p:nvPr>
-            <p:ph type="title"/>
-          </p:nvPr>
-        </p:nvSpPr>
-        <p:spPr>
-          <a:xfrm>
-            <a:off x="3930315" y="215531"/>
-            <a:ext cx="3826042" cy="861546"/>
-          </a:xfrm>
-        </p:spPr>
-        <p:txBody>
-          <a:bodyPr>
-            <a:normAutofit/>
+      <p:grpSpPr/>
+      <p:sp>
+        <p:nvSpPr>
+          <p:cNvPr id="2" name="Rectangle 1"/>
+          <p:cNvSpPr/>
+          <p:nvPr/>
+        </p:nvSpPr>
+        <p:spPr>
+          <a:xfrm>
+            <a:off x="0" y="1051560"/>
+            <a:ext cx="12188952" cy="4754879"/>
+          </a:xfrm>
+          <a:prstGeom prst="rect">
+            <a:avLst/>
+          </a:prstGeom>
+          <a:solidFill>
+            <a:srgbClr val="F0F9FF"/>
+          </a:solidFill>
+          <a:ln>
+            <a:noFill/>
+          </a:ln>
+        </p:spPr>
+        <p:style>
+          <a:lnRef idx="1">
+            <a:schemeClr val="accent1"/>
+          </a:lnRef>
+          <a:fillRef idx="3">
+            <a:schemeClr val="accent1"/>
+          </a:fillRef>
+          <a:effectRef idx="2">
+            <a:schemeClr val="accent1"/>
+          </a:effectRef>
+          <a:fontRef idx="minor">
+            <a:schemeClr val="lt1"/>
+          </a:fontRef>
+        </p:style>
+        <p:txBody>
+          <a:bodyPr rtlCol="0" anchor="ctr"/>
+          <a:lstStyle/>
+          <a:p>
+            <a:pPr algn="ctr"/>
+          </a:p>
+        </p:txBody>
+      </p:sp>
+      <p:sp>
+        <p:nvSpPr>
+          <p:cNvPr id="3" name="Rounded Rectangle 2"/>
+          <p:cNvSpPr/>
+          <p:nvPr/>
+        </p:nvSpPr>
+        <p:spPr>
+          <a:xfrm>
+            <a:off x="365760" y="1143000"/>
+            <a:ext cx="2926080" cy="347471"/>
+          </a:xfrm>
+          <a:prstGeom prst="roundRect">
+            <a:avLst/>
+          </a:prstGeom>
+          <a:solidFill>
+            <a:srgbClr val="0369A1"/>
+          </a:solidFill>
+          <a:ln>
+            <a:noFill/>
+          </a:ln>
+        </p:spPr>
+        <p:style>
+          <a:lnRef idx="1">
+            <a:schemeClr val="accent1"/>
+          </a:lnRef>
+          <a:fillRef idx="3">
+            <a:schemeClr val="accent1"/>
+          </a:fillRef>
+          <a:effectRef idx="2">
+            <a:schemeClr val="accent1"/>
+          </a:effectRef>
+          <a:fontRef idx="minor">
+            <a:schemeClr val="lt1"/>
+          </a:fontRef>
+        </p:style>
+        <p:txBody>
+          <a:bodyPr rtlCol="0" anchor="ctr"/>
+          <a:lstStyle/>
+          <a:p>
+            <a:pPr algn="ctr"/>
+          </a:p>
+        </p:txBody>
+      </p:sp>
+      <p:sp>
+        <p:nvSpPr>
+          <p:cNvPr id="4" name="TextBox 3"/>
+          <p:cNvSpPr txBox="1"/>
+          <p:nvPr/>
+        </p:nvSpPr>
+        <p:spPr>
+          <a:xfrm>
+            <a:off x="365760" y="1143000"/>
+            <a:ext cx="2926080" cy="347471"/>
+          </a:xfrm>
+          <a:prstGeom prst="rect">
+            <a:avLst/>
+          </a:prstGeom>
+          <a:noFill/>
+        </p:spPr>
+        <p:txBody>
+          <a:bodyPr wrap="square" lIns="73152" rIns="73152" tIns="54864" bIns="54864">
+            <a:spAutoFit/>
           </a:bodyPr>
           <a:lstStyle/>
           <a:p>
-            <a:r>
-              <a:rPr lang="en-US" dirty="0">
+            <a:pPr algn="ctr">
+              <a:defRPr sz="1300" b="1">
                 <a:solidFill>
-                  <a:schemeClr val="tx2">
-                    <a:lumMod val="75000"/>
-                    <a:lumOff val="25000"/>
-                  </a:schemeClr>
+                  <a:srgbClr val="FFFFFF"/>
                 </a:solidFill>
-              </a:rPr>
-              <a:t>Môn Tin </a:t>
-            </a:r>
-            <a:r>
-              <a:rPr lang="en-US" dirty="0" err="1">
+                <a:latin typeface="Arial"/>
+              </a:defRPr>
+            </a:pPr>
+            <a:r>
+              <a:t>QUY TRÌNH &amp; THAO TÁC</a:t>
+            </a:r>
+          </a:p>
+        </p:txBody>
+      </p:sp>
+      <p:sp>
+        <p:nvSpPr>
+          <p:cNvPr id="5" name="TextBox 4"/>
+          <p:cNvSpPr txBox="1"/>
+          <p:nvPr/>
+        </p:nvSpPr>
+        <p:spPr>
+          <a:xfrm>
+            <a:off x="3474720" y="1115568"/>
+            <a:ext cx="8046720" cy="411479"/>
+          </a:xfrm>
+          <a:prstGeom prst="rect">
+            <a:avLst/>
+          </a:prstGeom>
+          <a:noFill/>
+        </p:spPr>
+        <p:txBody>
+          <a:bodyPr wrap="square" lIns="73152" rIns="73152" tIns="54864" bIns="54864">
+            <a:spAutoFit/>
+          </a:bodyPr>
+          <a:lstStyle/>
+          <a:p>
+            <a:pPr algn="l">
+              <a:defRPr sz="2100" b="1">
                 <a:solidFill>
-                  <a:schemeClr val="tx2">
-                    <a:lumMod val="75000"/>
-                    <a:lumOff val="25000"/>
-                  </a:schemeClr>
+                  <a:srgbClr val="0C4A6E"/>
                 </a:solidFill>
-              </a:rPr>
-              <a:t>học</a:t>
-            </a:r>
-            <a:r>
-              <a:rPr lang="en-US" dirty="0">
+                <a:latin typeface="Arial"/>
+              </a:defRPr>
+            </a:pPr>
+            <a:r>
+              <a:t>Các phần mở rộng tệp (File Extensions) thông dụng</a:t>
+            </a:r>
+          </a:p>
+        </p:txBody>
+      </p:sp>
+      <p:sp>
+        <p:nvSpPr>
+          <p:cNvPr id="6" name="Chevron 5"/>
+          <p:cNvSpPr/>
+          <p:nvPr/>
+        </p:nvSpPr>
+        <p:spPr>
+          <a:xfrm>
+            <a:off x="365760" y="1645920"/>
+            <a:ext cx="4754880" cy="685799"/>
+          </a:xfrm>
+          <a:prstGeom prst="chevron">
+            <a:avLst/>
+          </a:prstGeom>
+          <a:solidFill>
+            <a:srgbClr val="0369A1"/>
+          </a:solidFill>
+          <a:ln>
+            <a:noFill/>
+          </a:ln>
+        </p:spPr>
+        <p:style>
+          <a:lnRef idx="1">
+            <a:schemeClr val="accent1"/>
+          </a:lnRef>
+          <a:fillRef idx="3">
+            <a:schemeClr val="accent1"/>
+          </a:fillRef>
+          <a:effectRef idx="2">
+            <a:schemeClr val="accent1"/>
+          </a:effectRef>
+          <a:fontRef idx="minor">
+            <a:schemeClr val="lt1"/>
+          </a:fontRef>
+        </p:style>
+        <p:txBody>
+          <a:bodyPr rtlCol="0" anchor="ctr"/>
+          <a:lstStyle/>
+          <a:p>
+            <a:pPr algn="ctr"/>
+          </a:p>
+        </p:txBody>
+      </p:sp>
+      <p:sp>
+        <p:nvSpPr>
+          <p:cNvPr id="7" name="TextBox 6"/>
+          <p:cNvSpPr txBox="1"/>
+          <p:nvPr/>
+        </p:nvSpPr>
+        <p:spPr>
+          <a:xfrm>
+            <a:off x="640080" y="1719072"/>
+            <a:ext cx="4206240" cy="548639"/>
+          </a:xfrm>
+          <a:prstGeom prst="rect">
+            <a:avLst/>
+          </a:prstGeom>
+          <a:noFill/>
+        </p:spPr>
+        <p:txBody>
+          <a:bodyPr wrap="square" lIns="73152" rIns="73152" tIns="54864" bIns="54864">
+            <a:spAutoFit/>
+          </a:bodyPr>
+          <a:lstStyle/>
+          <a:p>
+            <a:pPr algn="l">
+              <a:defRPr sz="1400" b="1">
                 <a:solidFill>
-                  <a:schemeClr val="tx2">
-                    <a:lumMod val="75000"/>
-                    <a:lumOff val="25000"/>
-                  </a:schemeClr>
+                  <a:srgbClr val="FFFFFF"/>
                 </a:solidFill>
-              </a:rPr>
-              <a:t> </a:t>
-            </a:r>
-            <a:r>
-              <a:rPr lang="en-US" dirty="0" err="1">
+                <a:latin typeface="Arial"/>
+              </a:defRPr>
+            </a:pPr>
+            <a:r>
+              <a:t>.docx / .pdf: Tệp văn bản và tài liệu</a:t>
+            </a:r>
+          </a:p>
+        </p:txBody>
+      </p:sp>
+      <p:sp>
+        <p:nvSpPr>
+          <p:cNvPr id="8" name="Chevron 7"/>
+          <p:cNvSpPr/>
+          <p:nvPr/>
+        </p:nvSpPr>
+        <p:spPr>
+          <a:xfrm>
+            <a:off x="365760" y="2441448"/>
+            <a:ext cx="4754880" cy="685800"/>
+          </a:xfrm>
+          <a:prstGeom prst="chevron">
+            <a:avLst/>
+          </a:prstGeom>
+          <a:solidFill>
+            <a:srgbClr val="0EA5E9"/>
+          </a:solidFill>
+          <a:ln>
+            <a:noFill/>
+          </a:ln>
+        </p:spPr>
+        <p:style>
+          <a:lnRef idx="1">
+            <a:schemeClr val="accent1"/>
+          </a:lnRef>
+          <a:fillRef idx="3">
+            <a:schemeClr val="accent1"/>
+          </a:fillRef>
+          <a:effectRef idx="2">
+            <a:schemeClr val="accent1"/>
+          </a:effectRef>
+          <a:fontRef idx="minor">
+            <a:schemeClr val="lt1"/>
+          </a:fontRef>
+        </p:style>
+        <p:txBody>
+          <a:bodyPr rtlCol="0" anchor="ctr"/>
+          <a:lstStyle/>
+          <a:p>
+            <a:pPr algn="ctr"/>
+          </a:p>
+        </p:txBody>
+      </p:sp>
+      <p:sp>
+        <p:nvSpPr>
+          <p:cNvPr id="9" name="TextBox 8"/>
+          <p:cNvSpPr txBox="1"/>
+          <p:nvPr/>
+        </p:nvSpPr>
+        <p:spPr>
+          <a:xfrm>
+            <a:off x="640080" y="2514600"/>
+            <a:ext cx="4206240" cy="548640"/>
+          </a:xfrm>
+          <a:prstGeom prst="rect">
+            <a:avLst/>
+          </a:prstGeom>
+          <a:noFill/>
+        </p:spPr>
+        <p:txBody>
+          <a:bodyPr wrap="square" lIns="73152" rIns="73152" tIns="54864" bIns="54864">
+            <a:spAutoFit/>
+          </a:bodyPr>
+          <a:lstStyle/>
+          <a:p>
+            <a:pPr algn="l">
+              <a:defRPr sz="1400" b="1">
                 <a:solidFill>
-                  <a:schemeClr val="tx2">
-                    <a:lumMod val="75000"/>
-                    <a:lumOff val="25000"/>
-                  </a:schemeClr>
+                  <a:srgbClr val="FFFFFF"/>
                 </a:solidFill>
-              </a:rPr>
-              <a:t>lớp</a:t>
-            </a:r>
-            <a:r>
-              <a:rPr lang="en-US" dirty="0">
+                <a:latin typeface="Arial"/>
+              </a:defRPr>
+            </a:pPr>
+            <a:r>
+              <a:t>.xlsx: Tệp bảng tính điện tử Excel</a:t>
+            </a:r>
+          </a:p>
+        </p:txBody>
+      </p:sp>
+      <p:sp>
+        <p:nvSpPr>
+          <p:cNvPr id="10" name="Chevron 9"/>
+          <p:cNvSpPr/>
+          <p:nvPr/>
+        </p:nvSpPr>
+        <p:spPr>
+          <a:xfrm>
+            <a:off x="365760" y="3236976"/>
+            <a:ext cx="4754880" cy="685800"/>
+          </a:xfrm>
+          <a:prstGeom prst="chevron">
+            <a:avLst/>
+          </a:prstGeom>
+          <a:solidFill>
+            <a:srgbClr val="0D9488"/>
+          </a:solidFill>
+          <a:ln>
+            <a:noFill/>
+          </a:ln>
+        </p:spPr>
+        <p:style>
+          <a:lnRef idx="1">
+            <a:schemeClr val="accent1"/>
+          </a:lnRef>
+          <a:fillRef idx="3">
+            <a:schemeClr val="accent1"/>
+          </a:fillRef>
+          <a:effectRef idx="2">
+            <a:schemeClr val="accent1"/>
+          </a:effectRef>
+          <a:fontRef idx="minor">
+            <a:schemeClr val="lt1"/>
+          </a:fontRef>
+        </p:style>
+        <p:txBody>
+          <a:bodyPr rtlCol="0" anchor="ctr"/>
+          <a:lstStyle/>
+          <a:p>
+            <a:pPr algn="ctr"/>
+          </a:p>
+        </p:txBody>
+      </p:sp>
+      <p:sp>
+        <p:nvSpPr>
+          <p:cNvPr id="11" name="TextBox 10"/>
+          <p:cNvSpPr txBox="1"/>
+          <p:nvPr/>
+        </p:nvSpPr>
+        <p:spPr>
+          <a:xfrm>
+            <a:off x="640080" y="3310128"/>
+            <a:ext cx="4206240" cy="548639"/>
+          </a:xfrm>
+          <a:prstGeom prst="rect">
+            <a:avLst/>
+          </a:prstGeom>
+          <a:noFill/>
+        </p:spPr>
+        <p:txBody>
+          <a:bodyPr wrap="square" lIns="73152" rIns="73152" tIns="54864" bIns="54864">
+            <a:spAutoFit/>
+          </a:bodyPr>
+          <a:lstStyle/>
+          <a:p>
+            <a:pPr algn="l">
+              <a:defRPr sz="1400" b="1">
                 <a:solidFill>
-                  <a:schemeClr val="tx2">
-                    <a:lumMod val="75000"/>
-                    <a:lumOff val="25000"/>
-                  </a:schemeClr>
+                  <a:srgbClr val="FFFFFF"/>
                 </a:solidFill>
-              </a:rPr>
-              <a:t> </a:t>
-            </a:r>
-          </a:p>
-        </p:txBody>
-      </p:sp>
+                <a:latin typeface="Arial"/>
+              </a:defRPr>
+            </a:pPr>
+            <a:r>
+              <a:t>.pptx: Tệp bài trình chiếu PowerPoint</a:t>
+            </a:r>
+          </a:p>
+        </p:txBody>
+      </p:sp>
+      <p:sp>
+        <p:nvSpPr>
+          <p:cNvPr id="12" name="Chevron 11"/>
+          <p:cNvSpPr/>
+          <p:nvPr/>
+        </p:nvSpPr>
+        <p:spPr>
+          <a:xfrm>
+            <a:off x="365760" y="4032504"/>
+            <a:ext cx="4754880" cy="685800"/>
+          </a:xfrm>
+          <a:prstGeom prst="chevron">
+            <a:avLst/>
+          </a:prstGeom>
+          <a:solidFill>
+            <a:srgbClr val="D97706"/>
+          </a:solidFill>
+          <a:ln>
+            <a:noFill/>
+          </a:ln>
+        </p:spPr>
+        <p:style>
+          <a:lnRef idx="1">
+            <a:schemeClr val="accent1"/>
+          </a:lnRef>
+          <a:fillRef idx="3">
+            <a:schemeClr val="accent1"/>
+          </a:fillRef>
+          <a:effectRef idx="2">
+            <a:schemeClr val="accent1"/>
+          </a:effectRef>
+          <a:fontRef idx="minor">
+            <a:schemeClr val="lt1"/>
+          </a:fontRef>
+        </p:style>
+        <p:txBody>
+          <a:bodyPr rtlCol="0" anchor="ctr"/>
+          <a:lstStyle/>
+          <a:p>
+            <a:pPr algn="ctr"/>
+          </a:p>
+        </p:txBody>
+      </p:sp>
+      <p:sp>
+        <p:nvSpPr>
+          <p:cNvPr id="13" name="TextBox 12"/>
+          <p:cNvSpPr txBox="1"/>
+          <p:nvPr/>
+        </p:nvSpPr>
+        <p:spPr>
+          <a:xfrm>
+            <a:off x="640080" y="4105656"/>
+            <a:ext cx="4206240" cy="548639"/>
+          </a:xfrm>
+          <a:prstGeom prst="rect">
+            <a:avLst/>
+          </a:prstGeom>
+          <a:noFill/>
+        </p:spPr>
+        <p:txBody>
+          <a:bodyPr wrap="square" lIns="73152" rIns="73152" tIns="54864" bIns="54864">
+            <a:spAutoFit/>
+          </a:bodyPr>
+          <a:lstStyle/>
+          <a:p>
+            <a:pPr algn="l">
+              <a:defRPr sz="1400" b="1">
+                <a:solidFill>
+                  <a:srgbClr val="FFFFFF"/>
+                </a:solidFill>
+                <a:latin typeface="Arial"/>
+              </a:defRPr>
+            </a:pPr>
+            <a:r>
+              <a:t>.jpg / .png: Tệp hình ảnh đồ họa</a:t>
+            </a:r>
+          </a:p>
+        </p:txBody>
+      </p:sp>
+      <p:sp>
+        <p:nvSpPr>
+          <p:cNvPr id="14" name="Chevron 13"/>
+          <p:cNvSpPr/>
+          <p:nvPr/>
+        </p:nvSpPr>
+        <p:spPr>
+          <a:xfrm>
+            <a:off x="365760" y="4828032"/>
+            <a:ext cx="4754880" cy="685800"/>
+          </a:xfrm>
+          <a:prstGeom prst="chevron">
+            <a:avLst/>
+          </a:prstGeom>
+          <a:solidFill>
+            <a:srgbClr val="7C3AED"/>
+          </a:solidFill>
+          <a:ln>
+            <a:noFill/>
+          </a:ln>
+        </p:spPr>
+        <p:style>
+          <a:lnRef idx="1">
+            <a:schemeClr val="accent1"/>
+          </a:lnRef>
+          <a:fillRef idx="3">
+            <a:schemeClr val="accent1"/>
+          </a:fillRef>
+          <a:effectRef idx="2">
+            <a:schemeClr val="accent1"/>
+          </a:effectRef>
+          <a:fontRef idx="minor">
+            <a:schemeClr val="lt1"/>
+          </a:fontRef>
+        </p:style>
+        <p:txBody>
+          <a:bodyPr rtlCol="0" anchor="ctr"/>
+          <a:lstStyle/>
+          <a:p>
+            <a:pPr algn="ctr"/>
+          </a:p>
+        </p:txBody>
+      </p:sp>
+      <p:sp>
+        <p:nvSpPr>
+          <p:cNvPr id="15" name="TextBox 14"/>
+          <p:cNvSpPr txBox="1"/>
+          <p:nvPr/>
+        </p:nvSpPr>
+        <p:spPr>
+          <a:xfrm>
+            <a:off x="640080" y="4901184"/>
+            <a:ext cx="4206240" cy="548639"/>
+          </a:xfrm>
+          <a:prstGeom prst="rect">
+            <a:avLst/>
+          </a:prstGeom>
+          <a:noFill/>
+        </p:spPr>
+        <p:txBody>
+          <a:bodyPr wrap="square" lIns="73152" rIns="73152" tIns="54864" bIns="54864">
+            <a:spAutoFit/>
+          </a:bodyPr>
+          <a:lstStyle/>
+          <a:p>
+            <a:pPr algn="l">
+              <a:defRPr sz="1400" b="1">
+                <a:solidFill>
+                  <a:srgbClr val="FFFFFF"/>
+                </a:solidFill>
+                <a:latin typeface="Arial"/>
+              </a:defRPr>
+            </a:pPr>
+            <a:r>
+              <a:t>.mp3 / .mp4: Tệp âm thanh và video đa phương tiện</a:t>
+            </a:r>
+          </a:p>
+        </p:txBody>
+      </p:sp>
+      <p:sp>
+        <p:nvSpPr>
+          <p:cNvPr id="16" name="Rounded Rectangle 15"/>
+          <p:cNvSpPr/>
+          <p:nvPr/>
+        </p:nvSpPr>
+        <p:spPr>
+          <a:xfrm>
+            <a:off x="5394960" y="1645920"/>
+            <a:ext cx="6309360" cy="3977639"/>
+          </a:xfrm>
+          <a:prstGeom prst="roundRect">
+            <a:avLst/>
+          </a:prstGeom>
+          <a:solidFill>
+            <a:srgbClr val="FFFFFF"/>
+          </a:solidFill>
+          <a:ln w="19050">
+            <a:solidFill>
+              <a:srgbClr val="CBD5E1"/>
+            </a:solidFill>
+          </a:ln>
+        </p:spPr>
+        <p:style>
+          <a:lnRef idx="1">
+            <a:schemeClr val="accent1"/>
+          </a:lnRef>
+          <a:fillRef idx="3">
+            <a:schemeClr val="accent1"/>
+          </a:fillRef>
+          <a:effectRef idx="2">
+            <a:schemeClr val="accent1"/>
+          </a:effectRef>
+          <a:fontRef idx="minor">
+            <a:schemeClr val="lt1"/>
+          </a:fontRef>
+        </p:style>
+        <p:txBody>
+          <a:bodyPr rtlCol="0" anchor="ctr"/>
+          <a:lstStyle/>
+          <a:p>
+            <a:pPr algn="ctr"/>
+          </a:p>
+        </p:txBody>
+      </p:sp>
+      <p:pic>
+        <p:nvPicPr>
+          <p:cNvPr id="17" name="Picture 16" descr="sgk_lop7_bai3_hinh32_duoi_mo_rong_tep.png"/>
+          <p:cNvPicPr>
+            <a:picLocks noChangeAspect="1"/>
+          </p:cNvPicPr>
+          <p:nvPr/>
+        </p:nvPicPr>
+        <p:blipFill>
+          <a:blip r:embed="rId2"/>
+          <a:stretch>
+            <a:fillRect/>
+          </a:stretch>
+        </p:blipFill>
+        <p:spPr>
+          <a:xfrm>
+            <a:off x="5486400" y="1737360"/>
+            <a:ext cx="6126480" cy="3794760"/>
+          </a:xfrm>
+          <a:prstGeom prst="rect">
+            <a:avLst/>
+          </a:prstGeom>
+        </p:spPr>
+      </p:pic>
     </p:spTree>
-    <p:extLst>
-      <p:ext uri="{BB962C8B-B14F-4D97-AF65-F5344CB8AC3E}">
-        <p14:creationId xmlns:p14="http://schemas.microsoft.com/office/powerpoint/2010/main" val="2914658586"/>
-      </p:ext>
-    </p:extLst>
   </p:cSld>
   <p:clrMapOvr>
     <a:masterClrMapping/>
   </p:clrMapOvr>
-</p:sld>
-</file>
-
-<file path=ppt/slides/slide3.xml><?xml version="1.0" encoding="utf-8"?>
-<p:sld xmlns:a="http://schemas.openxmlformats.org/drawingml/2006/main" xmlns:r="http://schemas.openxmlformats.org/officeDocument/2006/relationships" xmlns:p="http://schemas.openxmlformats.org/presentationml/2006/main">
-  <p:cSld>
-    <p:spTree>
-      <p:nvGrpSpPr>
-        <p:cNvPr id="1" name="">
-          <a:extLst>
-            <a:ext uri="{FF2B5EF4-FFF2-40B4-BE49-F238E27FC236}">
-              <a16:creationId xmlns:a16="http://schemas.microsoft.com/office/drawing/2014/main" id="{D3F3F47A-2A03-62D2-8A5D-F03932A437A1}"/>
-            </a:ext>
-          </a:extLst>
-        </p:cNvPr>
-        <p:cNvGrpSpPr/>
-        <p:nvPr/>
-      </p:nvGrpSpPr>
-      <p:grpSpPr>
-        <a:xfrm>
-          <a:off x="0" y="0"/>
-          <a:ext cx="0" cy="0"/>
-          <a:chOff x="0" y="0"/>
-          <a:chExt cx="0" cy="0"/>
-        </a:xfrm>
-      </p:grpSpPr>
-      <p:sp>
-        <p:nvSpPr>
-          <p:cNvPr id="2" name="Title 1">
-            <a:extLst>
-              <a:ext uri="{FF2B5EF4-FFF2-40B4-BE49-F238E27FC236}">
-                <a16:creationId xmlns:a16="http://schemas.microsoft.com/office/drawing/2014/main" id="{32DE052A-67C4-3C30-0BE8-A144FDC576E8}"/>
-              </a:ext>
-            </a:extLst>
-          </p:cNvPr>
-          <p:cNvSpPr>
-            <a:spLocks noGrp="1"/>
-          </p:cNvSpPr>
-          <p:nvPr>
-            <p:ph type="title"/>
-          </p:nvPr>
-        </p:nvSpPr>
-        <p:spPr>
-          <a:xfrm>
-            <a:off x="3605463" y="335847"/>
-            <a:ext cx="3826042" cy="861546"/>
-          </a:xfrm>
-        </p:spPr>
-        <p:txBody>
-          <a:bodyPr>
-            <a:normAutofit/>
-          </a:bodyPr>
-          <a:lstStyle/>
-          <a:p>
-            <a:r>
-              <a:rPr lang="en-US" dirty="0">
-                <a:solidFill>
-                  <a:schemeClr val="tx2">
-                    <a:lumMod val="75000"/>
-                    <a:lumOff val="25000"/>
-                  </a:schemeClr>
-                </a:solidFill>
-              </a:rPr>
-              <a:t>Môn Tin </a:t>
-            </a:r>
-            <a:r>
-              <a:rPr lang="en-US" dirty="0" err="1">
-                <a:solidFill>
-                  <a:schemeClr val="tx2">
-                    <a:lumMod val="75000"/>
-                    <a:lumOff val="25000"/>
-                  </a:schemeClr>
-                </a:solidFill>
-              </a:rPr>
-              <a:t>học</a:t>
-            </a:r>
-            <a:r>
-              <a:rPr lang="en-US" dirty="0">
-                <a:solidFill>
-                  <a:schemeClr val="tx2">
-                    <a:lumMod val="75000"/>
-                    <a:lumOff val="25000"/>
-                  </a:schemeClr>
-                </a:solidFill>
-              </a:rPr>
-              <a:t> </a:t>
-            </a:r>
-            <a:r>
-              <a:rPr lang="en-US" dirty="0" err="1">
-                <a:solidFill>
-                  <a:schemeClr val="tx2">
-                    <a:lumMod val="75000"/>
-                    <a:lumOff val="25000"/>
-                  </a:schemeClr>
-                </a:solidFill>
-              </a:rPr>
-              <a:t>lớp</a:t>
-            </a:r>
-            <a:r>
-              <a:rPr lang="en-US" dirty="0">
-                <a:solidFill>
-                  <a:schemeClr val="tx2">
-                    <a:lumMod val="75000"/>
-                    <a:lumOff val="25000"/>
-                  </a:schemeClr>
-                </a:solidFill>
-              </a:rPr>
-              <a:t> </a:t>
-            </a:r>
-          </a:p>
-        </p:txBody>
-      </p:sp>
-    </p:spTree>
-    <p:extLst>
-      <p:ext uri="{BB962C8B-B14F-4D97-AF65-F5344CB8AC3E}">
-        <p14:creationId xmlns:p14="http://schemas.microsoft.com/office/powerpoint/2010/main" val="504304636"/>
-      </p:ext>
-    </p:extLst>
-  </p:cSld>
-  <p:clrMapOvr>
-    <a:masterClrMapping/>
-  </p:clrMapOvr>
+  <p:transition spd="med">
+    <p:fade/>
+  </p:transition>
 </p:sld>
 </file>
 
 <file path=ppt/slides/slide4.xml><?xml version="1.0" encoding="utf-8"?>
-<p:sld xmlns:a="http://schemas.openxmlformats.org/drawingml/2006/main" xmlns:r="http://schemas.openxmlformats.org/officeDocument/2006/relationships" xmlns:p="http://schemas.openxmlformats.org/presentationml/2006/main">
+<p:sld xmlns:a="http://schemas.openxmlformats.org/drawingml/2006/main" xmlns:p="http://schemas.openxmlformats.org/presentationml/2006/main" xmlns:r="http://schemas.openxmlformats.org/officeDocument/2006/relationships">
   <p:cSld>
     <p:spTree>
       <p:nvGrpSpPr>
@@ -3882,73 +4816,474 @@
         <p:cNvGrpSpPr/>
         <p:nvPr/>
       </p:nvGrpSpPr>
-      <p:grpSpPr>
-        <a:xfrm>
-          <a:off x="0" y="0"/>
-          <a:ext cx="0" cy="0"/>
-          <a:chOff x="0" y="0"/>
-          <a:chExt cx="0" cy="0"/>
-        </a:xfrm>
-      </p:grpSpPr>
-      <p:sp>
-        <p:nvSpPr>
-          <p:cNvPr id="9" name="TextBox 39">
-            <a:extLst>
-              <a:ext uri="{FF2B5EF4-FFF2-40B4-BE49-F238E27FC236}">
-                <a16:creationId xmlns:a16="http://schemas.microsoft.com/office/drawing/2014/main" id="{9F8C78EA-1C6B-6C35-6191-129F37672DA8}"/>
-              </a:ext>
-            </a:extLst>
-          </p:cNvPr>
-          <p:cNvSpPr txBox="1"/>
-          <p:nvPr/>
-        </p:nvSpPr>
-        <p:spPr>
-          <a:xfrm>
-            <a:off x="320174" y="2413337"/>
-            <a:ext cx="11551651" cy="1015663"/>
+      <p:grpSpPr/>
+      <p:sp>
+        <p:nvSpPr>
+          <p:cNvPr id="2" name="Rectangle 1"/>
+          <p:cNvSpPr/>
+          <p:nvPr/>
+        </p:nvSpPr>
+        <p:spPr>
+          <a:xfrm>
+            <a:off x="0" y="1051560"/>
+            <a:ext cx="12188952" cy="4754879"/>
           </a:xfrm>
           <a:prstGeom prst="rect">
             <a:avLst/>
           </a:prstGeom>
+          <a:solidFill>
+            <a:srgbClr val="F0F9FF"/>
+          </a:solidFill>
           <a:ln>
             <a:noFill/>
           </a:ln>
         </p:spPr>
-        <p:txBody>
-          <a:bodyPr wrap="square" lIns="0" tIns="0" rIns="0" bIns="0" rtlCol="0" anchor="t">
+        <p:style>
+          <a:lnRef idx="1">
+            <a:schemeClr val="accent1"/>
+          </a:lnRef>
+          <a:fillRef idx="3">
+            <a:schemeClr val="accent1"/>
+          </a:fillRef>
+          <a:effectRef idx="2">
+            <a:schemeClr val="accent1"/>
+          </a:effectRef>
+          <a:fontRef idx="minor">
+            <a:schemeClr val="lt1"/>
+          </a:fontRef>
+        </p:style>
+        <p:txBody>
+          <a:bodyPr rtlCol="0" anchor="ctr"/>
+          <a:lstStyle/>
+          <a:p>
+            <a:pPr algn="ctr"/>
+          </a:p>
+        </p:txBody>
+      </p:sp>
+      <p:sp>
+        <p:nvSpPr>
+          <p:cNvPr id="3" name="Rounded Rectangle 2"/>
+          <p:cNvSpPr/>
+          <p:nvPr/>
+        </p:nvSpPr>
+        <p:spPr>
+          <a:xfrm>
+            <a:off x="365760" y="1143000"/>
+            <a:ext cx="2926080" cy="347471"/>
+          </a:xfrm>
+          <a:prstGeom prst="roundRect">
+            <a:avLst/>
+          </a:prstGeom>
+          <a:solidFill>
+            <a:srgbClr val="0369A1"/>
+          </a:solidFill>
+          <a:ln>
+            <a:noFill/>
+          </a:ln>
+        </p:spPr>
+        <p:style>
+          <a:lnRef idx="1">
+            <a:schemeClr val="accent1"/>
+          </a:lnRef>
+          <a:fillRef idx="3">
+            <a:schemeClr val="accent1"/>
+          </a:fillRef>
+          <a:effectRef idx="2">
+            <a:schemeClr val="accent1"/>
+          </a:effectRef>
+          <a:fontRef idx="minor">
+            <a:schemeClr val="lt1"/>
+          </a:fontRef>
+        </p:style>
+        <p:txBody>
+          <a:bodyPr rtlCol="0" anchor="ctr"/>
+          <a:lstStyle/>
+          <a:p>
+            <a:pPr algn="ctr"/>
+          </a:p>
+        </p:txBody>
+      </p:sp>
+      <p:sp>
+        <p:nvSpPr>
+          <p:cNvPr id="4" name="TextBox 3"/>
+          <p:cNvSpPr txBox="1"/>
+          <p:nvPr/>
+        </p:nvSpPr>
+        <p:spPr>
+          <a:xfrm>
+            <a:off x="365760" y="1143000"/>
+            <a:ext cx="2926080" cy="347471"/>
+          </a:xfrm>
+          <a:prstGeom prst="rect">
+            <a:avLst/>
+          </a:prstGeom>
+          <a:noFill/>
+        </p:spPr>
+        <p:txBody>
+          <a:bodyPr wrap="square" lIns="73152" rIns="73152" tIns="54864" bIns="54864">
             <a:spAutoFit/>
           </a:bodyPr>
           <a:lstStyle/>
           <a:p>
+            <a:pPr algn="ctr">
+              <a:defRPr sz="1300" b="1">
+                <a:solidFill>
+                  <a:srgbClr val="FFFFFF"/>
+                </a:solidFill>
+                <a:latin typeface="Arial"/>
+              </a:defRPr>
+            </a:pPr>
+            <a:r>
+              <a:t>HOẠT ĐỘNG KHÁM PHÁ</a:t>
+            </a:r>
+          </a:p>
+        </p:txBody>
+      </p:sp>
+      <p:sp>
+        <p:nvSpPr>
+          <p:cNvPr id="5" name="TextBox 4"/>
+          <p:cNvSpPr txBox="1"/>
+          <p:nvPr/>
+        </p:nvSpPr>
+        <p:spPr>
+          <a:xfrm>
+            <a:off x="3474720" y="1115568"/>
+            <a:ext cx="8046720" cy="411479"/>
+          </a:xfrm>
+          <a:prstGeom prst="rect">
+            <a:avLst/>
+          </a:prstGeom>
+          <a:noFill/>
+        </p:spPr>
+        <p:txBody>
+          <a:bodyPr wrap="square" lIns="73152" rIns="73152" tIns="54864" bIns="54864">
+            <a:spAutoFit/>
+          </a:bodyPr>
+          <a:lstStyle/>
+          <a:p>
+            <a:pPr algn="l">
+              <a:defRPr sz="2100" b="1">
+                <a:solidFill>
+                  <a:srgbClr val="0C4A6E"/>
+                </a:solidFill>
+                <a:latin typeface="Arial"/>
+              </a:defRPr>
+            </a:pPr>
+            <a:r>
+              <a:t>Các thao tác quản lý tệp và thư mục cơ bản</a:t>
+            </a:r>
+          </a:p>
+        </p:txBody>
+      </p:sp>
+      <p:sp>
+        <p:nvSpPr>
+          <p:cNvPr id="6" name="Rounded Rectangle 5"/>
+          <p:cNvSpPr/>
+          <p:nvPr/>
+        </p:nvSpPr>
+        <p:spPr>
+          <a:xfrm>
+            <a:off x="365760" y="1645920"/>
+            <a:ext cx="3840480" cy="3977639"/>
+          </a:xfrm>
+          <a:prstGeom prst="roundRect">
+            <a:avLst/>
+          </a:prstGeom>
+          <a:solidFill>
+            <a:srgbClr val="FFFFFF"/>
+          </a:solidFill>
+          <a:ln w="19050">
+            <a:solidFill>
+              <a:srgbClr val="0EA5E9"/>
+            </a:solidFill>
+          </a:ln>
+        </p:spPr>
+        <p:style>
+          <a:lnRef idx="1">
+            <a:schemeClr val="accent1"/>
+          </a:lnRef>
+          <a:fillRef idx="3">
+            <a:schemeClr val="accent1"/>
+          </a:fillRef>
+          <a:effectRef idx="2">
+            <a:schemeClr val="accent1"/>
+          </a:effectRef>
+          <a:fontRef idx="minor">
+            <a:schemeClr val="lt1"/>
+          </a:fontRef>
+        </p:style>
+        <p:txBody>
+          <a:bodyPr rtlCol="0" anchor="ctr"/>
+          <a:lstStyle/>
+          <a:p>
             <a:pPr algn="ctr"/>
-            <a:r>
-              <a:rPr lang="en-US" sz="6600" dirty="0">
+          </a:p>
+        </p:txBody>
+      </p:sp>
+      <p:sp>
+        <p:nvSpPr>
+          <p:cNvPr id="7" name="Rounded Rectangle 6"/>
+          <p:cNvSpPr/>
+          <p:nvPr/>
+        </p:nvSpPr>
+        <p:spPr>
+          <a:xfrm>
+            <a:off x="365760" y="1645920"/>
+            <a:ext cx="164592" cy="3977639"/>
+          </a:xfrm>
+          <a:prstGeom prst="roundRect">
+            <a:avLst/>
+          </a:prstGeom>
+          <a:solidFill>
+            <a:srgbClr val="0EA5E9"/>
+          </a:solidFill>
+          <a:ln>
+            <a:noFill/>
+          </a:ln>
+        </p:spPr>
+        <p:style>
+          <a:lnRef idx="1">
+            <a:schemeClr val="accent1"/>
+          </a:lnRef>
+          <a:fillRef idx="3">
+            <a:schemeClr val="accent1"/>
+          </a:fillRef>
+          <a:effectRef idx="2">
+            <a:schemeClr val="accent1"/>
+          </a:effectRef>
+          <a:fontRef idx="minor">
+            <a:schemeClr val="lt1"/>
+          </a:fontRef>
+        </p:style>
+        <p:txBody>
+          <a:bodyPr rtlCol="0" anchor="ctr"/>
+          <a:lstStyle/>
+          <a:p>
+            <a:pPr algn="ctr"/>
+          </a:p>
+        </p:txBody>
+      </p:sp>
+      <p:sp>
+        <p:nvSpPr>
+          <p:cNvPr id="8" name="TextBox 7"/>
+          <p:cNvSpPr txBox="1"/>
+          <p:nvPr/>
+        </p:nvSpPr>
+        <p:spPr>
+          <a:xfrm>
+            <a:off x="640080" y="1783080"/>
+            <a:ext cx="3429000" cy="640080"/>
+          </a:xfrm>
+          <a:prstGeom prst="rect">
+            <a:avLst/>
+          </a:prstGeom>
+          <a:noFill/>
+        </p:spPr>
+        <p:txBody>
+          <a:bodyPr wrap="square" lIns="73152" rIns="73152" tIns="54864" bIns="54864">
+            <a:spAutoFit/>
+          </a:bodyPr>
+          <a:lstStyle/>
+          <a:p>
+            <a:pPr algn="l">
+              <a:defRPr sz="1500" b="1">
                 <a:solidFill>
-                  <a:schemeClr val="tx2">
-                    <a:lumMod val="75000"/>
-                    <a:lumOff val="25000"/>
-                  </a:schemeClr>
+                  <a:srgbClr val="0F172A"/>
                 </a:solidFill>
-                <a:latin typeface="Monotype Corsiva" panose="03010101010201010101" pitchFamily="66" charset="0"/>
-                <a:ea typeface="Monggirella script"/>
-                <a:cs typeface="Monggirella script"/>
-                <a:sym typeface="Monggirella script"/>
-              </a:rPr>
-              <a:t>Thanks for listening</a:t>
-            </a:r>
-          </a:p>
-        </p:txBody>
-      </p:sp>
+                <a:latin typeface="Arial"/>
+              </a:defRPr>
+            </a:pPr>
+            <a:r>
+              <a:t>• Tạo mới (New Folder): Phím tắt Ctrl + Shift + N</a:t>
+            </a:r>
+          </a:p>
+        </p:txBody>
+      </p:sp>
+      <p:sp>
+        <p:nvSpPr>
+          <p:cNvPr id="9" name="TextBox 8"/>
+          <p:cNvSpPr txBox="1"/>
+          <p:nvPr/>
+        </p:nvSpPr>
+        <p:spPr>
+          <a:xfrm>
+            <a:off x="640080" y="2468880"/>
+            <a:ext cx="3429000" cy="640080"/>
+          </a:xfrm>
+          <a:prstGeom prst="rect">
+            <a:avLst/>
+          </a:prstGeom>
+          <a:noFill/>
+        </p:spPr>
+        <p:txBody>
+          <a:bodyPr wrap="square" lIns="73152" rIns="73152" tIns="54864" bIns="54864">
+            <a:spAutoFit/>
+          </a:bodyPr>
+          <a:lstStyle/>
+          <a:p>
+            <a:pPr algn="l">
+              <a:defRPr sz="1500" b="1">
+                <a:solidFill>
+                  <a:srgbClr val="0F172A"/>
+                </a:solidFill>
+                <a:latin typeface="Arial"/>
+              </a:defRPr>
+            </a:pPr>
+            <a:r>
+              <a:t>• Đổi tên (Rename): Phím F2 hoặc chuột phải chọn Rename</a:t>
+            </a:r>
+          </a:p>
+        </p:txBody>
+      </p:sp>
+      <p:sp>
+        <p:nvSpPr>
+          <p:cNvPr id="10" name="TextBox 9"/>
+          <p:cNvSpPr txBox="1"/>
+          <p:nvPr/>
+        </p:nvSpPr>
+        <p:spPr>
+          <a:xfrm>
+            <a:off x="640080" y="3154680"/>
+            <a:ext cx="3429000" cy="640080"/>
+          </a:xfrm>
+          <a:prstGeom prst="rect">
+            <a:avLst/>
+          </a:prstGeom>
+          <a:noFill/>
+        </p:spPr>
+        <p:txBody>
+          <a:bodyPr wrap="square" lIns="73152" rIns="73152" tIns="54864" bIns="54864">
+            <a:spAutoFit/>
+          </a:bodyPr>
+          <a:lstStyle/>
+          <a:p>
+            <a:pPr algn="l">
+              <a:defRPr sz="1500" b="1">
+                <a:solidFill>
+                  <a:srgbClr val="0F172A"/>
+                </a:solidFill>
+                <a:latin typeface="Arial"/>
+              </a:defRPr>
+            </a:pPr>
+            <a:r>
+              <a:t>• Sao chép (Copy) / Cắt (Cut): Ctrl + C / Ctrl + X</a:t>
+            </a:r>
+          </a:p>
+        </p:txBody>
+      </p:sp>
+      <p:sp>
+        <p:nvSpPr>
+          <p:cNvPr id="11" name="TextBox 10"/>
+          <p:cNvSpPr txBox="1"/>
+          <p:nvPr/>
+        </p:nvSpPr>
+        <p:spPr>
+          <a:xfrm>
+            <a:off x="640080" y="3840480"/>
+            <a:ext cx="3429000" cy="640080"/>
+          </a:xfrm>
+          <a:prstGeom prst="rect">
+            <a:avLst/>
+          </a:prstGeom>
+          <a:noFill/>
+        </p:spPr>
+        <p:txBody>
+          <a:bodyPr wrap="square" lIns="73152" rIns="73152" tIns="54864" bIns="54864">
+            <a:spAutoFit/>
+          </a:bodyPr>
+          <a:lstStyle/>
+          <a:p>
+            <a:pPr algn="l">
+              <a:defRPr sz="1500" b="1">
+                <a:solidFill>
+                  <a:srgbClr val="0F172A"/>
+                </a:solidFill>
+                <a:latin typeface="Arial"/>
+              </a:defRPr>
+            </a:pPr>
+            <a:r>
+              <a:t>• Dán (Paste) / Xóa (Delete): Ctrl + V / Delete</a:t>
+            </a:r>
+          </a:p>
+        </p:txBody>
+      </p:sp>
+      <p:sp>
+        <p:nvSpPr>
+          <p:cNvPr id="12" name="Rounded Rectangle 11"/>
+          <p:cNvSpPr/>
+          <p:nvPr/>
+        </p:nvSpPr>
+        <p:spPr>
+          <a:xfrm>
+            <a:off x="4480560" y="1645920"/>
+            <a:ext cx="7223760" cy="3977639"/>
+          </a:xfrm>
+          <a:prstGeom prst="roundRect">
+            <a:avLst/>
+          </a:prstGeom>
+          <a:solidFill>
+            <a:srgbClr val="FFFFFF"/>
+          </a:solidFill>
+          <a:ln w="19050">
+            <a:solidFill>
+              <a:srgbClr val="CBD5E1"/>
+            </a:solidFill>
+          </a:ln>
+        </p:spPr>
+        <p:style>
+          <a:lnRef idx="1">
+            <a:schemeClr val="accent1"/>
+          </a:lnRef>
+          <a:fillRef idx="3">
+            <a:schemeClr val="accent1"/>
+          </a:fillRef>
+          <a:effectRef idx="2">
+            <a:schemeClr val="accent1"/>
+          </a:effectRef>
+          <a:fontRef idx="minor">
+            <a:schemeClr val="lt1"/>
+          </a:fontRef>
+        </p:style>
+        <p:txBody>
+          <a:bodyPr rtlCol="0" anchor="ctr"/>
+          <a:lstStyle/>
+          <a:p>
+            <a:pPr algn="ctr"/>
+          </a:p>
+        </p:txBody>
+      </p:sp>
+      <p:pic>
+        <p:nvPicPr>
+          <p:cNvPr id="13" name="Picture 12" descr="sgk_lop7_bai3_hinh36_lenh_thao_tac.png"/>
+          <p:cNvPicPr>
+            <a:picLocks noChangeAspect="1"/>
+          </p:cNvPicPr>
+          <p:nvPr/>
+        </p:nvPicPr>
+        <p:blipFill>
+          <a:blip r:embed="rId2"/>
+          <a:stretch>
+            <a:fillRect/>
+          </a:stretch>
+        </p:blipFill>
+        <p:spPr>
+          <a:xfrm>
+            <a:off x="4572000" y="1737360"/>
+            <a:ext cx="7040880" cy="3794760"/>
+          </a:xfrm>
+          <a:prstGeom prst="rect">
+            <a:avLst/>
+          </a:prstGeom>
+        </p:spPr>
+      </p:pic>
     </p:spTree>
-    <p:extLst>
-      <p:ext uri="{BB962C8B-B14F-4D97-AF65-F5344CB8AC3E}">
-        <p14:creationId xmlns:p14="http://schemas.microsoft.com/office/powerpoint/2010/main" val="1292696729"/>
-      </p:ext>
-    </p:extLst>
   </p:cSld>
   <p:clrMapOvr>
     <a:masterClrMapping/>
   </p:clrMapOvr>
+  <p:transition spd="med">
+    <p:fade/>
+  </p:transition>
 </p:sld>
 </file>
 
@@ -3964,16 +5299,219 @@
       <p:grpSpPr/>
       <p:sp>
         <p:nvSpPr>
-          <p:cNvPr id="3" name="Rectangle 2"/>
+          <p:cNvPr id="2" name="Rectangle 1"/>
           <p:cNvSpPr/>
           <p:nvPr/>
         </p:nvSpPr>
         <p:spPr>
           <a:xfrm>
             <a:off x="0" y="1051560"/>
-            <a:ext cx="12188952" cy="1645920"/>
+            <a:ext cx="12188952" cy="4754879"/>
           </a:xfrm>
           <a:prstGeom prst="rect">
+            <a:avLst/>
+          </a:prstGeom>
+          <a:solidFill>
+            <a:srgbClr val="F0F9FF"/>
+          </a:solidFill>
+          <a:ln>
+            <a:noFill/>
+          </a:ln>
+        </p:spPr>
+        <p:style>
+          <a:lnRef idx="1">
+            <a:schemeClr val="accent1"/>
+          </a:lnRef>
+          <a:fillRef idx="3">
+            <a:schemeClr val="accent1"/>
+          </a:fillRef>
+          <a:effectRef idx="2">
+            <a:schemeClr val="accent1"/>
+          </a:effectRef>
+          <a:fontRef idx="minor">
+            <a:schemeClr val="lt1"/>
+          </a:fontRef>
+        </p:style>
+        <p:txBody>
+          <a:bodyPr rtlCol="0" anchor="ctr"/>
+          <a:lstStyle/>
+          <a:p>
+            <a:pPr algn="ctr"/>
+          </a:p>
+        </p:txBody>
+      </p:sp>
+      <p:sp>
+        <p:nvSpPr>
+          <p:cNvPr id="3" name="Rounded Rectangle 2"/>
+          <p:cNvSpPr/>
+          <p:nvPr/>
+        </p:nvSpPr>
+        <p:spPr>
+          <a:xfrm>
+            <a:off x="365760" y="1143000"/>
+            <a:ext cx="2926080" cy="347471"/>
+          </a:xfrm>
+          <a:prstGeom prst="roundRect">
+            <a:avLst/>
+          </a:prstGeom>
+          <a:solidFill>
+            <a:srgbClr val="0369A1"/>
+          </a:solidFill>
+          <a:ln>
+            <a:noFill/>
+          </a:ln>
+        </p:spPr>
+        <p:style>
+          <a:lnRef idx="1">
+            <a:schemeClr val="accent1"/>
+          </a:lnRef>
+          <a:fillRef idx="3">
+            <a:schemeClr val="accent1"/>
+          </a:fillRef>
+          <a:effectRef idx="2">
+            <a:schemeClr val="accent1"/>
+          </a:effectRef>
+          <a:fontRef idx="minor">
+            <a:schemeClr val="lt1"/>
+          </a:fontRef>
+        </p:style>
+        <p:txBody>
+          <a:bodyPr rtlCol="0" anchor="ctr"/>
+          <a:lstStyle/>
+          <a:p>
+            <a:pPr algn="ctr"/>
+          </a:p>
+        </p:txBody>
+      </p:sp>
+      <p:sp>
+        <p:nvSpPr>
+          <p:cNvPr id="4" name="TextBox 3"/>
+          <p:cNvSpPr txBox="1"/>
+          <p:nvPr/>
+        </p:nvSpPr>
+        <p:spPr>
+          <a:xfrm>
+            <a:off x="365760" y="1143000"/>
+            <a:ext cx="2926080" cy="347471"/>
+          </a:xfrm>
+          <a:prstGeom prst="rect">
+            <a:avLst/>
+          </a:prstGeom>
+          <a:noFill/>
+        </p:spPr>
+        <p:txBody>
+          <a:bodyPr wrap="square" lIns="73152" rIns="73152" tIns="54864" bIns="54864">
+            <a:spAutoFit/>
+          </a:bodyPr>
+          <a:lstStyle/>
+          <a:p>
+            <a:pPr algn="ctr">
+              <a:defRPr sz="1300" b="1">
+                <a:solidFill>
+                  <a:srgbClr val="FFFFFF"/>
+                </a:solidFill>
+                <a:latin typeface="Arial"/>
+              </a:defRPr>
+            </a:pPr>
+            <a:r>
+              <a:t>HOẠT ĐỘNG KHÁM PHÁ</a:t>
+            </a:r>
+          </a:p>
+        </p:txBody>
+      </p:sp>
+      <p:sp>
+        <p:nvSpPr>
+          <p:cNvPr id="5" name="TextBox 4"/>
+          <p:cNvSpPr txBox="1"/>
+          <p:nvPr/>
+        </p:nvSpPr>
+        <p:spPr>
+          <a:xfrm>
+            <a:off x="3474720" y="1115568"/>
+            <a:ext cx="8046720" cy="411479"/>
+          </a:xfrm>
+          <a:prstGeom prst="rect">
+            <a:avLst/>
+          </a:prstGeom>
+          <a:noFill/>
+        </p:spPr>
+        <p:txBody>
+          <a:bodyPr wrap="square" lIns="73152" rIns="73152" tIns="54864" bIns="54864">
+            <a:spAutoFit/>
+          </a:bodyPr>
+          <a:lstStyle/>
+          <a:p>
+            <a:pPr algn="l">
+              <a:defRPr sz="2100" b="1">
+                <a:solidFill>
+                  <a:srgbClr val="0C4A6E"/>
+                </a:solidFill>
+                <a:latin typeface="Arial"/>
+              </a:defRPr>
+            </a:pPr>
+            <a:r>
+              <a:t>Sao lưu dữ liệu &amp; Phòng chống Virus máy tính</a:t>
+            </a:r>
+          </a:p>
+        </p:txBody>
+      </p:sp>
+      <p:sp>
+        <p:nvSpPr>
+          <p:cNvPr id="6" name="Rounded Rectangle 5"/>
+          <p:cNvSpPr/>
+          <p:nvPr/>
+        </p:nvSpPr>
+        <p:spPr>
+          <a:xfrm>
+            <a:off x="365760" y="1645920"/>
+            <a:ext cx="3840480" cy="3977639"/>
+          </a:xfrm>
+          <a:prstGeom prst="roundRect">
+            <a:avLst/>
+          </a:prstGeom>
+          <a:solidFill>
+            <a:srgbClr val="FFFFFF"/>
+          </a:solidFill>
+          <a:ln w="19050">
+            <a:solidFill>
+              <a:srgbClr val="0EA5E9"/>
+            </a:solidFill>
+          </a:ln>
+        </p:spPr>
+        <p:style>
+          <a:lnRef idx="1">
+            <a:schemeClr val="accent1"/>
+          </a:lnRef>
+          <a:fillRef idx="3">
+            <a:schemeClr val="accent1"/>
+          </a:fillRef>
+          <a:effectRef idx="2">
+            <a:schemeClr val="accent1"/>
+          </a:effectRef>
+          <a:fontRef idx="minor">
+            <a:schemeClr val="lt1"/>
+          </a:fontRef>
+        </p:style>
+        <p:txBody>
+          <a:bodyPr rtlCol="0" anchor="ctr"/>
+          <a:lstStyle/>
+          <a:p>
+            <a:pPr algn="ctr"/>
+          </a:p>
+        </p:txBody>
+      </p:sp>
+      <p:sp>
+        <p:nvSpPr>
+          <p:cNvPr id="7" name="Rounded Rectangle 6"/>
+          <p:cNvSpPr/>
+          <p:nvPr/>
+        </p:nvSpPr>
+        <p:spPr>
+          <a:xfrm>
+            <a:off x="365760" y="1645920"/>
+            <a:ext cx="164592" cy="3977639"/>
+          </a:xfrm>
+          <a:prstGeom prst="roundRect">
             <a:avLst/>
           </a:prstGeom>
           <a:solidFill>
@@ -4007,23 +5545,169 @@
       </p:sp>
       <p:sp>
         <p:nvSpPr>
-          <p:cNvPr id="2" name="Rectangle 1"/>
+          <p:cNvPr id="8" name="TextBox 7"/>
+          <p:cNvSpPr txBox="1"/>
+          <p:nvPr/>
+        </p:nvSpPr>
+        <p:spPr>
+          <a:xfrm>
+            <a:off x="640080" y="1783080"/>
+            <a:ext cx="3429000" cy="640080"/>
+          </a:xfrm>
+          <a:prstGeom prst="rect">
+            <a:avLst/>
+          </a:prstGeom>
+          <a:noFill/>
+        </p:spPr>
+        <p:txBody>
+          <a:bodyPr wrap="square" lIns="73152" rIns="73152" tIns="54864" bIns="54864">
+            <a:spAutoFit/>
+          </a:bodyPr>
+          <a:lstStyle/>
+          <a:p>
+            <a:pPr algn="l">
+              <a:defRPr sz="1500" b="1">
+                <a:solidFill>
+                  <a:srgbClr val="0F172A"/>
+                </a:solidFill>
+                <a:latin typeface="Arial"/>
+              </a:defRPr>
+            </a:pPr>
+            <a:r>
+              <a:t>• Sao lưu định kỳ (Backup) ra USB, ổ cứng ngoài, Cloud</a:t>
+            </a:r>
+          </a:p>
+        </p:txBody>
+      </p:sp>
+      <p:sp>
+        <p:nvSpPr>
+          <p:cNvPr id="9" name="TextBox 8"/>
+          <p:cNvSpPr txBox="1"/>
+          <p:nvPr/>
+        </p:nvSpPr>
+        <p:spPr>
+          <a:xfrm>
+            <a:off x="640080" y="2468880"/>
+            <a:ext cx="3429000" cy="640080"/>
+          </a:xfrm>
+          <a:prstGeom prst="rect">
+            <a:avLst/>
+          </a:prstGeom>
+          <a:noFill/>
+        </p:spPr>
+        <p:txBody>
+          <a:bodyPr wrap="square" lIns="73152" rIns="73152" tIns="54864" bIns="54864">
+            <a:spAutoFit/>
+          </a:bodyPr>
+          <a:lstStyle/>
+          <a:p>
+            <a:pPr algn="l">
+              <a:defRPr sz="1500" b="1">
+                <a:solidFill>
+                  <a:srgbClr val="0F172A"/>
+                </a:solidFill>
+                <a:latin typeface="Arial"/>
+              </a:defRPr>
+            </a:pPr>
+            <a:r>
+              <a:t>• Tránh mất dữ liệu khi máy tính bị hỏng hóc</a:t>
+            </a:r>
+          </a:p>
+        </p:txBody>
+      </p:sp>
+      <p:sp>
+        <p:nvSpPr>
+          <p:cNvPr id="10" name="TextBox 9"/>
+          <p:cNvSpPr txBox="1"/>
+          <p:nvPr/>
+        </p:nvSpPr>
+        <p:spPr>
+          <a:xfrm>
+            <a:off x="640080" y="3154680"/>
+            <a:ext cx="3429000" cy="640080"/>
+          </a:xfrm>
+          <a:prstGeom prst="rect">
+            <a:avLst/>
+          </a:prstGeom>
+          <a:noFill/>
+        </p:spPr>
+        <p:txBody>
+          <a:bodyPr wrap="square" lIns="73152" rIns="73152" tIns="54864" bIns="54864">
+            <a:spAutoFit/>
+          </a:bodyPr>
+          <a:lstStyle/>
+          <a:p>
+            <a:pPr algn="l">
+              <a:defRPr sz="1500" b="1">
+                <a:solidFill>
+                  <a:srgbClr val="0F172A"/>
+                </a:solidFill>
+                <a:latin typeface="Arial"/>
+              </a:defRPr>
+            </a:pPr>
+            <a:r>
+              <a:t>• Bật tường lửa và phần mềm diệt virus (Windows Defender)</a:t>
+            </a:r>
+          </a:p>
+        </p:txBody>
+      </p:sp>
+      <p:sp>
+        <p:nvSpPr>
+          <p:cNvPr id="11" name="TextBox 10"/>
+          <p:cNvSpPr txBox="1"/>
+          <p:nvPr/>
+        </p:nvSpPr>
+        <p:spPr>
+          <a:xfrm>
+            <a:off x="640080" y="3840480"/>
+            <a:ext cx="3429000" cy="640080"/>
+          </a:xfrm>
+          <a:prstGeom prst="rect">
+            <a:avLst/>
+          </a:prstGeom>
+          <a:noFill/>
+        </p:spPr>
+        <p:txBody>
+          <a:bodyPr wrap="square" lIns="73152" rIns="73152" tIns="54864" bIns="54864">
+            <a:spAutoFit/>
+          </a:bodyPr>
+          <a:lstStyle/>
+          <a:p>
+            <a:pPr algn="l">
+              <a:defRPr sz="1500" b="1">
+                <a:solidFill>
+                  <a:srgbClr val="0F172A"/>
+                </a:solidFill>
+                <a:latin typeface="Arial"/>
+              </a:defRPr>
+            </a:pPr>
+            <a:r>
+              <a:t>• Tuyệt đối không mở các tệp đính kèm lạ có đuôi .exe, .bat</a:t>
+            </a:r>
+          </a:p>
+        </p:txBody>
+      </p:sp>
+      <p:sp>
+        <p:nvSpPr>
+          <p:cNvPr id="12" name="Rounded Rectangle 11"/>
           <p:cNvSpPr/>
           <p:nvPr/>
         </p:nvSpPr>
         <p:spPr>
           <a:xfrm>
-            <a:off x="0" y="1051560"/>
-            <a:ext cx="12188952" cy="4754879"/>
-          </a:xfrm>
-          <a:prstGeom prst="rect">
+            <a:off x="4480560" y="1645920"/>
+            <a:ext cx="7223760" cy="3977639"/>
+          </a:xfrm>
+          <a:prstGeom prst="roundRect">
             <a:avLst/>
           </a:prstGeom>
           <a:solidFill>
-            <a:srgbClr val="0369A1"/>
+            <a:srgbClr val="FFFFFF"/>
           </a:solidFill>
-          <a:ln>
-            <a:noFill/>
+          <a:ln w="19050">
+            <a:solidFill>
+              <a:srgbClr val="CBD5E1"/>
+            </a:solidFill>
           </a:ln>
         </p:spPr>
         <p:style>
@@ -4048,78 +5732,30 @@
           </a:p>
         </p:txBody>
       </p:sp>
-      <p:sp>
-        <p:nvSpPr>
-          <p:cNvPr id="4" name="TextBox 3"/>
-          <p:cNvSpPr txBox="1"/>
-          <p:nvPr/>
-        </p:nvSpPr>
-        <p:spPr>
-          <a:xfrm>
-            <a:off x="731520" y="1828800"/>
-            <a:ext cx="6858000" cy="1371600"/>
+      <p:pic>
+        <p:nvPicPr>
+          <p:cNvPr id="13" name="Picture 12" descr="sgk_lop7_bai3_hinh33_sao_luu_du_lieu.png"/>
+          <p:cNvPicPr>
+            <a:picLocks noChangeAspect="1"/>
+          </p:cNvPicPr>
+          <p:nvPr/>
+        </p:nvPicPr>
+        <p:blipFill>
+          <a:blip r:embed="rId2"/>
+          <a:stretch>
+            <a:fillRect/>
+          </a:stretch>
+        </p:blipFill>
+        <p:spPr>
+          <a:xfrm>
+            <a:off x="4572000" y="1737360"/>
+            <a:ext cx="7040880" cy="3794760"/>
           </a:xfrm>
           <a:prstGeom prst="rect">
             <a:avLst/>
           </a:prstGeom>
-          <a:noFill/>
-        </p:spPr>
-        <p:txBody>
-          <a:bodyPr wrap="square" lIns="73152" rIns="73152">
-            <a:spAutoFit/>
-          </a:bodyPr>
-          <a:lstStyle/>
-          <a:p>
-            <a:pPr algn="l">
-              <a:defRPr sz="3400" b="1">
-                <a:solidFill>
-                  <a:srgbClr val="FFFFFF"/>
-                </a:solidFill>
-                <a:latin typeface="Arial"/>
-              </a:defRPr>
-            </a:pPr>
-            <a:r>
-              <a:t>Quản lý dữ liệu trong máy tính 💾</a:t>
-            </a:r>
-          </a:p>
-        </p:txBody>
-      </p:sp>
-      <p:sp>
-        <p:nvSpPr>
-          <p:cNvPr id="5" name="TextBox 4"/>
-          <p:cNvSpPr txBox="1"/>
-          <p:nvPr/>
-        </p:nvSpPr>
-        <p:spPr>
-          <a:xfrm>
-            <a:off x="731520" y="3474720"/>
-            <a:ext cx="6858000" cy="731519"/>
-          </a:xfrm>
-          <a:prstGeom prst="rect">
-            <a:avLst/>
-          </a:prstGeom>
-          <a:noFill/>
-        </p:spPr>
-        <p:txBody>
-          <a:bodyPr wrap="square" lIns="73152" rIns="73152">
-            <a:spAutoFit/>
-          </a:bodyPr>
-          <a:lstStyle/>
-          <a:p>
-            <a:pPr algn="l">
-              <a:defRPr sz="2000" b="0">
-                <a:solidFill>
-                  <a:srgbClr val="FFFFFF"/>
-                </a:solidFill>
-                <a:latin typeface="Arial"/>
-              </a:defRPr>
-            </a:pPr>
-            <a:r>
-              <a:t>Tin học • Lớp 7 • Tiết 3</a:t>
-            </a:r>
-          </a:p>
-        </p:txBody>
-      </p:sp>
+        </p:spPr>
+      </p:pic>
     </p:spTree>
   </p:cSld>
   <p:clrMapOvr>
@@ -4186,16 +5822,16 @@
       </p:sp>
       <p:sp>
         <p:nvSpPr>
-          <p:cNvPr id="3" name="Rectangle 2"/>
+          <p:cNvPr id="3" name="Rounded Rectangle 2"/>
           <p:cNvSpPr/>
           <p:nvPr/>
         </p:nvSpPr>
         <p:spPr>
           <a:xfrm>
-            <a:off x="0" y="1097280"/>
-            <a:ext cx="12188952" cy="411479"/>
-          </a:xfrm>
-          <a:prstGeom prst="rect">
+            <a:off x="365760" y="1188720"/>
+            <a:ext cx="11247120" cy="822960"/>
+          </a:xfrm>
+          <a:prstGeom prst="roundRect">
             <a:avLst/>
           </a:prstGeom>
           <a:solidFill>
@@ -4235,8 +5871,8 @@
         </p:nvSpPr>
         <p:spPr>
           <a:xfrm>
-            <a:off x="274320" y="1124712"/>
-            <a:ext cx="11640312" cy="365759"/>
+            <a:off x="640080" y="1234440"/>
+            <a:ext cx="10698480" cy="731520"/>
           </a:xfrm>
           <a:prstGeom prst="rect">
             <a:avLst/>
@@ -4244,13 +5880,13 @@
           <a:noFill/>
         </p:spPr>
         <p:txBody>
-          <a:bodyPr wrap="square" lIns="73152" rIns="73152">
+          <a:bodyPr wrap="square" lIns="73152" rIns="73152" tIns="54864" bIns="54864">
             <a:spAutoFit/>
           </a:bodyPr>
           <a:lstStyle/>
           <a:p>
             <a:pPr algn="l">
-              <a:defRPr sz="1300" b="1">
+              <a:defRPr sz="1800" b="1">
                 <a:solidFill>
                   <a:srgbClr val="FFFFFF"/>
                 </a:solidFill>
@@ -4258,57 +5894,21 @@
               </a:defRPr>
             </a:pPr>
             <a:r>
-              <a:t>  LỚP 7 • VÍ DỤ MINH HỌA TRỰC QUAN</a:t>
-            </a:r>
-          </a:p>
-        </p:txBody>
-      </p:sp>
-      <p:sp>
-        <p:nvSpPr>
-          <p:cNvPr id="5" name="TextBox 4"/>
-          <p:cNvSpPr txBox="1"/>
-          <p:nvPr/>
-        </p:nvSpPr>
-        <p:spPr>
-          <a:xfrm>
-            <a:off x="457200" y="1600200"/>
-            <a:ext cx="11274552" cy="594359"/>
-          </a:xfrm>
-          <a:prstGeom prst="rect">
-            <a:avLst/>
-          </a:prstGeom>
-          <a:noFill/>
-        </p:spPr>
-        <p:txBody>
-          <a:bodyPr wrap="square" lIns="73152" rIns="73152">
-            <a:spAutoFit/>
-          </a:bodyPr>
-          <a:lstStyle/>
-          <a:p>
-            <a:pPr algn="l">
-              <a:defRPr sz="2600" b="1">
-                <a:solidFill>
-                  <a:srgbClr val="0C4A6E"/>
-                </a:solidFill>
-                <a:latin typeface="Arial"/>
-              </a:defRPr>
-            </a:pPr>
-            <a:r>
-              <a:t>Sao lưu &amp; Bảo vệ dữ liệu an toàn</a:t>
-            </a:r>
-          </a:p>
-        </p:txBody>
-      </p:sp>
-      <p:sp>
-        <p:nvSpPr>
-          <p:cNvPr id="6" name="Rounded Rectangle 5"/>
+              <a:t>❓ Biện pháp an toàn nhất để không bị mất dữ liệu quan trọng là gì?</a:t>
+            </a:r>
+          </a:p>
+        </p:txBody>
+      </p:sp>
+      <p:sp>
+        <p:nvSpPr>
+          <p:cNvPr id="5" name="Rounded Rectangle 4"/>
           <p:cNvSpPr/>
           <p:nvPr/>
         </p:nvSpPr>
         <p:spPr>
           <a:xfrm>
-            <a:off x="457200" y="2286000"/>
-            <a:ext cx="4206240" cy="3383279"/>
+            <a:off x="365760" y="2103120"/>
+            <a:ext cx="6400800" cy="2194559"/>
           </a:xfrm>
           <a:prstGeom prst="roundRect">
             <a:avLst/>
@@ -4346,16 +5946,16 @@
       </p:sp>
       <p:sp>
         <p:nvSpPr>
-          <p:cNvPr id="7" name="Rectangle 6"/>
+          <p:cNvPr id="6" name="Rounded Rectangle 5"/>
           <p:cNvSpPr/>
           <p:nvPr/>
         </p:nvSpPr>
         <p:spPr>
           <a:xfrm>
-            <a:off x="457200" y="2286000"/>
-            <a:ext cx="109728" cy="3383279"/>
-          </a:xfrm>
-          <a:prstGeom prst="rect">
+            <a:off x="365760" y="2103120"/>
+            <a:ext cx="164592" cy="2194559"/>
+          </a:xfrm>
+          <a:prstGeom prst="roundRect">
             <a:avLst/>
           </a:prstGeom>
           <a:solidFill>
@@ -4389,14 +5989,14 @@
       </p:sp>
       <p:sp>
         <p:nvSpPr>
-          <p:cNvPr id="8" name="TextBox 7"/>
+          <p:cNvPr id="7" name="TextBox 6"/>
           <p:cNvSpPr txBox="1"/>
           <p:nvPr/>
         </p:nvSpPr>
         <p:spPr>
           <a:xfrm>
-            <a:off x="731520" y="2560320"/>
-            <a:ext cx="3749039" cy="2834639"/>
+            <a:off x="640080" y="2240280"/>
+            <a:ext cx="5943600" cy="822959"/>
           </a:xfrm>
           <a:prstGeom prst="rect">
             <a:avLst/>
@@ -4404,16 +6004,13 @@
           <a:noFill/>
         </p:spPr>
         <p:txBody>
-          <a:bodyPr wrap="square" lIns="73152" rIns="73152">
+          <a:bodyPr wrap="square" lIns="73152" rIns="73152" tIns="54864" bIns="54864">
             <a:spAutoFit/>
           </a:bodyPr>
           <a:lstStyle/>
           <a:p>
             <a:pPr algn="l">
-              <a:spcAft>
-                <a:spcPts val="600"/>
-              </a:spcAft>
-              <a:defRPr sz="2000" b="1">
+              <a:defRPr sz="1500" b="0">
                 <a:solidFill>
                   <a:srgbClr val="0F172A"/>
                 </a:solidFill>
@@ -4421,15 +6018,35 @@
               </a:defRPr>
             </a:pPr>
             <a:r>
-              <a:t>• Sao lưu dữ liệu định kỳ (Backup)</a:t>
-            </a:r>
-          </a:p>
+              <a:t>👉 Sao lưu dữ liệu dự phòng (Backup) thường xuyên lên đám mây hoặc thiết bị ngoài.</a:t>
+            </a:r>
+          </a:p>
+        </p:txBody>
+      </p:sp>
+      <p:sp>
+        <p:nvSpPr>
+          <p:cNvPr id="8" name="TextBox 7"/>
+          <p:cNvSpPr txBox="1"/>
+          <p:nvPr/>
+        </p:nvSpPr>
+        <p:spPr>
+          <a:xfrm>
+            <a:off x="640080" y="3200400"/>
+            <a:ext cx="5943600" cy="822960"/>
+          </a:xfrm>
+          <a:prstGeom prst="rect">
+            <a:avLst/>
+          </a:prstGeom>
+          <a:noFill/>
+        </p:spPr>
+        <p:txBody>
+          <a:bodyPr wrap="square" lIns="73152" rIns="73152" tIns="54864" bIns="54864">
+            <a:spAutoFit/>
+          </a:bodyPr>
+          <a:lstStyle/>
           <a:p>
             <a:pPr algn="l">
-              <a:spcAft>
-                <a:spcPts val="600"/>
-              </a:spcAft>
-              <a:defRPr sz="2000" b="1">
+              <a:defRPr sz="1500" b="0">
                 <a:solidFill>
                   <a:srgbClr val="0F172A"/>
                 </a:solidFill>
@@ -4437,46 +6054,59 @@
               </a:defRPr>
             </a:pPr>
             <a:r>
-              <a:t>• Lưu trữ đám mây: Google Drive, OneDrive</a:t>
-            </a:r>
-          </a:p>
-          <a:p>
-            <a:pPr algn="l">
-              <a:spcAft>
-                <a:spcPts val="600"/>
-              </a:spcAft>
-              <a:defRPr sz="2000" b="1">
-                <a:solidFill>
-                  <a:srgbClr val="0F172A"/>
-                </a:solidFill>
-                <a:latin typeface="Arial"/>
-              </a:defRPr>
-            </a:pPr>
-            <a:r>
-              <a:t>• Nén tệp giảm dung lượng: .zip, .rar</a:t>
-            </a:r>
-          </a:p>
-          <a:p>
-            <a:pPr algn="l">
-              <a:spcAft>
-                <a:spcPts val="600"/>
-              </a:spcAft>
-              <a:defRPr sz="2000" b="1">
-                <a:solidFill>
-                  <a:srgbClr val="0F172A"/>
-                </a:solidFill>
-                <a:latin typeface="Arial"/>
-              </a:defRPr>
-            </a:pPr>
-            <a:r>
-              <a:t>• Đặt mật khẩu bảo vệ tài liệu quan trọng</a:t>
-            </a:r>
+              <a:t>👉 Đặt mật khẩu bảo vệ tài khoản và quét virus định kỳ.</a:t>
+            </a:r>
+          </a:p>
+        </p:txBody>
+      </p:sp>
+      <p:sp>
+        <p:nvSpPr>
+          <p:cNvPr id="9" name="Rounded Rectangle 8"/>
+          <p:cNvSpPr/>
+          <p:nvPr/>
+        </p:nvSpPr>
+        <p:spPr>
+          <a:xfrm>
+            <a:off x="6949440" y="2103120"/>
+            <a:ext cx="4663440" cy="2194559"/>
+          </a:xfrm>
+          <a:prstGeom prst="roundRect">
+            <a:avLst/>
+          </a:prstGeom>
+          <a:solidFill>
+            <a:srgbClr val="FFFFFF"/>
+          </a:solidFill>
+          <a:ln w="19050">
+            <a:solidFill>
+              <a:srgbClr val="CBD5E1"/>
+            </a:solidFill>
+          </a:ln>
+        </p:spPr>
+        <p:style>
+          <a:lnRef idx="1">
+            <a:schemeClr val="accent1"/>
+          </a:lnRef>
+          <a:fillRef idx="3">
+            <a:schemeClr val="accent1"/>
+          </a:fillRef>
+          <a:effectRef idx="2">
+            <a:schemeClr val="accent1"/>
+          </a:effectRef>
+          <a:fontRef idx="minor">
+            <a:schemeClr val="lt1"/>
+          </a:fontRef>
+        </p:style>
+        <p:txBody>
+          <a:bodyPr rtlCol="0" anchor="ctr"/>
+          <a:lstStyle/>
+          <a:p>
+            <a:pPr algn="ctr"/>
           </a:p>
         </p:txBody>
       </p:sp>
       <p:pic>
         <p:nvPicPr>
-          <p:cNvPr id="9" name="Picture 8" descr="learn1_card1.png"/>
+          <p:cNvPr id="10" name="Picture 9" descr="sgk_lop7_bai3_hinh33_sao_luu_du_lieu.png"/>
           <p:cNvPicPr>
             <a:picLocks noChangeAspect="1"/>
           </p:cNvPicPr>
@@ -4490,21 +6120,136 @@
         </p:blipFill>
         <p:spPr>
           <a:xfrm>
-            <a:off x="4937760" y="2286000"/>
-            <a:ext cx="6793992" cy="3383279"/>
+            <a:off x="7040880" y="2148840"/>
+            <a:ext cx="4480560" cy="2103120"/>
           </a:xfrm>
           <a:prstGeom prst="rect">
             <a:avLst/>
           </a:prstGeom>
         </p:spPr>
       </p:pic>
+      <p:sp>
+        <p:nvSpPr>
+          <p:cNvPr id="11" name="Rounded Rectangle 10"/>
+          <p:cNvSpPr/>
+          <p:nvPr/>
+        </p:nvSpPr>
+        <p:spPr>
+          <a:xfrm>
+            <a:off x="365760" y="4434840"/>
+            <a:ext cx="11247120" cy="1188719"/>
+          </a:xfrm>
+          <a:prstGeom prst="roundRect">
+            <a:avLst/>
+          </a:prstGeom>
+          <a:solidFill>
+            <a:srgbClr val="EA580C"/>
+          </a:solidFill>
+          <a:ln>
+            <a:noFill/>
+          </a:ln>
+        </p:spPr>
+        <p:style>
+          <a:lnRef idx="1">
+            <a:schemeClr val="accent1"/>
+          </a:lnRef>
+          <a:fillRef idx="3">
+            <a:schemeClr val="accent1"/>
+          </a:fillRef>
+          <a:effectRef idx="2">
+            <a:schemeClr val="accent1"/>
+          </a:effectRef>
+          <a:fontRef idx="minor">
+            <a:schemeClr val="lt1"/>
+          </a:fontRef>
+        </p:style>
+        <p:txBody>
+          <a:bodyPr rtlCol="0" anchor="ctr"/>
+          <a:lstStyle/>
+          <a:p>
+            <a:pPr algn="ctr"/>
+          </a:p>
+        </p:txBody>
+      </p:sp>
+      <p:sp>
+        <p:nvSpPr>
+          <p:cNvPr id="12" name="TextBox 11"/>
+          <p:cNvSpPr txBox="1"/>
+          <p:nvPr/>
+        </p:nvSpPr>
+        <p:spPr>
+          <a:xfrm>
+            <a:off x="640080" y="4480560"/>
+            <a:ext cx="10698480" cy="320039"/>
+          </a:xfrm>
+          <a:prstGeom prst="rect">
+            <a:avLst/>
+          </a:prstGeom>
+          <a:noFill/>
+        </p:spPr>
+        <p:txBody>
+          <a:bodyPr wrap="square" lIns="73152" rIns="73152" tIns="54864" bIns="54864">
+            <a:spAutoFit/>
+          </a:bodyPr>
+          <a:lstStyle/>
+          <a:p>
+            <a:pPr algn="l">
+              <a:defRPr sz="1400" b="1">
+                <a:solidFill>
+                  <a:srgbClr val="FEF08A"/>
+                </a:solidFill>
+                <a:latin typeface="Arial"/>
+              </a:defRPr>
+            </a:pPr>
+            <a:r>
+              <a:t>📌 GHI NHỚ TRỌNG TÂM (SGK)</a:t>
+            </a:r>
+          </a:p>
+        </p:txBody>
+      </p:sp>
+      <p:sp>
+        <p:nvSpPr>
+          <p:cNvPr id="13" name="TextBox 12"/>
+          <p:cNvSpPr txBox="1"/>
+          <p:nvPr/>
+        </p:nvSpPr>
+        <p:spPr>
+          <a:xfrm>
+            <a:off x="640080" y="4800600"/>
+            <a:ext cx="10698480" cy="777239"/>
+          </a:xfrm>
+          <a:prstGeom prst="rect">
+            <a:avLst/>
+          </a:prstGeom>
+          <a:noFill/>
+        </p:spPr>
+        <p:txBody>
+          <a:bodyPr wrap="square" lIns="73152" rIns="73152" tIns="54864" bIns="54864">
+            <a:spAutoFit/>
+          </a:bodyPr>
+          <a:lstStyle/>
+          <a:p>
+            <a:pPr algn="l">
+              <a:defRPr sz="1600" b="1">
+                <a:solidFill>
+                  <a:srgbClr val="FFFFFF"/>
+                </a:solidFill>
+                <a:latin typeface="Arial"/>
+              </a:defRPr>
+            </a:pPr>
+            <a:r>
+              <a:t>Quản lý dữ liệu khoa học và sao lưu dự phòng thường xuyên là nguyên tắc sống còn của người dùng máy tính!</a:t>
+            </a:r>
+          </a:p>
+        </p:txBody>
+      </p:sp>
     </p:spTree>
   </p:cSld>
   <p:clrMapOvr>
     <a:masterClrMapping/>
   </p:clrMapOvr>
   <p:transition spd="med">
-    <p:wipe/>
+    <p:fade/>
   </p:transition>
 </p:sld>
 </file>
@@ -4564,20 +6309,20 @@
       </p:sp>
       <p:sp>
         <p:nvSpPr>
-          <p:cNvPr id="3" name="Rectangle 2"/>
+          <p:cNvPr id="3" name="Rounded Rectangle 2"/>
           <p:cNvSpPr/>
           <p:nvPr/>
         </p:nvSpPr>
         <p:spPr>
           <a:xfrm>
-            <a:off x="0" y="1097280"/>
-            <a:ext cx="12188952" cy="411479"/>
-          </a:xfrm>
-          <a:prstGeom prst="rect">
+            <a:off x="365760" y="1143000"/>
+            <a:ext cx="2926080" cy="347471"/>
+          </a:xfrm>
+          <a:prstGeom prst="roundRect">
             <a:avLst/>
           </a:prstGeom>
           <a:solidFill>
-            <a:srgbClr val="0369A1"/>
+            <a:srgbClr val="EA580C"/>
           </a:solidFill>
           <a:ln>
             <a:noFill/>
@@ -4613,8 +6358,8 @@
         </p:nvSpPr>
         <p:spPr>
           <a:xfrm>
-            <a:off x="274320" y="1124712"/>
-            <a:ext cx="11640312" cy="365759"/>
+            <a:off x="365760" y="1143000"/>
+            <a:ext cx="2926080" cy="347471"/>
           </a:xfrm>
           <a:prstGeom prst="rect">
             <a:avLst/>
@@ -4622,12 +6367,12 @@
           <a:noFill/>
         </p:spPr>
         <p:txBody>
-          <a:bodyPr wrap="square" lIns="73152" rIns="73152">
+          <a:bodyPr wrap="square" lIns="73152" rIns="73152" tIns="54864" bIns="54864">
             <a:spAutoFit/>
           </a:bodyPr>
           <a:lstStyle/>
           <a:p>
-            <a:pPr algn="l">
+            <a:pPr algn="ctr">
               <a:defRPr sz="1300" b="1">
                 <a:solidFill>
                   <a:srgbClr val="FFFFFF"/>
@@ -4636,57 +6381,21 @@
               </a:defRPr>
             </a:pPr>
             <a:r>
-              <a:t>  LỚP 7 • QUY CHUẨN TRỰC QUAN</a:t>
-            </a:r>
-          </a:p>
-        </p:txBody>
-      </p:sp>
-      <p:sp>
-        <p:nvSpPr>
-          <p:cNvPr id="5" name="TextBox 4"/>
-          <p:cNvSpPr txBox="1"/>
-          <p:nvPr/>
-        </p:nvSpPr>
-        <p:spPr>
-          <a:xfrm>
-            <a:off x="457200" y="1600200"/>
-            <a:ext cx="11274552" cy="594359"/>
-          </a:xfrm>
-          <a:prstGeom prst="rect">
-            <a:avLst/>
-          </a:prstGeom>
-          <a:noFill/>
-        </p:spPr>
-        <p:txBody>
-          <a:bodyPr wrap="square" lIns="73152" rIns="73152">
-            <a:spAutoFit/>
-          </a:bodyPr>
-          <a:lstStyle/>
-          <a:p>
-            <a:pPr algn="l">
-              <a:defRPr sz="2600" b="1">
-                <a:solidFill>
-                  <a:srgbClr val="0C4A6E"/>
-                </a:solidFill>
-                <a:latin typeface="Arial"/>
-              </a:defRPr>
-            </a:pPr>
-            <a:r>
-              <a:t>Quy trình nén và giải nén tệp tin</a:t>
-            </a:r>
-          </a:p>
-        </p:txBody>
-      </p:sp>
-      <p:sp>
-        <p:nvSpPr>
-          <p:cNvPr id="6" name="Rounded Rectangle 5"/>
+              <a:t>LUYỆN TẬP NHANH</a:t>
+            </a:r>
+          </a:p>
+        </p:txBody>
+      </p:sp>
+      <p:sp>
+        <p:nvSpPr>
+          <p:cNvPr id="5" name="Rounded Rectangle 4"/>
           <p:cNvSpPr/>
           <p:nvPr/>
         </p:nvSpPr>
         <p:spPr>
           <a:xfrm>
-            <a:off x="457200" y="2286000"/>
-            <a:ext cx="5669280" cy="640080"/>
+            <a:off x="365760" y="1600200"/>
+            <a:ext cx="11247120" cy="914400"/>
           </a:xfrm>
           <a:prstGeom prst="roundRect">
             <a:avLst/>
@@ -4696,7 +6405,7 @@
           </a:solidFill>
           <a:ln w="19050">
             <a:solidFill>
-              <a:srgbClr val="EA580C"/>
+              <a:srgbClr val="0369A1"/>
             </a:solidFill>
           </a:ln>
         </p:spPr>
@@ -4724,20 +6433,20 @@
       </p:sp>
       <p:sp>
         <p:nvSpPr>
-          <p:cNvPr id="7" name="Rectangle 6"/>
+          <p:cNvPr id="6" name="Rounded Rectangle 5"/>
           <p:cNvSpPr/>
           <p:nvPr/>
         </p:nvSpPr>
         <p:spPr>
           <a:xfrm>
-            <a:off x="457200" y="2286000"/>
-            <a:ext cx="182880" cy="640080"/>
-          </a:xfrm>
-          <a:prstGeom prst="rect">
+            <a:off x="365760" y="1600200"/>
+            <a:ext cx="182880" cy="914400"/>
+          </a:xfrm>
+          <a:prstGeom prst="roundRect">
             <a:avLst/>
           </a:prstGeom>
           <a:solidFill>
-            <a:srgbClr val="EA580C"/>
+            <a:srgbClr val="0369A1"/>
           </a:solidFill>
           <a:ln>
             <a:noFill/>
@@ -4767,14 +6476,14 @@
       </p:sp>
       <p:sp>
         <p:nvSpPr>
-          <p:cNvPr id="8" name="TextBox 7"/>
+          <p:cNvPr id="7" name="TextBox 6"/>
           <p:cNvSpPr txBox="1"/>
           <p:nvPr/>
         </p:nvSpPr>
         <p:spPr>
           <a:xfrm>
-            <a:off x="822960" y="2395728"/>
-            <a:ext cx="5120640" cy="420623"/>
+            <a:off x="640080" y="1691640"/>
+            <a:ext cx="10698480" cy="731520"/>
           </a:xfrm>
           <a:prstGeom prst="rect">
             <a:avLst/>
@@ -4782,7 +6491,7 @@
           <a:noFill/>
         </p:spPr>
         <p:txBody>
-          <a:bodyPr wrap="square" lIns="73152" rIns="73152">
+          <a:bodyPr wrap="square" lIns="73152" rIns="73152" tIns="54864" bIns="54864">
             <a:spAutoFit/>
           </a:bodyPr>
           <a:lstStyle/>
@@ -4796,21 +6505,21 @@
               </a:defRPr>
             </a:pPr>
             <a:r>
-              <a:t>Chọn tệp cần nén -&gt; Nhấp chuột phải</a:t>
-            </a:r>
-          </a:p>
-        </p:txBody>
-      </p:sp>
-      <p:sp>
-        <p:nvSpPr>
-          <p:cNvPr id="9" name="Rounded Rectangle 8"/>
+              <a:t>❓ Đâu là phần mềm diệt virus và bảo vệ máy tính tích hợp sẵn trong Windows?</a:t>
+            </a:r>
+          </a:p>
+        </p:txBody>
+      </p:sp>
+      <p:sp>
+        <p:nvSpPr>
+          <p:cNvPr id="8" name="Rounded Rectangle 7"/>
           <p:cNvSpPr/>
           <p:nvPr/>
         </p:nvSpPr>
         <p:spPr>
           <a:xfrm>
-            <a:off x="457200" y="3054096"/>
-            <a:ext cx="5669280" cy="640080"/>
+            <a:off x="365760" y="2651760"/>
+            <a:ext cx="5440680" cy="1325879"/>
           </a:xfrm>
           <a:prstGeom prst="roundRect">
             <a:avLst/>
@@ -4820,7 +6529,7 @@
           </a:solidFill>
           <a:ln w="19050">
             <a:solidFill>
-              <a:srgbClr val="2563EB"/>
+              <a:srgbClr val="CBD5E1"/>
             </a:solidFill>
           </a:ln>
         </p:spPr>
@@ -4848,20 +6557,20 @@
       </p:sp>
       <p:sp>
         <p:nvSpPr>
-          <p:cNvPr id="10" name="Rectangle 9"/>
+          <p:cNvPr id="9" name="Oval 8"/>
           <p:cNvSpPr/>
           <p:nvPr/>
         </p:nvSpPr>
         <p:spPr>
           <a:xfrm>
-            <a:off x="457200" y="3054096"/>
-            <a:ext cx="182880" cy="640080"/>
-          </a:xfrm>
-          <a:prstGeom prst="rect">
+            <a:off x="548640" y="2880360"/>
+            <a:ext cx="822960" cy="822959"/>
+          </a:xfrm>
+          <a:prstGeom prst="ellipse">
             <a:avLst/>
           </a:prstGeom>
           <a:solidFill>
-            <a:srgbClr val="2563EB"/>
+            <a:srgbClr val="0369A1"/>
           </a:solidFill>
           <a:ln>
             <a:noFill/>
@@ -4891,14 +6600,50 @@
       </p:sp>
       <p:sp>
         <p:nvSpPr>
+          <p:cNvPr id="10" name="TextBox 9"/>
+          <p:cNvSpPr txBox="1"/>
+          <p:nvPr/>
+        </p:nvSpPr>
+        <p:spPr>
+          <a:xfrm>
+            <a:off x="548640" y="3063240"/>
+            <a:ext cx="822960" cy="457200"/>
+          </a:xfrm>
+          <a:prstGeom prst="rect">
+            <a:avLst/>
+          </a:prstGeom>
+          <a:noFill/>
+        </p:spPr>
+        <p:txBody>
+          <a:bodyPr wrap="square" lIns="73152" rIns="73152" tIns="54864" bIns="54864">
+            <a:spAutoFit/>
+          </a:bodyPr>
+          <a:lstStyle/>
+          <a:p>
+            <a:pPr algn="ctr">
+              <a:defRPr sz="1800" b="1">
+                <a:solidFill>
+                  <a:srgbClr val="FFFFFF"/>
+                </a:solidFill>
+                <a:latin typeface="Arial"/>
+              </a:defRPr>
+            </a:pPr>
+            <a:r>
+              <a:t>A.</a:t>
+            </a:r>
+          </a:p>
+        </p:txBody>
+      </p:sp>
+      <p:sp>
+        <p:nvSpPr>
           <p:cNvPr id="11" name="TextBox 10"/>
           <p:cNvSpPr txBox="1"/>
           <p:nvPr/>
         </p:nvSpPr>
         <p:spPr>
           <a:xfrm>
-            <a:off x="822960" y="3163824"/>
-            <a:ext cx="5120640" cy="420623"/>
+            <a:off x="1508760" y="2880360"/>
+            <a:ext cx="4160520" cy="960119"/>
           </a:xfrm>
           <a:prstGeom prst="rect">
             <a:avLst/>
@@ -4906,13 +6651,13 @@
           <a:noFill/>
         </p:spPr>
         <p:txBody>
-          <a:bodyPr wrap="square" lIns="73152" rIns="73152">
+          <a:bodyPr wrap="square" lIns="73152" rIns="73152" tIns="54864" bIns="54864">
             <a:spAutoFit/>
           </a:bodyPr>
           <a:lstStyle/>
           <a:p>
             <a:pPr algn="l">
-              <a:defRPr sz="1700" b="1">
+              <a:defRPr sz="1500" b="0">
                 <a:solidFill>
                   <a:srgbClr val="0F172A"/>
                 </a:solidFill>
@@ -4920,7 +6665,7 @@
               </a:defRPr>
             </a:pPr>
             <a:r>
-              <a:t>Chọn Send to -&gt; Compressed (zipped) folder</a:t>
+              <a:t>Microsoft Word</a:t>
             </a:r>
           </a:p>
         </p:txBody>
@@ -4933,8 +6678,8 @@
         </p:nvSpPr>
         <p:spPr>
           <a:xfrm>
-            <a:off x="457200" y="3822191"/>
-            <a:ext cx="5669280" cy="640080"/>
+            <a:off x="6172200" y="2651760"/>
+            <a:ext cx="5440680" cy="1325879"/>
           </a:xfrm>
           <a:prstGeom prst="roundRect">
             <a:avLst/>
@@ -4944,7 +6689,7 @@
           </a:solidFill>
           <a:ln w="19050">
             <a:solidFill>
-              <a:srgbClr val="059669"/>
+              <a:srgbClr val="CBD5E1"/>
             </a:solidFill>
           </a:ln>
         </p:spPr>
@@ -4972,20 +6717,20 @@
       </p:sp>
       <p:sp>
         <p:nvSpPr>
-          <p:cNvPr id="13" name="Rectangle 12"/>
+          <p:cNvPr id="13" name="Oval 12"/>
           <p:cNvSpPr/>
           <p:nvPr/>
         </p:nvSpPr>
         <p:spPr>
           <a:xfrm>
-            <a:off x="457200" y="3822191"/>
-            <a:ext cx="182880" cy="640080"/>
-          </a:xfrm>
-          <a:prstGeom prst="rect">
+            <a:off x="6355080" y="2880360"/>
+            <a:ext cx="822960" cy="822959"/>
+          </a:xfrm>
+          <a:prstGeom prst="ellipse">
             <a:avLst/>
           </a:prstGeom>
           <a:solidFill>
-            <a:srgbClr val="059669"/>
+            <a:srgbClr val="0D9488"/>
           </a:solidFill>
           <a:ln>
             <a:noFill/>
@@ -5021,8 +6766,8 @@
         </p:nvSpPr>
         <p:spPr>
           <a:xfrm>
-            <a:off x="822960" y="3931920"/>
-            <a:ext cx="5120640" cy="420623"/>
+            <a:off x="6355080" y="3063240"/>
+            <a:ext cx="822960" cy="457200"/>
           </a:xfrm>
           <a:prstGeom prst="rect">
             <a:avLst/>
@@ -5030,13 +6775,49 @@
           <a:noFill/>
         </p:spPr>
         <p:txBody>
-          <a:bodyPr wrap="square" lIns="73152" rIns="73152">
+          <a:bodyPr wrap="square" lIns="73152" rIns="73152" tIns="54864" bIns="54864">
             <a:spAutoFit/>
           </a:bodyPr>
           <a:lstStyle/>
           <a:p>
+            <a:pPr algn="ctr">
+              <a:defRPr sz="1800" b="1">
+                <a:solidFill>
+                  <a:srgbClr val="FFFFFF"/>
+                </a:solidFill>
+                <a:latin typeface="Arial"/>
+              </a:defRPr>
+            </a:pPr>
+            <a:r>
+              <a:t>B.</a:t>
+            </a:r>
+          </a:p>
+        </p:txBody>
+      </p:sp>
+      <p:sp>
+        <p:nvSpPr>
+          <p:cNvPr id="15" name="TextBox 14"/>
+          <p:cNvSpPr txBox="1"/>
+          <p:nvPr/>
+        </p:nvSpPr>
+        <p:spPr>
+          <a:xfrm>
+            <a:off x="7315200" y="2880360"/>
+            <a:ext cx="4160520" cy="960119"/>
+          </a:xfrm>
+          <a:prstGeom prst="rect">
+            <a:avLst/>
+          </a:prstGeom>
+          <a:noFill/>
+        </p:spPr>
+        <p:txBody>
+          <a:bodyPr wrap="square" lIns="73152" rIns="73152" tIns="54864" bIns="54864">
+            <a:spAutoFit/>
+          </a:bodyPr>
+          <a:lstStyle/>
+          <a:p>
             <a:pPr algn="l">
-              <a:defRPr sz="1700" b="1">
+              <a:defRPr sz="1500" b="0">
                 <a:solidFill>
                   <a:srgbClr val="0F172A"/>
                 </a:solidFill>
@@ -5044,21 +6825,21 @@
               </a:defRPr>
             </a:pPr>
             <a:r>
-              <a:t>Tệp .zip giúp gửi thư điện tử nhanh chóng</a:t>
-            </a:r>
-          </a:p>
-        </p:txBody>
-      </p:sp>
-      <p:sp>
-        <p:nvSpPr>
-          <p:cNvPr id="15" name="Rounded Rectangle 14"/>
+              <a:t>Windows Defender</a:t>
+            </a:r>
+          </a:p>
+        </p:txBody>
+      </p:sp>
+      <p:sp>
+        <p:nvSpPr>
+          <p:cNvPr id="16" name="Rounded Rectangle 15"/>
           <p:cNvSpPr/>
           <p:nvPr/>
         </p:nvSpPr>
         <p:spPr>
           <a:xfrm>
-            <a:off x="457200" y="4590288"/>
-            <a:ext cx="5669280" cy="640080"/>
+            <a:off x="365760" y="4114800"/>
+            <a:ext cx="5440680" cy="1325880"/>
           </a:xfrm>
           <a:prstGeom prst="roundRect">
             <a:avLst/>
@@ -5068,7 +6849,7 @@
           </a:solidFill>
           <a:ln w="19050">
             <a:solidFill>
-              <a:srgbClr val="D97706"/>
+              <a:srgbClr val="CBD5E1"/>
             </a:solidFill>
           </a:ln>
         </p:spPr>
@@ -5096,16 +6877,16 @@
       </p:sp>
       <p:sp>
         <p:nvSpPr>
-          <p:cNvPr id="16" name="Rectangle 15"/>
+          <p:cNvPr id="17" name="Oval 16"/>
           <p:cNvSpPr/>
           <p:nvPr/>
         </p:nvSpPr>
         <p:spPr>
           <a:xfrm>
-            <a:off x="457200" y="4590288"/>
-            <a:ext cx="182880" cy="640080"/>
-          </a:xfrm>
-          <a:prstGeom prst="rect">
+            <a:off x="548640" y="4343400"/>
+            <a:ext cx="822960" cy="822960"/>
+          </a:xfrm>
+          <a:prstGeom prst="ellipse">
             <a:avLst/>
           </a:prstGeom>
           <a:solidFill>
@@ -5139,14 +6920,14 @@
       </p:sp>
       <p:sp>
         <p:nvSpPr>
-          <p:cNvPr id="17" name="TextBox 16"/>
+          <p:cNvPr id="18" name="TextBox 17"/>
           <p:cNvSpPr txBox="1"/>
           <p:nvPr/>
         </p:nvSpPr>
         <p:spPr>
           <a:xfrm>
-            <a:off x="822960" y="4700016"/>
-            <a:ext cx="5120640" cy="420623"/>
+            <a:off x="548640" y="4526280"/>
+            <a:ext cx="822960" cy="457200"/>
           </a:xfrm>
           <a:prstGeom prst="rect">
             <a:avLst/>
@@ -5154,13 +6935,49 @@
           <a:noFill/>
         </p:spPr>
         <p:txBody>
-          <a:bodyPr wrap="square" lIns="73152" rIns="73152">
+          <a:bodyPr wrap="square" lIns="73152" rIns="73152" tIns="54864" bIns="54864">
             <a:spAutoFit/>
           </a:bodyPr>
           <a:lstStyle/>
           <a:p>
+            <a:pPr algn="ctr">
+              <a:defRPr sz="1800" b="1">
+                <a:solidFill>
+                  <a:srgbClr val="FFFFFF"/>
+                </a:solidFill>
+                <a:latin typeface="Arial"/>
+              </a:defRPr>
+            </a:pPr>
+            <a:r>
+              <a:t>C.</a:t>
+            </a:r>
+          </a:p>
+        </p:txBody>
+      </p:sp>
+      <p:sp>
+        <p:nvSpPr>
+          <p:cNvPr id="19" name="TextBox 18"/>
+          <p:cNvSpPr txBox="1"/>
+          <p:nvPr/>
+        </p:nvSpPr>
+        <p:spPr>
+          <a:xfrm>
+            <a:off x="1508760" y="4343400"/>
+            <a:ext cx="4160520" cy="960119"/>
+          </a:xfrm>
+          <a:prstGeom prst="rect">
+            <a:avLst/>
+          </a:prstGeom>
+          <a:noFill/>
+        </p:spPr>
+        <p:txBody>
+          <a:bodyPr wrap="square" lIns="73152" rIns="73152" tIns="54864" bIns="54864">
+            <a:spAutoFit/>
+          </a:bodyPr>
+          <a:lstStyle/>
+          <a:p>
             <a:pPr algn="l">
-              <a:defRPr sz="1700" b="1">
+              <a:defRPr sz="1500" b="0">
                 <a:solidFill>
                   <a:srgbClr val="0F172A"/>
                 </a:solidFill>
@@ -5168,42 +6985,178 @@
               </a:defRPr>
             </a:pPr>
             <a:r>
-              <a:t>Nhấp chuột phải -&gt; Extract All để giải nén</a:t>
-            </a:r>
-          </a:p>
-        </p:txBody>
-      </p:sp>
-      <p:pic>
-        <p:nvPicPr>
-          <p:cNvPr id="18" name="Picture 17" descr="learn1_card3.png"/>
-          <p:cNvPicPr>
-            <a:picLocks noChangeAspect="1"/>
-          </p:cNvPicPr>
-          <p:nvPr/>
-        </p:nvPicPr>
-        <p:blipFill>
-          <a:blip r:embed="rId2"/>
-          <a:stretch>
-            <a:fillRect/>
-          </a:stretch>
-        </p:blipFill>
-        <p:spPr>
-          <a:xfrm>
-            <a:off x="6400800" y="2286000"/>
-            <a:ext cx="5330952" cy="3383279"/>
+              <a:t>File Explorer</a:t>
+            </a:r>
+          </a:p>
+        </p:txBody>
+      </p:sp>
+      <p:sp>
+        <p:nvSpPr>
+          <p:cNvPr id="20" name="Rounded Rectangle 19"/>
+          <p:cNvSpPr/>
+          <p:nvPr/>
+        </p:nvSpPr>
+        <p:spPr>
+          <a:xfrm>
+            <a:off x="6172200" y="4114800"/>
+            <a:ext cx="5440680" cy="1325880"/>
+          </a:xfrm>
+          <a:prstGeom prst="roundRect">
+            <a:avLst/>
+          </a:prstGeom>
+          <a:solidFill>
+            <a:srgbClr val="FFFFFF"/>
+          </a:solidFill>
+          <a:ln w="19050">
+            <a:solidFill>
+              <a:srgbClr val="CBD5E1"/>
+            </a:solidFill>
+          </a:ln>
+        </p:spPr>
+        <p:style>
+          <a:lnRef idx="1">
+            <a:schemeClr val="accent1"/>
+          </a:lnRef>
+          <a:fillRef idx="3">
+            <a:schemeClr val="accent1"/>
+          </a:fillRef>
+          <a:effectRef idx="2">
+            <a:schemeClr val="accent1"/>
+          </a:effectRef>
+          <a:fontRef idx="minor">
+            <a:schemeClr val="lt1"/>
+          </a:fontRef>
+        </p:style>
+        <p:txBody>
+          <a:bodyPr rtlCol="0" anchor="ctr"/>
+          <a:lstStyle/>
+          <a:p>
+            <a:pPr algn="ctr"/>
+          </a:p>
+        </p:txBody>
+      </p:sp>
+      <p:sp>
+        <p:nvSpPr>
+          <p:cNvPr id="21" name="Oval 20"/>
+          <p:cNvSpPr/>
+          <p:nvPr/>
+        </p:nvSpPr>
+        <p:spPr>
+          <a:xfrm>
+            <a:off x="6355080" y="4343400"/>
+            <a:ext cx="822960" cy="822960"/>
+          </a:xfrm>
+          <a:prstGeom prst="ellipse">
+            <a:avLst/>
+          </a:prstGeom>
+          <a:solidFill>
+            <a:srgbClr val="7C3AED"/>
+          </a:solidFill>
+          <a:ln>
+            <a:noFill/>
+          </a:ln>
+        </p:spPr>
+        <p:style>
+          <a:lnRef idx="1">
+            <a:schemeClr val="accent1"/>
+          </a:lnRef>
+          <a:fillRef idx="3">
+            <a:schemeClr val="accent1"/>
+          </a:fillRef>
+          <a:effectRef idx="2">
+            <a:schemeClr val="accent1"/>
+          </a:effectRef>
+          <a:fontRef idx="minor">
+            <a:schemeClr val="lt1"/>
+          </a:fontRef>
+        </p:style>
+        <p:txBody>
+          <a:bodyPr rtlCol="0" anchor="ctr"/>
+          <a:lstStyle/>
+          <a:p>
+            <a:pPr algn="ctr"/>
+          </a:p>
+        </p:txBody>
+      </p:sp>
+      <p:sp>
+        <p:nvSpPr>
+          <p:cNvPr id="22" name="TextBox 21"/>
+          <p:cNvSpPr txBox="1"/>
+          <p:nvPr/>
+        </p:nvSpPr>
+        <p:spPr>
+          <a:xfrm>
+            <a:off x="6355080" y="4526280"/>
+            <a:ext cx="822960" cy="457200"/>
           </a:xfrm>
           <a:prstGeom prst="rect">
             <a:avLst/>
           </a:prstGeom>
-        </p:spPr>
-      </p:pic>
+          <a:noFill/>
+        </p:spPr>
+        <p:txBody>
+          <a:bodyPr wrap="square" lIns="73152" rIns="73152" tIns="54864" bIns="54864">
+            <a:spAutoFit/>
+          </a:bodyPr>
+          <a:lstStyle/>
+          <a:p>
+            <a:pPr algn="ctr">
+              <a:defRPr sz="1800" b="1">
+                <a:solidFill>
+                  <a:srgbClr val="FFFFFF"/>
+                </a:solidFill>
+                <a:latin typeface="Arial"/>
+              </a:defRPr>
+            </a:pPr>
+            <a:r>
+              <a:t>D.</a:t>
+            </a:r>
+          </a:p>
+        </p:txBody>
+      </p:sp>
+      <p:sp>
+        <p:nvSpPr>
+          <p:cNvPr id="23" name="TextBox 22"/>
+          <p:cNvSpPr txBox="1"/>
+          <p:nvPr/>
+        </p:nvSpPr>
+        <p:spPr>
+          <a:xfrm>
+            <a:off x="7315200" y="4343400"/>
+            <a:ext cx="4160520" cy="960119"/>
+          </a:xfrm>
+          <a:prstGeom prst="rect">
+            <a:avLst/>
+          </a:prstGeom>
+          <a:noFill/>
+        </p:spPr>
+        <p:txBody>
+          <a:bodyPr wrap="square" lIns="73152" rIns="73152" tIns="54864" bIns="54864">
+            <a:spAutoFit/>
+          </a:bodyPr>
+          <a:lstStyle/>
+          <a:p>
+            <a:pPr algn="l">
+              <a:defRPr sz="1500" b="0">
+                <a:solidFill>
+                  <a:srgbClr val="0F172A"/>
+                </a:solidFill>
+                <a:latin typeface="Arial"/>
+              </a:defRPr>
+            </a:pPr>
+            <a:r>
+              <a:t>Google Chrome</a:t>
+            </a:r>
+          </a:p>
+        </p:txBody>
+      </p:sp>
     </p:spTree>
   </p:cSld>
   <p:clrMapOvr>
     <a:masterClrMapping/>
   </p:clrMapOvr>
   <p:transition spd="med">
-    <p:wipe/>
+    <p:fade/>
   </p:transition>
 </p:sld>
 </file>
@@ -5233,7 +7186,7 @@
             <a:avLst/>
           </a:prstGeom>
           <a:solidFill>
-            <a:srgbClr val="F0F9FF"/>
+            <a:srgbClr val="0369A1"/>
           </a:solidFill>
           <a:ln>
             <a:noFill/>
@@ -5263,93 +7216,14 @@
       </p:sp>
       <p:sp>
         <p:nvSpPr>
-          <p:cNvPr id="3" name="Rectangle 2"/>
+          <p:cNvPr id="3" name="Rounded Rectangle 2"/>
           <p:cNvSpPr/>
           <p:nvPr/>
         </p:nvSpPr>
         <p:spPr>
           <a:xfrm>
-            <a:off x="0" y="1097280"/>
-            <a:ext cx="12188952" cy="411479"/>
-          </a:xfrm>
-          <a:prstGeom prst="rect">
-            <a:avLst/>
-          </a:prstGeom>
-          <a:solidFill>
-            <a:srgbClr val="0369A1"/>
-          </a:solidFill>
-          <a:ln>
-            <a:noFill/>
-          </a:ln>
-        </p:spPr>
-        <p:style>
-          <a:lnRef idx="1">
-            <a:schemeClr val="accent1"/>
-          </a:lnRef>
-          <a:fillRef idx="3">
-            <a:schemeClr val="accent1"/>
-          </a:fillRef>
-          <a:effectRef idx="2">
-            <a:schemeClr val="accent1"/>
-          </a:effectRef>
-          <a:fontRef idx="minor">
-            <a:schemeClr val="lt1"/>
-          </a:fontRef>
-        </p:style>
-        <p:txBody>
-          <a:bodyPr rtlCol="0" anchor="ctr"/>
-          <a:lstStyle/>
-          <a:p>
-            <a:pPr algn="ctr"/>
-          </a:p>
-        </p:txBody>
-      </p:sp>
-      <p:sp>
-        <p:nvSpPr>
-          <p:cNvPr id="4" name="TextBox 3"/>
-          <p:cNvSpPr txBox="1"/>
-          <p:nvPr/>
-        </p:nvSpPr>
-        <p:spPr>
-          <a:xfrm>
-            <a:off x="274320" y="1124712"/>
-            <a:ext cx="11640312" cy="365759"/>
-          </a:xfrm>
-          <a:prstGeom prst="rect">
-            <a:avLst/>
-          </a:prstGeom>
-          <a:noFill/>
-        </p:spPr>
-        <p:txBody>
-          <a:bodyPr wrap="square" lIns="73152" rIns="73152">
-            <a:spAutoFit/>
-          </a:bodyPr>
-          <a:lstStyle/>
-          <a:p>
-            <a:pPr algn="l">
-              <a:defRPr sz="1300" b="1">
-                <a:solidFill>
-                  <a:srgbClr val="FFFFFF"/>
-                </a:solidFill>
-                <a:latin typeface="Arial"/>
-              </a:defRPr>
-            </a:pPr>
-            <a:r>
-              <a:t>  LỚP 7 • BÀI HỌC VÀ KẾT LUẬN</a:t>
-            </a:r>
-          </a:p>
-        </p:txBody>
-      </p:sp>
-      <p:sp>
-        <p:nvSpPr>
-          <p:cNvPr id="5" name="Rounded Rectangle 4"/>
-          <p:cNvSpPr/>
-          <p:nvPr/>
-        </p:nvSpPr>
-        <p:spPr>
-          <a:xfrm>
-            <a:off x="548640" y="1645919"/>
-            <a:ext cx="7772400" cy="822959"/>
+            <a:off x="1828800" y="1645920"/>
+            <a:ext cx="8531352" cy="3474720"/>
           </a:xfrm>
           <a:prstGeom prst="roundRect">
             <a:avLst/>
@@ -5387,14 +7261,57 @@
       </p:sp>
       <p:sp>
         <p:nvSpPr>
-          <p:cNvPr id="6" name="TextBox 5"/>
+          <p:cNvPr id="4" name="Rounded Rectangle 3"/>
+          <p:cNvSpPr/>
+          <p:nvPr/>
+        </p:nvSpPr>
+        <p:spPr>
+          <a:xfrm>
+            <a:off x="1828800" y="1645920"/>
+            <a:ext cx="8531352" cy="182879"/>
+          </a:xfrm>
+          <a:prstGeom prst="roundRect">
+            <a:avLst/>
+          </a:prstGeom>
+          <a:solidFill>
+            <a:srgbClr val="0EA5E9"/>
+          </a:solidFill>
+          <a:ln>
+            <a:noFill/>
+          </a:ln>
+        </p:spPr>
+        <p:style>
+          <a:lnRef idx="1">
+            <a:schemeClr val="accent1"/>
+          </a:lnRef>
+          <a:fillRef idx="3">
+            <a:schemeClr val="accent1"/>
+          </a:fillRef>
+          <a:effectRef idx="2">
+            <a:schemeClr val="accent1"/>
+          </a:effectRef>
+          <a:fontRef idx="minor">
+            <a:schemeClr val="lt1"/>
+          </a:fontRef>
+        </p:style>
+        <p:txBody>
+          <a:bodyPr rtlCol="0" anchor="ctr"/>
+          <a:lstStyle/>
+          <a:p>
+            <a:pPr algn="ctr"/>
+          </a:p>
+        </p:txBody>
+      </p:sp>
+      <p:sp>
+        <p:nvSpPr>
+          <p:cNvPr id="5" name="TextBox 4"/>
           <p:cNvSpPr txBox="1"/>
           <p:nvPr/>
         </p:nvSpPr>
         <p:spPr>
           <a:xfrm>
-            <a:off x="822960" y="1783079"/>
-            <a:ext cx="7315200" cy="548640"/>
+            <a:off x="2011680" y="2011680"/>
+            <a:ext cx="8165592" cy="731519"/>
           </a:xfrm>
           <a:prstGeom prst="rect">
             <a:avLst/>
@@ -5402,13 +7319,13 @@
           <a:noFill/>
         </p:spPr>
         <p:txBody>
-          <a:bodyPr wrap="square" lIns="73152" rIns="73152">
+          <a:bodyPr wrap="square" lIns="73152" rIns="73152" tIns="54864" bIns="54864">
             <a:spAutoFit/>
           </a:bodyPr>
           <a:lstStyle/>
           <a:p>
-            <a:pPr algn="l">
-              <a:defRPr sz="2000" b="1">
+            <a:pPr algn="ctr">
+              <a:defRPr sz="2400" b="1">
                 <a:solidFill>
                   <a:srgbClr val="0369A1"/>
                 </a:solidFill>
@@ -5416,21 +7333,21 @@
               </a:defRPr>
             </a:pPr>
             <a:r>
-              <a:t>💬 Tại sao phải sao lưu dữ liệu sang nhiều nơi?</a:t>
-            </a:r>
-          </a:p>
-        </p:txBody>
-      </p:sp>
-      <p:sp>
-        <p:nvSpPr>
-          <p:cNvPr id="7" name="TextBox 6"/>
+              <a:t>HOÀN THÀNH TIẾT 3! 🌟</a:t>
+            </a:r>
+          </a:p>
+        </p:txBody>
+      </p:sp>
+      <p:sp>
+        <p:nvSpPr>
+          <p:cNvPr id="6" name="TextBox 5"/>
           <p:cNvSpPr txBox="1"/>
           <p:nvPr/>
         </p:nvSpPr>
         <p:spPr>
           <a:xfrm>
-            <a:off x="731520" y="2651760"/>
-            <a:ext cx="7315200" cy="1188720"/>
+            <a:off x="2011680" y="2834640"/>
+            <a:ext cx="8165592" cy="1097279"/>
           </a:xfrm>
           <a:prstGeom prst="rect">
             <a:avLst/>
@@ -5438,16 +7355,13 @@
           <a:noFill/>
         </p:spPr>
         <p:txBody>
-          <a:bodyPr wrap="square" lIns="73152" rIns="73152">
+          <a:bodyPr wrap="square" lIns="73152" rIns="73152" tIns="54864" bIns="54864">
             <a:spAutoFit/>
           </a:bodyPr>
           <a:lstStyle/>
           <a:p>
-            <a:pPr algn="l">
-              <a:spcAft>
-                <a:spcPts val="600"/>
-              </a:spcAft>
-              <a:defRPr sz="1800" b="0">
+            <a:pPr algn="ctr">
+              <a:defRPr sz="1700" b="0">
                 <a:solidFill>
                   <a:srgbClr val="0F172A"/>
                 </a:solidFill>
@@ -5455,171 +7369,43 @@
               </a:defRPr>
             </a:pPr>
             <a:r>
-              <a:t>👉 Đề phòng máy tính bị hỏng ổ cứng hoặc nhiễm virus.</a:t>
-            </a:r>
-          </a:p>
-          <a:p>
-            <a:pPr algn="l">
-              <a:spcAft>
-                <a:spcPts val="600"/>
-              </a:spcAft>
-              <a:defRPr sz="1800" b="0">
+              <a:t>BTVN: Kiểm tra và sao lưu các tài liệu học tập của em lên Google Drive hoặc USB!</a:t>
+            </a:r>
+          </a:p>
+        </p:txBody>
+      </p:sp>
+      <p:sp>
+        <p:nvSpPr>
+          <p:cNvPr id="7" name="TextBox 6"/>
+          <p:cNvSpPr txBox="1"/>
+          <p:nvPr/>
+        </p:nvSpPr>
+        <p:spPr>
+          <a:xfrm>
+            <a:off x="2011680" y="4114800"/>
+            <a:ext cx="8165592" cy="548639"/>
+          </a:xfrm>
+          <a:prstGeom prst="rect">
+            <a:avLst/>
+          </a:prstGeom>
+          <a:noFill/>
+        </p:spPr>
+        <p:txBody>
+          <a:bodyPr wrap="square" lIns="73152" rIns="73152" tIns="54864" bIns="54864">
+            <a:spAutoFit/>
+          </a:bodyPr>
+          <a:lstStyle/>
+          <a:p>
+            <a:pPr algn="ctr">
+              <a:defRPr sz="1600" b="1">
                 <a:solidFill>
-                  <a:srgbClr val="0F172A"/>
+                  <a:srgbClr val="0EA5E9"/>
                 </a:solidFill>
                 <a:latin typeface="Arial"/>
               </a:defRPr>
             </a:pPr>
             <a:r>
-              <a:t>👉 Có thể khôi phục lại dữ liệu học tập bất cứ lúc nào.</a:t>
-            </a:r>
-          </a:p>
-        </p:txBody>
-      </p:sp>
-      <p:pic>
-        <p:nvPicPr>
-          <p:cNvPr id="8" name="Picture 7" descr="learn1_card2.png"/>
-          <p:cNvPicPr>
-            <a:picLocks noChangeAspect="1"/>
-          </p:cNvPicPr>
-          <p:nvPr/>
-        </p:nvPicPr>
-        <p:blipFill>
-          <a:blip r:embed="rId2"/>
-          <a:stretch>
-            <a:fillRect/>
-          </a:stretch>
-        </p:blipFill>
-        <p:spPr>
-          <a:xfrm>
-            <a:off x="8686800" y="1645919"/>
-            <a:ext cx="2926080" cy="2103120"/>
-          </a:xfrm>
-          <a:prstGeom prst="rect">
-            <a:avLst/>
-          </a:prstGeom>
-        </p:spPr>
-      </p:pic>
-      <p:sp>
-        <p:nvSpPr>
-          <p:cNvPr id="9" name="Rounded Rectangle 8"/>
-          <p:cNvSpPr/>
-          <p:nvPr/>
-        </p:nvSpPr>
-        <p:spPr>
-          <a:xfrm>
-            <a:off x="548640" y="4526279"/>
-            <a:ext cx="11091672" cy="1143000"/>
-          </a:xfrm>
-          <a:prstGeom prst="roundRect">
-            <a:avLst/>
-          </a:prstGeom>
-          <a:solidFill>
-            <a:srgbClr val="FFF7ED"/>
-          </a:solidFill>
-          <a:ln w="19050">
-            <a:solidFill>
-              <a:srgbClr val="EA580C"/>
-            </a:solidFill>
-          </a:ln>
-        </p:spPr>
-        <p:style>
-          <a:lnRef idx="1">
-            <a:schemeClr val="accent1"/>
-          </a:lnRef>
-          <a:fillRef idx="3">
-            <a:schemeClr val="accent1"/>
-          </a:fillRef>
-          <a:effectRef idx="2">
-            <a:schemeClr val="accent1"/>
-          </a:effectRef>
-          <a:fontRef idx="minor">
-            <a:schemeClr val="lt1"/>
-          </a:fontRef>
-        </p:style>
-        <p:txBody>
-          <a:bodyPr rtlCol="0" anchor="ctr"/>
-          <a:lstStyle/>
-          <a:p>
-            <a:pPr algn="ctr"/>
-          </a:p>
-        </p:txBody>
-      </p:sp>
-      <p:sp>
-        <p:nvSpPr>
-          <p:cNvPr id="10" name="Rectangle 9"/>
-          <p:cNvSpPr/>
-          <p:nvPr/>
-        </p:nvSpPr>
-        <p:spPr>
-          <a:xfrm>
-            <a:off x="548640" y="4526279"/>
-            <a:ext cx="182880" cy="1143000"/>
-          </a:xfrm>
-          <a:prstGeom prst="rect">
-            <a:avLst/>
-          </a:prstGeom>
-          <a:solidFill>
-            <a:srgbClr val="EA580C"/>
-          </a:solidFill>
-          <a:ln>
-            <a:noFill/>
-          </a:ln>
-        </p:spPr>
-        <p:style>
-          <a:lnRef idx="1">
-            <a:schemeClr val="accent1"/>
-          </a:lnRef>
-          <a:fillRef idx="3">
-            <a:schemeClr val="accent1"/>
-          </a:fillRef>
-          <a:effectRef idx="2">
-            <a:schemeClr val="accent1"/>
-          </a:effectRef>
-          <a:fontRef idx="minor">
-            <a:schemeClr val="lt1"/>
-          </a:fontRef>
-        </p:style>
-        <p:txBody>
-          <a:bodyPr rtlCol="0" anchor="ctr"/>
-          <a:lstStyle/>
-          <a:p>
-            <a:pPr algn="ctr"/>
-          </a:p>
-        </p:txBody>
-      </p:sp>
-      <p:sp>
-        <p:nvSpPr>
-          <p:cNvPr id="11" name="TextBox 10"/>
-          <p:cNvSpPr txBox="1"/>
-          <p:nvPr/>
-        </p:nvSpPr>
-        <p:spPr>
-          <a:xfrm>
-            <a:off x="914400" y="4709159"/>
-            <a:ext cx="10543032" cy="777239"/>
-          </a:xfrm>
-          <a:prstGeom prst="rect">
-            <a:avLst/>
-          </a:prstGeom>
-          <a:noFill/>
-        </p:spPr>
-        <p:txBody>
-          <a:bodyPr wrap="square" lIns="73152" rIns="73152">
-            <a:spAutoFit/>
-          </a:bodyPr>
-          <a:lstStyle/>
-          <a:p>
-            <a:pPr algn="l">
-              <a:defRPr sz="2000" b="1">
-                <a:solidFill>
-                  <a:srgbClr val="9A3412"/>
-                </a:solidFill>
-                <a:latin typeface="Arial"/>
-              </a:defRPr>
-            </a:pPr>
-            <a:r>
-              <a:t>💡 KẾT LUẬN: Chủ động sao lưu và bảo mật dữ liệu là thói quen quan trọng của công dân số thông minh!</a:t>
+              <a:t>Hẹn gặp lại các em ở bài học tuần sau! 🚀</a:t>
             </a:r>
           </a:p>
         </p:txBody>
@@ -5631,681 +7417,6 @@
   </p:clrMapOvr>
   <p:transition spd="med">
     <p:cover/>
-  </p:transition>
-</p:sld>
-</file>
-
-<file path=ppt/slides/slide9.xml><?xml version="1.0" encoding="utf-8"?>
-<p:sld xmlns:a="http://schemas.openxmlformats.org/drawingml/2006/main" xmlns:p="http://schemas.openxmlformats.org/presentationml/2006/main" xmlns:r="http://schemas.openxmlformats.org/officeDocument/2006/relationships">
-  <p:cSld>
-    <p:spTree>
-      <p:nvGrpSpPr>
-        <p:cNvPr id="1" name=""/>
-        <p:cNvGrpSpPr/>
-        <p:nvPr/>
-      </p:nvGrpSpPr>
-      <p:grpSpPr/>
-      <p:sp>
-        <p:nvSpPr>
-          <p:cNvPr id="2" name="Rectangle 1"/>
-          <p:cNvSpPr/>
-          <p:nvPr/>
-        </p:nvSpPr>
-        <p:spPr>
-          <a:xfrm>
-            <a:off x="0" y="1051560"/>
-            <a:ext cx="12188952" cy="4754879"/>
-          </a:xfrm>
-          <a:prstGeom prst="rect">
-            <a:avLst/>
-          </a:prstGeom>
-          <a:solidFill>
-            <a:srgbClr val="F0F9FF"/>
-          </a:solidFill>
-          <a:ln>
-            <a:noFill/>
-          </a:ln>
-        </p:spPr>
-        <p:style>
-          <a:lnRef idx="1">
-            <a:schemeClr val="accent1"/>
-          </a:lnRef>
-          <a:fillRef idx="3">
-            <a:schemeClr val="accent1"/>
-          </a:fillRef>
-          <a:effectRef idx="2">
-            <a:schemeClr val="accent1"/>
-          </a:effectRef>
-          <a:fontRef idx="minor">
-            <a:schemeClr val="lt1"/>
-          </a:fontRef>
-        </p:style>
-        <p:txBody>
-          <a:bodyPr rtlCol="0" anchor="ctr"/>
-          <a:lstStyle/>
-          <a:p>
-            <a:pPr algn="ctr"/>
-          </a:p>
-        </p:txBody>
-      </p:sp>
-      <p:sp>
-        <p:nvSpPr>
-          <p:cNvPr id="3" name="Rectangle 2"/>
-          <p:cNvSpPr/>
-          <p:nvPr/>
-        </p:nvSpPr>
-        <p:spPr>
-          <a:xfrm>
-            <a:off x="0" y="1097280"/>
-            <a:ext cx="12188952" cy="411479"/>
-          </a:xfrm>
-          <a:prstGeom prst="rect">
-            <a:avLst/>
-          </a:prstGeom>
-          <a:solidFill>
-            <a:srgbClr val="D97706"/>
-          </a:solidFill>
-          <a:ln>
-            <a:noFill/>
-          </a:ln>
-        </p:spPr>
-        <p:style>
-          <a:lnRef idx="1">
-            <a:schemeClr val="accent1"/>
-          </a:lnRef>
-          <a:fillRef idx="3">
-            <a:schemeClr val="accent1"/>
-          </a:fillRef>
-          <a:effectRef idx="2">
-            <a:schemeClr val="accent1"/>
-          </a:effectRef>
-          <a:fontRef idx="minor">
-            <a:schemeClr val="lt1"/>
-          </a:fontRef>
-        </p:style>
-        <p:txBody>
-          <a:bodyPr rtlCol="0" anchor="ctr"/>
-          <a:lstStyle/>
-          <a:p>
-            <a:pPr algn="ctr"/>
-          </a:p>
-        </p:txBody>
-      </p:sp>
-      <p:sp>
-        <p:nvSpPr>
-          <p:cNvPr id="4" name="TextBox 3"/>
-          <p:cNvSpPr txBox="1"/>
-          <p:nvPr/>
-        </p:nvSpPr>
-        <p:spPr>
-          <a:xfrm>
-            <a:off x="274320" y="1124712"/>
-            <a:ext cx="11640312" cy="365759"/>
-          </a:xfrm>
-          <a:prstGeom prst="rect">
-            <a:avLst/>
-          </a:prstGeom>
-          <a:noFill/>
-        </p:spPr>
-        <p:txBody>
-          <a:bodyPr wrap="square" lIns="73152" rIns="73152">
-            <a:spAutoFit/>
-          </a:bodyPr>
-          <a:lstStyle/>
-          <a:p>
-            <a:pPr algn="l">
-              <a:defRPr sz="1300" b="1">
-                <a:solidFill>
-                  <a:srgbClr val="FFFFFF"/>
-                </a:solidFill>
-                <a:latin typeface="Arial"/>
-              </a:defRPr>
-            </a:pPr>
-            <a:r>
-              <a:t>  LỚP 7 • THỬ THÁCH TRẮC NGHIỆM VUI</a:t>
-            </a:r>
-          </a:p>
-        </p:txBody>
-      </p:sp>
-      <p:sp>
-        <p:nvSpPr>
-          <p:cNvPr id="5" name="TextBox 4"/>
-          <p:cNvSpPr txBox="1"/>
-          <p:nvPr/>
-        </p:nvSpPr>
-        <p:spPr>
-          <a:xfrm>
-            <a:off x="457200" y="1600200"/>
-            <a:ext cx="11274552" cy="640080"/>
-          </a:xfrm>
-          <a:prstGeom prst="rect">
-            <a:avLst/>
-          </a:prstGeom>
-          <a:noFill/>
-        </p:spPr>
-        <p:txBody>
-          <a:bodyPr wrap="square" lIns="73152" rIns="73152">
-            <a:spAutoFit/>
-          </a:bodyPr>
-          <a:lstStyle/>
-          <a:p>
-            <a:pPr algn="l">
-              <a:defRPr sz="2200" b="1">
-                <a:solidFill>
-                  <a:srgbClr val="1E293B"/>
-                </a:solidFill>
-                <a:latin typeface="Arial"/>
-              </a:defRPr>
-            </a:pPr>
-            <a:r>
-              <a:t>❓ Định dạng tệp nào sau đây là tệp nén dữ liệu?</a:t>
-            </a:r>
-          </a:p>
-        </p:txBody>
-      </p:sp>
-      <p:sp>
-        <p:nvSpPr>
-          <p:cNvPr id="6" name="Rounded Rectangle 5"/>
-          <p:cNvSpPr/>
-          <p:nvPr/>
-        </p:nvSpPr>
-        <p:spPr>
-          <a:xfrm>
-            <a:off x="457200" y="2377440"/>
-            <a:ext cx="5477256" cy="1463040"/>
-          </a:xfrm>
-          <a:prstGeom prst="roundRect">
-            <a:avLst/>
-          </a:prstGeom>
-          <a:solidFill>
-            <a:srgbClr val="FFFBEB"/>
-          </a:solidFill>
-          <a:ln w="19050">
-            <a:solidFill>
-              <a:srgbClr val="F59E0B"/>
-            </a:solidFill>
-          </a:ln>
-        </p:spPr>
-        <p:style>
-          <a:lnRef idx="1">
-            <a:schemeClr val="accent1"/>
-          </a:lnRef>
-          <a:fillRef idx="3">
-            <a:schemeClr val="accent1"/>
-          </a:fillRef>
-          <a:effectRef idx="2">
-            <a:schemeClr val="accent1"/>
-          </a:effectRef>
-          <a:fontRef idx="minor">
-            <a:schemeClr val="lt1"/>
-          </a:fontRef>
-        </p:style>
-        <p:txBody>
-          <a:bodyPr rtlCol="0" anchor="ctr"/>
-          <a:lstStyle/>
-          <a:p>
-            <a:pPr algn="ctr"/>
-          </a:p>
-        </p:txBody>
-      </p:sp>
-      <p:sp>
-        <p:nvSpPr>
-          <p:cNvPr id="7" name="Rectangle 6"/>
-          <p:cNvSpPr/>
-          <p:nvPr/>
-        </p:nvSpPr>
-        <p:spPr>
-          <a:xfrm>
-            <a:off x="457200" y="2377440"/>
-            <a:ext cx="137160" cy="1463040"/>
-          </a:xfrm>
-          <a:prstGeom prst="rect">
-            <a:avLst/>
-          </a:prstGeom>
-          <a:solidFill>
-            <a:srgbClr val="F59E0B"/>
-          </a:solidFill>
-          <a:ln>
-            <a:noFill/>
-          </a:ln>
-        </p:spPr>
-        <p:style>
-          <a:lnRef idx="1">
-            <a:schemeClr val="accent1"/>
-          </a:lnRef>
-          <a:fillRef idx="3">
-            <a:schemeClr val="accent1"/>
-          </a:fillRef>
-          <a:effectRef idx="2">
-            <a:schemeClr val="accent1"/>
-          </a:effectRef>
-          <a:fontRef idx="minor">
-            <a:schemeClr val="lt1"/>
-          </a:fontRef>
-        </p:style>
-        <p:txBody>
-          <a:bodyPr rtlCol="0" anchor="ctr"/>
-          <a:lstStyle/>
-          <a:p>
-            <a:pPr algn="ctr"/>
-          </a:p>
-        </p:txBody>
-      </p:sp>
-      <p:sp>
-        <p:nvSpPr>
-          <p:cNvPr id="8" name="TextBox 7"/>
-          <p:cNvSpPr txBox="1"/>
-          <p:nvPr/>
-        </p:nvSpPr>
-        <p:spPr>
-          <a:xfrm>
-            <a:off x="731520" y="2606040"/>
-            <a:ext cx="5020056" cy="1005840"/>
-          </a:xfrm>
-          <a:prstGeom prst="rect">
-            <a:avLst/>
-          </a:prstGeom>
-          <a:noFill/>
-        </p:spPr>
-        <p:txBody>
-          <a:bodyPr wrap="square" lIns="73152" rIns="73152">
-            <a:spAutoFit/>
-          </a:bodyPr>
-          <a:lstStyle/>
-          <a:p>
-            <a:pPr algn="l">
-              <a:defRPr sz="1900" b="1">
-                <a:solidFill>
-                  <a:srgbClr val="78350F"/>
-                </a:solidFill>
-                <a:latin typeface="Arial"/>
-              </a:defRPr>
-            </a:pPr>
-            <a:r>
-              <a:t>A. .docx</a:t>
-            </a:r>
-          </a:p>
-        </p:txBody>
-      </p:sp>
-      <p:sp>
-        <p:nvSpPr>
-          <p:cNvPr id="9" name="Rounded Rectangle 8"/>
-          <p:cNvSpPr/>
-          <p:nvPr/>
-        </p:nvSpPr>
-        <p:spPr>
-          <a:xfrm>
-            <a:off x="6254496" y="2377440"/>
-            <a:ext cx="5477256" cy="1463040"/>
-          </a:xfrm>
-          <a:prstGeom prst="roundRect">
-            <a:avLst/>
-          </a:prstGeom>
-          <a:solidFill>
-            <a:srgbClr val="FFFBEB"/>
-          </a:solidFill>
-          <a:ln w="19050">
-            <a:solidFill>
-              <a:srgbClr val="F59E0B"/>
-            </a:solidFill>
-          </a:ln>
-        </p:spPr>
-        <p:style>
-          <a:lnRef idx="1">
-            <a:schemeClr val="accent1"/>
-          </a:lnRef>
-          <a:fillRef idx="3">
-            <a:schemeClr val="accent1"/>
-          </a:fillRef>
-          <a:effectRef idx="2">
-            <a:schemeClr val="accent1"/>
-          </a:effectRef>
-          <a:fontRef idx="minor">
-            <a:schemeClr val="lt1"/>
-          </a:fontRef>
-        </p:style>
-        <p:txBody>
-          <a:bodyPr rtlCol="0" anchor="ctr"/>
-          <a:lstStyle/>
-          <a:p>
-            <a:pPr algn="ctr"/>
-          </a:p>
-        </p:txBody>
-      </p:sp>
-      <p:sp>
-        <p:nvSpPr>
-          <p:cNvPr id="10" name="Rectangle 9"/>
-          <p:cNvSpPr/>
-          <p:nvPr/>
-        </p:nvSpPr>
-        <p:spPr>
-          <a:xfrm>
-            <a:off x="6254496" y="2377440"/>
-            <a:ext cx="137160" cy="1463040"/>
-          </a:xfrm>
-          <a:prstGeom prst="rect">
-            <a:avLst/>
-          </a:prstGeom>
-          <a:solidFill>
-            <a:srgbClr val="F59E0B"/>
-          </a:solidFill>
-          <a:ln>
-            <a:noFill/>
-          </a:ln>
-        </p:spPr>
-        <p:style>
-          <a:lnRef idx="1">
-            <a:schemeClr val="accent1"/>
-          </a:lnRef>
-          <a:fillRef idx="3">
-            <a:schemeClr val="accent1"/>
-          </a:fillRef>
-          <a:effectRef idx="2">
-            <a:schemeClr val="accent1"/>
-          </a:effectRef>
-          <a:fontRef idx="minor">
-            <a:schemeClr val="lt1"/>
-          </a:fontRef>
-        </p:style>
-        <p:txBody>
-          <a:bodyPr rtlCol="0" anchor="ctr"/>
-          <a:lstStyle/>
-          <a:p>
-            <a:pPr algn="ctr"/>
-          </a:p>
-        </p:txBody>
-      </p:sp>
-      <p:sp>
-        <p:nvSpPr>
-          <p:cNvPr id="11" name="TextBox 10"/>
-          <p:cNvSpPr txBox="1"/>
-          <p:nvPr/>
-        </p:nvSpPr>
-        <p:spPr>
-          <a:xfrm>
-            <a:off x="6528816" y="2606040"/>
-            <a:ext cx="5020056" cy="1005840"/>
-          </a:xfrm>
-          <a:prstGeom prst="rect">
-            <a:avLst/>
-          </a:prstGeom>
-          <a:noFill/>
-        </p:spPr>
-        <p:txBody>
-          <a:bodyPr wrap="square" lIns="73152" rIns="73152">
-            <a:spAutoFit/>
-          </a:bodyPr>
-          <a:lstStyle/>
-          <a:p>
-            <a:pPr algn="l">
-              <a:defRPr sz="1900" b="1">
-                <a:solidFill>
-                  <a:srgbClr val="78350F"/>
-                </a:solidFill>
-                <a:latin typeface="Arial"/>
-              </a:defRPr>
-            </a:pPr>
-            <a:r>
-              <a:t>B. .zip</a:t>
-            </a:r>
-          </a:p>
-        </p:txBody>
-      </p:sp>
-      <p:sp>
-        <p:nvSpPr>
-          <p:cNvPr id="12" name="Rounded Rectangle 11"/>
-          <p:cNvSpPr/>
-          <p:nvPr/>
-        </p:nvSpPr>
-        <p:spPr>
-          <a:xfrm>
-            <a:off x="457200" y="4069080"/>
-            <a:ext cx="5477256" cy="1463040"/>
-          </a:xfrm>
-          <a:prstGeom prst="roundRect">
-            <a:avLst/>
-          </a:prstGeom>
-          <a:solidFill>
-            <a:srgbClr val="FFFBEB"/>
-          </a:solidFill>
-          <a:ln w="19050">
-            <a:solidFill>
-              <a:srgbClr val="F59E0B"/>
-            </a:solidFill>
-          </a:ln>
-        </p:spPr>
-        <p:style>
-          <a:lnRef idx="1">
-            <a:schemeClr val="accent1"/>
-          </a:lnRef>
-          <a:fillRef idx="3">
-            <a:schemeClr val="accent1"/>
-          </a:fillRef>
-          <a:effectRef idx="2">
-            <a:schemeClr val="accent1"/>
-          </a:effectRef>
-          <a:fontRef idx="minor">
-            <a:schemeClr val="lt1"/>
-          </a:fontRef>
-        </p:style>
-        <p:txBody>
-          <a:bodyPr rtlCol="0" anchor="ctr"/>
-          <a:lstStyle/>
-          <a:p>
-            <a:pPr algn="ctr"/>
-          </a:p>
-        </p:txBody>
-      </p:sp>
-      <p:sp>
-        <p:nvSpPr>
-          <p:cNvPr id="13" name="Rectangle 12"/>
-          <p:cNvSpPr/>
-          <p:nvPr/>
-        </p:nvSpPr>
-        <p:spPr>
-          <a:xfrm>
-            <a:off x="457200" y="4069080"/>
-            <a:ext cx="137160" cy="1463040"/>
-          </a:xfrm>
-          <a:prstGeom prst="rect">
-            <a:avLst/>
-          </a:prstGeom>
-          <a:solidFill>
-            <a:srgbClr val="F59E0B"/>
-          </a:solidFill>
-          <a:ln>
-            <a:noFill/>
-          </a:ln>
-        </p:spPr>
-        <p:style>
-          <a:lnRef idx="1">
-            <a:schemeClr val="accent1"/>
-          </a:lnRef>
-          <a:fillRef idx="3">
-            <a:schemeClr val="accent1"/>
-          </a:fillRef>
-          <a:effectRef idx="2">
-            <a:schemeClr val="accent1"/>
-          </a:effectRef>
-          <a:fontRef idx="minor">
-            <a:schemeClr val="lt1"/>
-          </a:fontRef>
-        </p:style>
-        <p:txBody>
-          <a:bodyPr rtlCol="0" anchor="ctr"/>
-          <a:lstStyle/>
-          <a:p>
-            <a:pPr algn="ctr"/>
-          </a:p>
-        </p:txBody>
-      </p:sp>
-      <p:sp>
-        <p:nvSpPr>
-          <p:cNvPr id="14" name="TextBox 13"/>
-          <p:cNvSpPr txBox="1"/>
-          <p:nvPr/>
-        </p:nvSpPr>
-        <p:spPr>
-          <a:xfrm>
-            <a:off x="731520" y="4297680"/>
-            <a:ext cx="5020056" cy="1005840"/>
-          </a:xfrm>
-          <a:prstGeom prst="rect">
-            <a:avLst/>
-          </a:prstGeom>
-          <a:noFill/>
-        </p:spPr>
-        <p:txBody>
-          <a:bodyPr wrap="square" lIns="73152" rIns="73152">
-            <a:spAutoFit/>
-          </a:bodyPr>
-          <a:lstStyle/>
-          <a:p>
-            <a:pPr algn="l">
-              <a:defRPr sz="1900" b="1">
-                <a:solidFill>
-                  <a:srgbClr val="78350F"/>
-                </a:solidFill>
-                <a:latin typeface="Arial"/>
-              </a:defRPr>
-            </a:pPr>
-            <a:r>
-              <a:t>C. .pptx</a:t>
-            </a:r>
-          </a:p>
-        </p:txBody>
-      </p:sp>
-      <p:sp>
-        <p:nvSpPr>
-          <p:cNvPr id="15" name="Rounded Rectangle 14"/>
-          <p:cNvSpPr/>
-          <p:nvPr/>
-        </p:nvSpPr>
-        <p:spPr>
-          <a:xfrm>
-            <a:off x="6254496" y="4069080"/>
-            <a:ext cx="5477256" cy="1463040"/>
-          </a:xfrm>
-          <a:prstGeom prst="roundRect">
-            <a:avLst/>
-          </a:prstGeom>
-          <a:solidFill>
-            <a:srgbClr val="FFFBEB"/>
-          </a:solidFill>
-          <a:ln w="19050">
-            <a:solidFill>
-              <a:srgbClr val="F59E0B"/>
-            </a:solidFill>
-          </a:ln>
-        </p:spPr>
-        <p:style>
-          <a:lnRef idx="1">
-            <a:schemeClr val="accent1"/>
-          </a:lnRef>
-          <a:fillRef idx="3">
-            <a:schemeClr val="accent1"/>
-          </a:fillRef>
-          <a:effectRef idx="2">
-            <a:schemeClr val="accent1"/>
-          </a:effectRef>
-          <a:fontRef idx="minor">
-            <a:schemeClr val="lt1"/>
-          </a:fontRef>
-        </p:style>
-        <p:txBody>
-          <a:bodyPr rtlCol="0" anchor="ctr"/>
-          <a:lstStyle/>
-          <a:p>
-            <a:pPr algn="ctr"/>
-          </a:p>
-        </p:txBody>
-      </p:sp>
-      <p:sp>
-        <p:nvSpPr>
-          <p:cNvPr id="16" name="Rectangle 15"/>
-          <p:cNvSpPr/>
-          <p:nvPr/>
-        </p:nvSpPr>
-        <p:spPr>
-          <a:xfrm>
-            <a:off x="6254496" y="4069080"/>
-            <a:ext cx="137160" cy="1463040"/>
-          </a:xfrm>
-          <a:prstGeom prst="rect">
-            <a:avLst/>
-          </a:prstGeom>
-          <a:solidFill>
-            <a:srgbClr val="F59E0B"/>
-          </a:solidFill>
-          <a:ln>
-            <a:noFill/>
-          </a:ln>
-        </p:spPr>
-        <p:style>
-          <a:lnRef idx="1">
-            <a:schemeClr val="accent1"/>
-          </a:lnRef>
-          <a:fillRef idx="3">
-            <a:schemeClr val="accent1"/>
-          </a:fillRef>
-          <a:effectRef idx="2">
-            <a:schemeClr val="accent1"/>
-          </a:effectRef>
-          <a:fontRef idx="minor">
-            <a:schemeClr val="lt1"/>
-          </a:fontRef>
-        </p:style>
-        <p:txBody>
-          <a:bodyPr rtlCol="0" anchor="ctr"/>
-          <a:lstStyle/>
-          <a:p>
-            <a:pPr algn="ctr"/>
-          </a:p>
-        </p:txBody>
-      </p:sp>
-      <p:sp>
-        <p:nvSpPr>
-          <p:cNvPr id="17" name="TextBox 16"/>
-          <p:cNvSpPr txBox="1"/>
-          <p:nvPr/>
-        </p:nvSpPr>
-        <p:spPr>
-          <a:xfrm>
-            <a:off x="6528816" y="4297680"/>
-            <a:ext cx="5020056" cy="1005840"/>
-          </a:xfrm>
-          <a:prstGeom prst="rect">
-            <a:avLst/>
-          </a:prstGeom>
-          <a:noFill/>
-        </p:spPr>
-        <p:txBody>
-          <a:bodyPr wrap="square" lIns="73152" rIns="73152">
-            <a:spAutoFit/>
-          </a:bodyPr>
-          <a:lstStyle/>
-          <a:p>
-            <a:pPr algn="l">
-              <a:defRPr sz="1900" b="1">
-                <a:solidFill>
-                  <a:srgbClr val="78350F"/>
-                </a:solidFill>
-                <a:latin typeface="Arial"/>
-              </a:defRPr>
-            </a:pPr>
-            <a:r>
-              <a:t>D. .mp3</a:t>
-            </a:r>
-          </a:p>
-        </p:txBody>
-      </p:sp>
-    </p:spTree>
-  </p:cSld>
-  <p:clrMapOvr>
-    <a:masterClrMapping/>
-  </p:clrMapOvr>
-  <p:transition spd="med">
-    <p:push dir="l"/>
   </p:transition>
 </p:sld>
 </file>

--- a/KHBD_Tin_học/Lớp_7/Tuần_04/Slide_Tin_hoc_Lớp_7_Tiet03_Bai_3_Quan_ly_du_lieu_trong_may_tinh.pptx
+++ b/KHBD_Tin_học/Lớp_7/Tuần_04/Slide_Tin_hoc_Lớp_7_Tiet03_Bai_3_Quan_ly_du_lieu_trong_may_tinh.pptx
@@ -3491,7 +3491,7 @@
         <p:spPr>
           <a:xfrm>
             <a:off x="1097280" y="1463040"/>
-            <a:ext cx="9994392" cy="182879"/>
+            <a:ext cx="9994392" cy="228600"/>
           </a:xfrm>
           <a:prstGeom prst="roundRect">
             <a:avLst/>
@@ -3811,7 +3811,7 @@
               </a:defRPr>
             </a:pPr>
             <a:r>
-              <a:t>HOẠT ĐỘNG KHÁM PHÁ</a:t>
+              <a:t>KHỞI ĐỘNG &amp; TÌNH HUỐNG</a:t>
             </a:r>
           </a:p>
         </p:txBody>
@@ -3847,7 +3847,7 @@
               </a:defRPr>
             </a:pPr>
             <a:r>
-              <a:t>Tên tệp và Thư mục trong máy tính</a:t>
+              <a:t>Không gian Dữ liệu số &amp; Bảo mật công nghệ</a:t>
             </a:r>
           </a:p>
         </p:txBody>
@@ -3861,7 +3861,7 @@
         <p:spPr>
           <a:xfrm>
             <a:off x="365760" y="1645920"/>
-            <a:ext cx="3840480" cy="3977639"/>
+            <a:ext cx="11247120" cy="2971800"/>
           </a:xfrm>
           <a:prstGeom prst="roundRect">
             <a:avLst/>
@@ -3897,25 +3897,51 @@
           </a:p>
         </p:txBody>
       </p:sp>
-      <p:sp>
-        <p:nvSpPr>
-          <p:cNvPr id="7" name="Rounded Rectangle 6"/>
+      <p:pic>
+        <p:nvPicPr>
+          <p:cNvPr id="7" name="Picture 6" descr="ai_lop7_bai3_data_hub.jpg"/>
+          <p:cNvPicPr>
+            <a:picLocks noChangeAspect="1"/>
+          </p:cNvPicPr>
+          <p:nvPr/>
+        </p:nvPicPr>
+        <p:blipFill>
+          <a:blip r:embed="rId2"/>
+          <a:stretch>
+            <a:fillRect/>
+          </a:stretch>
+        </p:blipFill>
+        <p:spPr>
+          <a:xfrm>
+            <a:off x="457200" y="1691640"/>
+            <a:ext cx="11064240" cy="2880360"/>
+          </a:xfrm>
+          <a:prstGeom prst="rect">
+            <a:avLst/>
+          </a:prstGeom>
+        </p:spPr>
+      </p:pic>
+      <p:sp>
+        <p:nvSpPr>
+          <p:cNvPr id="8" name="Rounded Rectangle 7"/>
           <p:cNvSpPr/>
           <p:nvPr/>
         </p:nvSpPr>
         <p:spPr>
           <a:xfrm>
-            <a:off x="365760" y="1645920"/>
-            <a:ext cx="164592" cy="3977639"/>
+            <a:off x="365760" y="4709160"/>
+            <a:ext cx="11247120" cy="960119"/>
           </a:xfrm>
           <a:prstGeom prst="roundRect">
             <a:avLst/>
           </a:prstGeom>
           <a:solidFill>
-            <a:srgbClr val="0EA5E9"/>
+            <a:srgbClr val="FFFFFF"/>
           </a:solidFill>
-          <a:ln>
-            <a:noFill/>
+          <a:ln w="19050">
+            <a:solidFill>
+              <a:srgbClr val="0369A1"/>
+            </a:solidFill>
           </a:ln>
         </p:spPr>
         <p:style>
@@ -3942,14 +3968,57 @@
       </p:sp>
       <p:sp>
         <p:nvSpPr>
-          <p:cNvPr id="8" name="TextBox 7"/>
+          <p:cNvPr id="9" name="Rounded Rectangle 8"/>
+          <p:cNvSpPr/>
+          <p:nvPr/>
+        </p:nvSpPr>
+        <p:spPr>
+          <a:xfrm>
+            <a:off x="365760" y="4709160"/>
+            <a:ext cx="182880" cy="960119"/>
+          </a:xfrm>
+          <a:prstGeom prst="roundRect">
+            <a:avLst/>
+          </a:prstGeom>
+          <a:solidFill>
+            <a:srgbClr val="0369A1"/>
+          </a:solidFill>
+          <a:ln>
+            <a:noFill/>
+          </a:ln>
+        </p:spPr>
+        <p:style>
+          <a:lnRef idx="1">
+            <a:schemeClr val="accent1"/>
+          </a:lnRef>
+          <a:fillRef idx="3">
+            <a:schemeClr val="accent1"/>
+          </a:fillRef>
+          <a:effectRef idx="2">
+            <a:schemeClr val="accent1"/>
+          </a:effectRef>
+          <a:fontRef idx="minor">
+            <a:schemeClr val="lt1"/>
+          </a:fontRef>
+        </p:style>
+        <p:txBody>
+          <a:bodyPr rtlCol="0" anchor="ctr"/>
+          <a:lstStyle/>
+          <a:p>
+            <a:pPr algn="ctr"/>
+          </a:p>
+        </p:txBody>
+      </p:sp>
+      <p:sp>
+        <p:nvSpPr>
+          <p:cNvPr id="10" name="TextBox 9"/>
           <p:cNvSpPr txBox="1"/>
           <p:nvPr/>
         </p:nvSpPr>
         <p:spPr>
           <a:xfrm>
-            <a:off x="640080" y="1783080"/>
-            <a:ext cx="3429000" cy="640080"/>
+            <a:off x="685800" y="4800600"/>
+            <a:ext cx="10607040" cy="777239"/>
           </a:xfrm>
           <a:prstGeom prst="rect">
             <a:avLst/>
@@ -3971,188 +4040,15 @@
               </a:defRPr>
             </a:pPr>
             <a:r>
-              <a:t>• Tên tệp gồm 2 phần: [Tên chính].[Phần mở rộng]</a:t>
-            </a:r>
-          </a:p>
-        </p:txBody>
-      </p:sp>
-      <p:sp>
-        <p:nvSpPr>
-          <p:cNvPr id="9" name="TextBox 8"/>
-          <p:cNvSpPr txBox="1"/>
-          <p:nvPr/>
-        </p:nvSpPr>
-        <p:spPr>
-          <a:xfrm>
-            <a:off x="640080" y="2468880"/>
-            <a:ext cx="3429000" cy="640080"/>
-          </a:xfrm>
-          <a:prstGeom prst="rect">
-            <a:avLst/>
-          </a:prstGeom>
-          <a:noFill/>
-        </p:spPr>
-        <p:txBody>
-          <a:bodyPr wrap="square" lIns="73152" rIns="73152" tIns="54864" bIns="54864">
-            <a:spAutoFit/>
-          </a:bodyPr>
-          <a:lstStyle/>
-          <a:p>
-            <a:pPr algn="l">
-              <a:defRPr sz="1500" b="1">
-                <a:solidFill>
-                  <a:srgbClr val="0F172A"/>
-                </a:solidFill>
-                <a:latin typeface="Arial"/>
-              </a:defRPr>
-            </a:pPr>
-            <a:r>
-              <a:t>• Phần mở rộng cho biết loại tệp và ứng dụng mở tệp</a:t>
-            </a:r>
-          </a:p>
-        </p:txBody>
-      </p:sp>
-      <p:sp>
-        <p:nvSpPr>
-          <p:cNvPr id="10" name="TextBox 9"/>
-          <p:cNvSpPr txBox="1"/>
-          <p:nvPr/>
-        </p:nvSpPr>
-        <p:spPr>
-          <a:xfrm>
-            <a:off x="640080" y="3154680"/>
-            <a:ext cx="3429000" cy="640080"/>
-          </a:xfrm>
-          <a:prstGeom prst="rect">
-            <a:avLst/>
-          </a:prstGeom>
-          <a:noFill/>
-        </p:spPr>
-        <p:txBody>
-          <a:bodyPr wrap="square" lIns="73152" rIns="73152" tIns="54864" bIns="54864">
-            <a:spAutoFit/>
-          </a:bodyPr>
-          <a:lstStyle/>
-          <a:p>
-            <a:pPr algn="l">
-              <a:defRPr sz="1500" b="1">
-                <a:solidFill>
-                  <a:srgbClr val="0F172A"/>
-                </a:solidFill>
-                <a:latin typeface="Arial"/>
-              </a:defRPr>
-            </a:pPr>
-            <a:r>
-              <a:t>• Đặt tên tệp ngắn gọn, có ý nghĩa, dễ tìm kiếm</a:t>
-            </a:r>
-          </a:p>
-        </p:txBody>
-      </p:sp>
-      <p:sp>
-        <p:nvSpPr>
-          <p:cNvPr id="11" name="TextBox 10"/>
-          <p:cNvSpPr txBox="1"/>
-          <p:nvPr/>
-        </p:nvSpPr>
-        <p:spPr>
-          <a:xfrm>
-            <a:off x="640080" y="3840480"/>
-            <a:ext cx="3429000" cy="640080"/>
-          </a:xfrm>
-          <a:prstGeom prst="rect">
-            <a:avLst/>
-          </a:prstGeom>
-          <a:noFill/>
-        </p:spPr>
-        <p:txBody>
-          <a:bodyPr wrap="square" lIns="73152" rIns="73152" tIns="54864" bIns="54864">
-            <a:spAutoFit/>
-          </a:bodyPr>
-          <a:lstStyle/>
-          <a:p>
-            <a:pPr algn="l">
-              <a:defRPr sz="1500" b="1">
-                <a:solidFill>
-                  <a:srgbClr val="0F172A"/>
-                </a:solidFill>
-                <a:latin typeface="Arial"/>
-              </a:defRPr>
-            </a:pPr>
-            <a:r>
-              <a:t>• Phân loại tệp vào các thư mục theo chủ đề</a:t>
-            </a:r>
-          </a:p>
-        </p:txBody>
-      </p:sp>
-      <p:sp>
-        <p:nvSpPr>
-          <p:cNvPr id="12" name="Rounded Rectangle 11"/>
-          <p:cNvSpPr/>
-          <p:nvPr/>
-        </p:nvSpPr>
-        <p:spPr>
-          <a:xfrm>
-            <a:off x="4480560" y="1645920"/>
-            <a:ext cx="7223760" cy="3977639"/>
-          </a:xfrm>
-          <a:prstGeom prst="roundRect">
-            <a:avLst/>
-          </a:prstGeom>
-          <a:solidFill>
-            <a:srgbClr val="FFFFFF"/>
-          </a:solidFill>
-          <a:ln w="19050">
-            <a:solidFill>
-              <a:srgbClr val="CBD5E1"/>
-            </a:solidFill>
-          </a:ln>
-        </p:spPr>
-        <p:style>
-          <a:lnRef idx="1">
-            <a:schemeClr val="accent1"/>
-          </a:lnRef>
-          <a:fillRef idx="3">
-            <a:schemeClr val="accent1"/>
-          </a:fillRef>
-          <a:effectRef idx="2">
-            <a:schemeClr val="accent1"/>
-          </a:effectRef>
-          <a:fontRef idx="minor">
-            <a:schemeClr val="lt1"/>
-          </a:fontRef>
-        </p:style>
-        <p:txBody>
-          <a:bodyPr rtlCol="0" anchor="ctr"/>
-          <a:lstStyle/>
-          <a:p>
-            <a:pPr algn="ctr"/>
-          </a:p>
-        </p:txBody>
-      </p:sp>
-      <p:pic>
-        <p:nvPicPr>
-          <p:cNvPr id="13" name="Picture 12" descr="sgk_lop7_bai3_hinh31_cay_thu_muc.png"/>
-          <p:cNvPicPr>
-            <a:picLocks noChangeAspect="1"/>
-          </p:cNvPicPr>
-          <p:nvPr/>
-        </p:nvPicPr>
-        <p:blipFill>
-          <a:blip r:embed="rId2"/>
-          <a:stretch>
-            <a:fillRect/>
-          </a:stretch>
-        </p:blipFill>
-        <p:spPr>
-          <a:xfrm>
-            <a:off x="4572000" y="1737360"/>
-            <a:ext cx="7040880" cy="3794760"/>
-          </a:xfrm>
-          <a:prstGeom prst="rect">
-            <a:avLst/>
-          </a:prstGeom>
-        </p:spPr>
-      </p:pic>
+              <a:t>👉 Thế giới số chứa hàng triệu tệp tin đa dạng (.docx, .xlsx, .pptx, .jpg, .mp4).</a:t>
+            </a:r>
+            <a:br/>
+            <a:r>
+              <a:t>Làm sao để vừa sắp xếp khoa học vừa bảo vệ dữ liệu an toàn trước virus?</a:t>
+            </a:r>
+          </a:p>
+        </p:txBody>
+      </p:sp>
     </p:spTree>
   </p:cSld>
   <p:clrMapOvr>
@@ -4291,7 +4187,7 @@
               </a:defRPr>
             </a:pPr>
             <a:r>
-              <a:t>QUY TRÌNH &amp; THAO TÁC</a:t>
+              <a:t>KIẾN THỨC CỐT LÕI</a:t>
             </a:r>
           </a:p>
         </p:txBody>
@@ -4327,23 +4223,68 @@
               </a:defRPr>
             </a:pPr>
             <a:r>
-              <a:t>Các phần mở rộng tệp (File Extensions) thông dụng</a:t>
-            </a:r>
-          </a:p>
-        </p:txBody>
-      </p:sp>
-      <p:sp>
-        <p:nvSpPr>
-          <p:cNvPr id="6" name="Chevron 5"/>
+              <a:t>Phân loại tệp theo Phần mở rộng (File Extension)</a:t>
+            </a:r>
+          </a:p>
+        </p:txBody>
+      </p:sp>
+      <p:sp>
+        <p:nvSpPr>
+          <p:cNvPr id="6" name="Rounded Rectangle 5"/>
           <p:cNvSpPr/>
           <p:nvPr/>
         </p:nvSpPr>
         <p:spPr>
           <a:xfrm>
             <a:off x="365760" y="1645920"/>
-            <a:ext cx="4754880" cy="685799"/>
-          </a:xfrm>
-          <a:prstGeom prst="chevron">
+            <a:ext cx="3566160" cy="3977639"/>
+          </a:xfrm>
+          <a:prstGeom prst="roundRect">
+            <a:avLst/>
+          </a:prstGeom>
+          <a:solidFill>
+            <a:srgbClr val="FFFFFF"/>
+          </a:solidFill>
+          <a:ln w="19050">
+            <a:solidFill>
+              <a:srgbClr val="0369A1"/>
+            </a:solidFill>
+          </a:ln>
+        </p:spPr>
+        <p:style>
+          <a:lnRef idx="1">
+            <a:schemeClr val="accent1"/>
+          </a:lnRef>
+          <a:fillRef idx="3">
+            <a:schemeClr val="accent1"/>
+          </a:fillRef>
+          <a:effectRef idx="2">
+            <a:schemeClr val="accent1"/>
+          </a:effectRef>
+          <a:fontRef idx="minor">
+            <a:schemeClr val="lt1"/>
+          </a:fontRef>
+        </p:style>
+        <p:txBody>
+          <a:bodyPr rtlCol="0" anchor="ctr"/>
+          <a:lstStyle/>
+          <a:p>
+            <a:pPr algn="ctr"/>
+          </a:p>
+        </p:txBody>
+      </p:sp>
+      <p:sp>
+        <p:nvSpPr>
+          <p:cNvPr id="7" name="Rounded Rectangle 6"/>
+          <p:cNvSpPr/>
+          <p:nvPr/>
+        </p:nvSpPr>
+        <p:spPr>
+          <a:xfrm>
+            <a:off x="365760" y="1645920"/>
+            <a:ext cx="3566160" cy="457199"/>
+          </a:xfrm>
+          <a:prstGeom prst="roundRect">
             <a:avLst/>
           </a:prstGeom>
           <a:solidFill>
@@ -4377,14 +4318,14 @@
       </p:sp>
       <p:sp>
         <p:nvSpPr>
-          <p:cNvPr id="7" name="TextBox 6"/>
+          <p:cNvPr id="8" name="TextBox 7"/>
           <p:cNvSpPr txBox="1"/>
           <p:nvPr/>
         </p:nvSpPr>
         <p:spPr>
           <a:xfrm>
-            <a:off x="640080" y="1719072"/>
-            <a:ext cx="4206240" cy="548639"/>
+            <a:off x="365760" y="1691640"/>
+            <a:ext cx="3566160" cy="411480"/>
           </a:xfrm>
           <a:prstGeom prst="rect">
             <a:avLst/>
@@ -4397,8 +4338,8 @@
           </a:bodyPr>
           <a:lstStyle/>
           <a:p>
-            <a:pPr algn="l">
-              <a:defRPr sz="1400" b="1">
+            <a:pPr algn="ctr">
+              <a:defRPr sz="1500" b="1">
                 <a:solidFill>
                   <a:srgbClr val="FFFFFF"/>
                 </a:solidFill>
@@ -4406,30 +4347,176 @@
               </a:defRPr>
             </a:pPr>
             <a:r>
-              <a:t>.docx / .pdf: Tệp văn bản và tài liệu</a:t>
-            </a:r>
-          </a:p>
-        </p:txBody>
-      </p:sp>
-      <p:sp>
-        <p:nvSpPr>
-          <p:cNvPr id="8" name="Chevron 7"/>
+              <a:t>1. Tài liệu văn phòng</a:t>
+            </a:r>
+          </a:p>
+        </p:txBody>
+      </p:sp>
+      <p:sp>
+        <p:nvSpPr>
+          <p:cNvPr id="9" name="TextBox 8"/>
+          <p:cNvSpPr txBox="1"/>
+          <p:nvPr/>
+        </p:nvSpPr>
+        <p:spPr>
+          <a:xfrm>
+            <a:off x="502920" y="2240280"/>
+            <a:ext cx="3291840" cy="594359"/>
+          </a:xfrm>
+          <a:prstGeom prst="rect">
+            <a:avLst/>
+          </a:prstGeom>
+          <a:noFill/>
+        </p:spPr>
+        <p:txBody>
+          <a:bodyPr wrap="square" lIns="73152" rIns="73152" tIns="54864" bIns="54864">
+            <a:spAutoFit/>
+          </a:bodyPr>
+          <a:lstStyle/>
+          <a:p>
+            <a:pPr algn="l">
+              <a:defRPr sz="1400" b="0">
+                <a:solidFill>
+                  <a:srgbClr val="0F172A"/>
+                </a:solidFill>
+                <a:latin typeface="Arial"/>
+              </a:defRPr>
+            </a:pPr>
+            <a:r>
+              <a:t>• .docx: Văn bản Word</a:t>
+            </a:r>
+          </a:p>
+        </p:txBody>
+      </p:sp>
+      <p:sp>
+        <p:nvSpPr>
+          <p:cNvPr id="10" name="TextBox 9"/>
+          <p:cNvSpPr txBox="1"/>
+          <p:nvPr/>
+        </p:nvSpPr>
+        <p:spPr>
+          <a:xfrm>
+            <a:off x="502920" y="2880360"/>
+            <a:ext cx="3291840" cy="594359"/>
+          </a:xfrm>
+          <a:prstGeom prst="rect">
+            <a:avLst/>
+          </a:prstGeom>
+          <a:noFill/>
+        </p:spPr>
+        <p:txBody>
+          <a:bodyPr wrap="square" lIns="73152" rIns="73152" tIns="54864" bIns="54864">
+            <a:spAutoFit/>
+          </a:bodyPr>
+          <a:lstStyle/>
+          <a:p>
+            <a:pPr algn="l">
+              <a:defRPr sz="1400" b="0">
+                <a:solidFill>
+                  <a:srgbClr val="0F172A"/>
+                </a:solidFill>
+                <a:latin typeface="Arial"/>
+              </a:defRPr>
+            </a:pPr>
+            <a:r>
+              <a:t>• .xlsx: Bảng tính Excel</a:t>
+            </a:r>
+          </a:p>
+        </p:txBody>
+      </p:sp>
+      <p:sp>
+        <p:nvSpPr>
+          <p:cNvPr id="11" name="TextBox 10"/>
+          <p:cNvSpPr txBox="1"/>
+          <p:nvPr/>
+        </p:nvSpPr>
+        <p:spPr>
+          <a:xfrm>
+            <a:off x="502920" y="3520440"/>
+            <a:ext cx="3291840" cy="594360"/>
+          </a:xfrm>
+          <a:prstGeom prst="rect">
+            <a:avLst/>
+          </a:prstGeom>
+          <a:noFill/>
+        </p:spPr>
+        <p:txBody>
+          <a:bodyPr wrap="square" lIns="73152" rIns="73152" tIns="54864" bIns="54864">
+            <a:spAutoFit/>
+          </a:bodyPr>
+          <a:lstStyle/>
+          <a:p>
+            <a:pPr algn="l">
+              <a:defRPr sz="1400" b="0">
+                <a:solidFill>
+                  <a:srgbClr val="0F172A"/>
+                </a:solidFill>
+                <a:latin typeface="Arial"/>
+              </a:defRPr>
+            </a:pPr>
+            <a:r>
+              <a:t>• .pptx: Trình chiếu Slide</a:t>
+            </a:r>
+          </a:p>
+        </p:txBody>
+      </p:sp>
+      <p:sp>
+        <p:nvSpPr>
+          <p:cNvPr id="12" name="TextBox 11"/>
+          <p:cNvSpPr txBox="1"/>
+          <p:nvPr/>
+        </p:nvSpPr>
+        <p:spPr>
+          <a:xfrm>
+            <a:off x="502920" y="4160520"/>
+            <a:ext cx="3291840" cy="594360"/>
+          </a:xfrm>
+          <a:prstGeom prst="rect">
+            <a:avLst/>
+          </a:prstGeom>
+          <a:noFill/>
+        </p:spPr>
+        <p:txBody>
+          <a:bodyPr wrap="square" lIns="73152" rIns="73152" tIns="54864" bIns="54864">
+            <a:spAutoFit/>
+          </a:bodyPr>
+          <a:lstStyle/>
+          <a:p>
+            <a:pPr algn="l">
+              <a:defRPr sz="1400" b="0">
+                <a:solidFill>
+                  <a:srgbClr val="0F172A"/>
+                </a:solidFill>
+                <a:latin typeface="Arial"/>
+              </a:defRPr>
+            </a:pPr>
+            <a:r>
+              <a:t>• .pdf: Tài liệu chuẩn cố định</a:t>
+            </a:r>
+          </a:p>
+        </p:txBody>
+      </p:sp>
+      <p:sp>
+        <p:nvSpPr>
+          <p:cNvPr id="13" name="Rounded Rectangle 12"/>
           <p:cNvSpPr/>
           <p:nvPr/>
         </p:nvSpPr>
         <p:spPr>
           <a:xfrm>
-            <a:off x="365760" y="2441448"/>
-            <a:ext cx="4754880" cy="685800"/>
-          </a:xfrm>
-          <a:prstGeom prst="chevron">
+            <a:off x="4206240" y="1645920"/>
+            <a:ext cx="3566160" cy="3977639"/>
+          </a:xfrm>
+          <a:prstGeom prst="roundRect">
             <a:avLst/>
           </a:prstGeom>
           <a:solidFill>
-            <a:srgbClr val="0EA5E9"/>
+            <a:srgbClr val="FFFFFF"/>
           </a:solidFill>
-          <a:ln>
-            <a:noFill/>
+          <a:ln w="19050">
+            <a:solidFill>
+              <a:srgbClr val="0D9488"/>
+            </a:solidFill>
           </a:ln>
         </p:spPr>
         <p:style>
@@ -4456,14 +4543,57 @@
       </p:sp>
       <p:sp>
         <p:nvSpPr>
-          <p:cNvPr id="9" name="TextBox 8"/>
+          <p:cNvPr id="14" name="Rounded Rectangle 13"/>
+          <p:cNvSpPr/>
+          <p:nvPr/>
+        </p:nvSpPr>
+        <p:spPr>
+          <a:xfrm>
+            <a:off x="4206240" y="1645920"/>
+            <a:ext cx="3566160" cy="457199"/>
+          </a:xfrm>
+          <a:prstGeom prst="roundRect">
+            <a:avLst/>
+          </a:prstGeom>
+          <a:solidFill>
+            <a:srgbClr val="0D9488"/>
+          </a:solidFill>
+          <a:ln>
+            <a:noFill/>
+          </a:ln>
+        </p:spPr>
+        <p:style>
+          <a:lnRef idx="1">
+            <a:schemeClr val="accent1"/>
+          </a:lnRef>
+          <a:fillRef idx="3">
+            <a:schemeClr val="accent1"/>
+          </a:fillRef>
+          <a:effectRef idx="2">
+            <a:schemeClr val="accent1"/>
+          </a:effectRef>
+          <a:fontRef idx="minor">
+            <a:schemeClr val="lt1"/>
+          </a:fontRef>
+        </p:style>
+        <p:txBody>
+          <a:bodyPr rtlCol="0" anchor="ctr"/>
+          <a:lstStyle/>
+          <a:p>
+            <a:pPr algn="ctr"/>
+          </a:p>
+        </p:txBody>
+      </p:sp>
+      <p:sp>
+        <p:nvSpPr>
+          <p:cNvPr id="15" name="TextBox 14"/>
           <p:cNvSpPr txBox="1"/>
           <p:nvPr/>
         </p:nvSpPr>
         <p:spPr>
           <a:xfrm>
-            <a:off x="640080" y="2514600"/>
-            <a:ext cx="4206240" cy="548640"/>
+            <a:off x="4206240" y="1691640"/>
+            <a:ext cx="3566160" cy="411480"/>
           </a:xfrm>
           <a:prstGeom prst="rect">
             <a:avLst/>
@@ -4476,8 +4606,8 @@
           </a:bodyPr>
           <a:lstStyle/>
           <a:p>
-            <a:pPr algn="l">
-              <a:defRPr sz="1400" b="1">
+            <a:pPr algn="ctr">
+              <a:defRPr sz="1500" b="1">
                 <a:solidFill>
                   <a:srgbClr val="FFFFFF"/>
                 </a:solidFill>
@@ -4485,30 +4615,176 @@
               </a:defRPr>
             </a:pPr>
             <a:r>
-              <a:t>.xlsx: Tệp bảng tính điện tử Excel</a:t>
-            </a:r>
-          </a:p>
-        </p:txBody>
-      </p:sp>
-      <p:sp>
-        <p:nvSpPr>
-          <p:cNvPr id="10" name="Chevron 9"/>
+              <a:t>2. Đa phương tiện</a:t>
+            </a:r>
+          </a:p>
+        </p:txBody>
+      </p:sp>
+      <p:sp>
+        <p:nvSpPr>
+          <p:cNvPr id="16" name="TextBox 15"/>
+          <p:cNvSpPr txBox="1"/>
+          <p:nvPr/>
+        </p:nvSpPr>
+        <p:spPr>
+          <a:xfrm>
+            <a:off x="4343400" y="2240280"/>
+            <a:ext cx="3291840" cy="594359"/>
+          </a:xfrm>
+          <a:prstGeom prst="rect">
+            <a:avLst/>
+          </a:prstGeom>
+          <a:noFill/>
+        </p:spPr>
+        <p:txBody>
+          <a:bodyPr wrap="square" lIns="73152" rIns="73152" tIns="54864" bIns="54864">
+            <a:spAutoFit/>
+          </a:bodyPr>
+          <a:lstStyle/>
+          <a:p>
+            <a:pPr algn="l">
+              <a:defRPr sz="1400" b="0">
+                <a:solidFill>
+                  <a:srgbClr val="0F172A"/>
+                </a:solidFill>
+                <a:latin typeface="Arial"/>
+              </a:defRPr>
+            </a:pPr>
+            <a:r>
+              <a:t>• .jpg / .png: Hình ảnh đồ họa</a:t>
+            </a:r>
+          </a:p>
+        </p:txBody>
+      </p:sp>
+      <p:sp>
+        <p:nvSpPr>
+          <p:cNvPr id="17" name="TextBox 16"/>
+          <p:cNvSpPr txBox="1"/>
+          <p:nvPr/>
+        </p:nvSpPr>
+        <p:spPr>
+          <a:xfrm>
+            <a:off x="4343400" y="2880360"/>
+            <a:ext cx="3291840" cy="594359"/>
+          </a:xfrm>
+          <a:prstGeom prst="rect">
+            <a:avLst/>
+          </a:prstGeom>
+          <a:noFill/>
+        </p:spPr>
+        <p:txBody>
+          <a:bodyPr wrap="square" lIns="73152" rIns="73152" tIns="54864" bIns="54864">
+            <a:spAutoFit/>
+          </a:bodyPr>
+          <a:lstStyle/>
+          <a:p>
+            <a:pPr algn="l">
+              <a:defRPr sz="1400" b="0">
+                <a:solidFill>
+                  <a:srgbClr val="0F172A"/>
+                </a:solidFill>
+                <a:latin typeface="Arial"/>
+              </a:defRPr>
+            </a:pPr>
+            <a:r>
+              <a:t>• .mp3: Âm thanh, bài hát</a:t>
+            </a:r>
+          </a:p>
+        </p:txBody>
+      </p:sp>
+      <p:sp>
+        <p:nvSpPr>
+          <p:cNvPr id="18" name="TextBox 17"/>
+          <p:cNvSpPr txBox="1"/>
+          <p:nvPr/>
+        </p:nvSpPr>
+        <p:spPr>
+          <a:xfrm>
+            <a:off x="4343400" y="3520440"/>
+            <a:ext cx="3291840" cy="594360"/>
+          </a:xfrm>
+          <a:prstGeom prst="rect">
+            <a:avLst/>
+          </a:prstGeom>
+          <a:noFill/>
+        </p:spPr>
+        <p:txBody>
+          <a:bodyPr wrap="square" lIns="73152" rIns="73152" tIns="54864" bIns="54864">
+            <a:spAutoFit/>
+          </a:bodyPr>
+          <a:lstStyle/>
+          <a:p>
+            <a:pPr algn="l">
+              <a:defRPr sz="1400" b="0">
+                <a:solidFill>
+                  <a:srgbClr val="0F172A"/>
+                </a:solidFill>
+                <a:latin typeface="Arial"/>
+              </a:defRPr>
+            </a:pPr>
+            <a:r>
+              <a:t>• .mp4: Video, phim bài giảng</a:t>
+            </a:r>
+          </a:p>
+        </p:txBody>
+      </p:sp>
+      <p:sp>
+        <p:nvSpPr>
+          <p:cNvPr id="19" name="TextBox 18"/>
+          <p:cNvSpPr txBox="1"/>
+          <p:nvPr/>
+        </p:nvSpPr>
+        <p:spPr>
+          <a:xfrm>
+            <a:off x="4343400" y="4160520"/>
+            <a:ext cx="3291840" cy="594360"/>
+          </a:xfrm>
+          <a:prstGeom prst="rect">
+            <a:avLst/>
+          </a:prstGeom>
+          <a:noFill/>
+        </p:spPr>
+        <p:txBody>
+          <a:bodyPr wrap="square" lIns="73152" rIns="73152" tIns="54864" bIns="54864">
+            <a:spAutoFit/>
+          </a:bodyPr>
+          <a:lstStyle/>
+          <a:p>
+            <a:pPr algn="l">
+              <a:defRPr sz="1400" b="0">
+                <a:solidFill>
+                  <a:srgbClr val="0F172A"/>
+                </a:solidFill>
+                <a:latin typeface="Arial"/>
+              </a:defRPr>
+            </a:pPr>
+            <a:r>
+              <a:t>• .gif: Ảnh động sinh động</a:t>
+            </a:r>
+          </a:p>
+        </p:txBody>
+      </p:sp>
+      <p:sp>
+        <p:nvSpPr>
+          <p:cNvPr id="20" name="Rounded Rectangle 19"/>
           <p:cNvSpPr/>
           <p:nvPr/>
         </p:nvSpPr>
         <p:spPr>
           <a:xfrm>
-            <a:off x="365760" y="3236976"/>
-            <a:ext cx="4754880" cy="685800"/>
-          </a:xfrm>
-          <a:prstGeom prst="chevron">
+            <a:off x="8046720" y="1645920"/>
+            <a:ext cx="3566160" cy="3977639"/>
+          </a:xfrm>
+          <a:prstGeom prst="roundRect">
             <a:avLst/>
           </a:prstGeom>
           <a:solidFill>
-            <a:srgbClr val="0D9488"/>
+            <a:srgbClr val="FFFFFF"/>
           </a:solidFill>
-          <a:ln>
-            <a:noFill/>
+          <a:ln w="19050">
+            <a:solidFill>
+              <a:srgbClr val="D97706"/>
+            </a:solidFill>
           </a:ln>
         </p:spPr>
         <p:style>
@@ -4535,14 +4811,57 @@
       </p:sp>
       <p:sp>
         <p:nvSpPr>
-          <p:cNvPr id="11" name="TextBox 10"/>
+          <p:cNvPr id="21" name="Rounded Rectangle 20"/>
+          <p:cNvSpPr/>
+          <p:nvPr/>
+        </p:nvSpPr>
+        <p:spPr>
+          <a:xfrm>
+            <a:off x="8046720" y="1645920"/>
+            <a:ext cx="3566160" cy="457199"/>
+          </a:xfrm>
+          <a:prstGeom prst="roundRect">
+            <a:avLst/>
+          </a:prstGeom>
+          <a:solidFill>
+            <a:srgbClr val="D97706"/>
+          </a:solidFill>
+          <a:ln>
+            <a:noFill/>
+          </a:ln>
+        </p:spPr>
+        <p:style>
+          <a:lnRef idx="1">
+            <a:schemeClr val="accent1"/>
+          </a:lnRef>
+          <a:fillRef idx="3">
+            <a:schemeClr val="accent1"/>
+          </a:fillRef>
+          <a:effectRef idx="2">
+            <a:schemeClr val="accent1"/>
+          </a:effectRef>
+          <a:fontRef idx="minor">
+            <a:schemeClr val="lt1"/>
+          </a:fontRef>
+        </p:style>
+        <p:txBody>
+          <a:bodyPr rtlCol="0" anchor="ctr"/>
+          <a:lstStyle/>
+          <a:p>
+            <a:pPr algn="ctr"/>
+          </a:p>
+        </p:txBody>
+      </p:sp>
+      <p:sp>
+        <p:nvSpPr>
+          <p:cNvPr id="22" name="TextBox 21"/>
           <p:cNvSpPr txBox="1"/>
           <p:nvPr/>
         </p:nvSpPr>
         <p:spPr>
           <a:xfrm>
-            <a:off x="640080" y="3310128"/>
-            <a:ext cx="4206240" cy="548639"/>
+            <a:off x="8046720" y="1691640"/>
+            <a:ext cx="3566160" cy="411480"/>
           </a:xfrm>
           <a:prstGeom prst="rect">
             <a:avLst/>
@@ -4555,8 +4874,8 @@
           </a:bodyPr>
           <a:lstStyle/>
           <a:p>
-            <a:pPr algn="l">
-              <a:defRPr sz="1400" b="1">
+            <a:pPr algn="ctr">
+              <a:defRPr sz="1500" b="1">
                 <a:solidFill>
                   <a:srgbClr val="FFFFFF"/>
                 </a:solidFill>
@@ -4564,64 +4883,21 @@
               </a:defRPr>
             </a:pPr>
             <a:r>
-              <a:t>.pptx: Tệp bài trình chiếu PowerPoint</a:t>
-            </a:r>
-          </a:p>
-        </p:txBody>
-      </p:sp>
-      <p:sp>
-        <p:nvSpPr>
-          <p:cNvPr id="12" name="Chevron 11"/>
-          <p:cNvSpPr/>
-          <p:nvPr/>
-        </p:nvSpPr>
-        <p:spPr>
-          <a:xfrm>
-            <a:off x="365760" y="4032504"/>
-            <a:ext cx="4754880" cy="685800"/>
-          </a:xfrm>
-          <a:prstGeom prst="chevron">
-            <a:avLst/>
-          </a:prstGeom>
-          <a:solidFill>
-            <a:srgbClr val="D97706"/>
-          </a:solidFill>
-          <a:ln>
-            <a:noFill/>
-          </a:ln>
-        </p:spPr>
-        <p:style>
-          <a:lnRef idx="1">
-            <a:schemeClr val="accent1"/>
-          </a:lnRef>
-          <a:fillRef idx="3">
-            <a:schemeClr val="accent1"/>
-          </a:fillRef>
-          <a:effectRef idx="2">
-            <a:schemeClr val="accent1"/>
-          </a:effectRef>
-          <a:fontRef idx="minor">
-            <a:schemeClr val="lt1"/>
-          </a:fontRef>
-        </p:style>
-        <p:txBody>
-          <a:bodyPr rtlCol="0" anchor="ctr"/>
-          <a:lstStyle/>
-          <a:p>
-            <a:pPr algn="ctr"/>
-          </a:p>
-        </p:txBody>
-      </p:sp>
-      <p:sp>
-        <p:nvSpPr>
-          <p:cNvPr id="13" name="TextBox 12"/>
+              <a:t>3. Tệp thực thi &amp; Cảnh báo</a:t>
+            </a:r>
+          </a:p>
+        </p:txBody>
+      </p:sp>
+      <p:sp>
+        <p:nvSpPr>
+          <p:cNvPr id="23" name="TextBox 22"/>
           <p:cNvSpPr txBox="1"/>
           <p:nvPr/>
         </p:nvSpPr>
         <p:spPr>
           <a:xfrm>
-            <a:off x="640080" y="4105656"/>
-            <a:ext cx="4206240" cy="548639"/>
+            <a:off x="8183880" y="2240280"/>
+            <a:ext cx="3291840" cy="594359"/>
           </a:xfrm>
           <a:prstGeom prst="rect">
             <a:avLst/>
@@ -4635,72 +4911,29 @@
           <a:lstStyle/>
           <a:p>
             <a:pPr algn="l">
-              <a:defRPr sz="1400" b="1">
+              <a:defRPr sz="1400" b="0">
                 <a:solidFill>
-                  <a:srgbClr val="FFFFFF"/>
+                  <a:srgbClr val="0F172A"/>
                 </a:solidFill>
                 <a:latin typeface="Arial"/>
               </a:defRPr>
             </a:pPr>
             <a:r>
-              <a:t>.jpg / .png: Tệp hình ảnh đồ họa</a:t>
-            </a:r>
-          </a:p>
-        </p:txBody>
-      </p:sp>
-      <p:sp>
-        <p:nvSpPr>
-          <p:cNvPr id="14" name="Chevron 13"/>
-          <p:cNvSpPr/>
-          <p:nvPr/>
-        </p:nvSpPr>
-        <p:spPr>
-          <a:xfrm>
-            <a:off x="365760" y="4828032"/>
-            <a:ext cx="4754880" cy="685800"/>
-          </a:xfrm>
-          <a:prstGeom prst="chevron">
-            <a:avLst/>
-          </a:prstGeom>
-          <a:solidFill>
-            <a:srgbClr val="7C3AED"/>
-          </a:solidFill>
-          <a:ln>
-            <a:noFill/>
-          </a:ln>
-        </p:spPr>
-        <p:style>
-          <a:lnRef idx="1">
-            <a:schemeClr val="accent1"/>
-          </a:lnRef>
-          <a:fillRef idx="3">
-            <a:schemeClr val="accent1"/>
-          </a:fillRef>
-          <a:effectRef idx="2">
-            <a:schemeClr val="accent1"/>
-          </a:effectRef>
-          <a:fontRef idx="minor">
-            <a:schemeClr val="lt1"/>
-          </a:fontRef>
-        </p:style>
-        <p:txBody>
-          <a:bodyPr rtlCol="0" anchor="ctr"/>
-          <a:lstStyle/>
-          <a:p>
-            <a:pPr algn="ctr"/>
-          </a:p>
-        </p:txBody>
-      </p:sp>
-      <p:sp>
-        <p:nvSpPr>
-          <p:cNvPr id="15" name="TextBox 14"/>
+              <a:t>• .exe / .bat: Chương trình cài đặt</a:t>
+            </a:r>
+          </a:p>
+        </p:txBody>
+      </p:sp>
+      <p:sp>
+        <p:nvSpPr>
+          <p:cNvPr id="24" name="TextBox 23"/>
           <p:cNvSpPr txBox="1"/>
           <p:nvPr/>
         </p:nvSpPr>
         <p:spPr>
           <a:xfrm>
-            <a:off x="640080" y="4901184"/>
-            <a:ext cx="4206240" cy="548639"/>
+            <a:off x="8183880" y="2880360"/>
+            <a:ext cx="3291840" cy="594359"/>
           </a:xfrm>
           <a:prstGeom prst="rect">
             <a:avLst/>
@@ -4714,88 +4947,91 @@
           <a:lstStyle/>
           <a:p>
             <a:pPr algn="l">
-              <a:defRPr sz="1400" b="1">
+              <a:defRPr sz="1400" b="0">
                 <a:solidFill>
-                  <a:srgbClr val="FFFFFF"/>
+                  <a:srgbClr val="0F172A"/>
                 </a:solidFill>
                 <a:latin typeface="Arial"/>
               </a:defRPr>
             </a:pPr>
             <a:r>
-              <a:t>.mp3 / .mp4: Tệp âm thanh và video đa phương tiện</a:t>
-            </a:r>
-          </a:p>
-        </p:txBody>
-      </p:sp>
-      <p:sp>
-        <p:nvSpPr>
-          <p:cNvPr id="16" name="Rounded Rectangle 15"/>
-          <p:cNvSpPr/>
-          <p:nvPr/>
-        </p:nvSpPr>
-        <p:spPr>
-          <a:xfrm>
-            <a:off x="5394960" y="1645920"/>
-            <a:ext cx="6309360" cy="3977639"/>
-          </a:xfrm>
-          <a:prstGeom prst="roundRect">
-            <a:avLst/>
-          </a:prstGeom>
-          <a:solidFill>
-            <a:srgbClr val="FFFFFF"/>
-          </a:solidFill>
-          <a:ln w="19050">
-            <a:solidFill>
-              <a:srgbClr val="CBD5E1"/>
-            </a:solidFill>
-          </a:ln>
-        </p:spPr>
-        <p:style>
-          <a:lnRef idx="1">
-            <a:schemeClr val="accent1"/>
-          </a:lnRef>
-          <a:fillRef idx="3">
-            <a:schemeClr val="accent1"/>
-          </a:fillRef>
-          <a:effectRef idx="2">
-            <a:schemeClr val="accent1"/>
-          </a:effectRef>
-          <a:fontRef idx="minor">
-            <a:schemeClr val="lt1"/>
-          </a:fontRef>
-        </p:style>
-        <p:txBody>
-          <a:bodyPr rtlCol="0" anchor="ctr"/>
-          <a:lstStyle/>
-          <a:p>
-            <a:pPr algn="ctr"/>
-          </a:p>
-        </p:txBody>
-      </p:sp>
-      <p:pic>
-        <p:nvPicPr>
-          <p:cNvPr id="17" name="Picture 16" descr="sgk_lop7_bai3_hinh32_duoi_mo_rong_tep.png"/>
-          <p:cNvPicPr>
-            <a:picLocks noChangeAspect="1"/>
-          </p:cNvPicPr>
-          <p:nvPr/>
-        </p:nvPicPr>
-        <p:blipFill>
-          <a:blip r:embed="rId2"/>
-          <a:stretch>
-            <a:fillRect/>
-          </a:stretch>
-        </p:blipFill>
-        <p:spPr>
-          <a:xfrm>
-            <a:off x="5486400" y="1737360"/>
-            <a:ext cx="6126480" cy="3794760"/>
+              <a:t>• Cảnh báo: Không bấm vào tệp .exe lạ</a:t>
+            </a:r>
+          </a:p>
+        </p:txBody>
+      </p:sp>
+      <p:sp>
+        <p:nvSpPr>
+          <p:cNvPr id="25" name="TextBox 24"/>
+          <p:cNvSpPr txBox="1"/>
+          <p:nvPr/>
+        </p:nvSpPr>
+        <p:spPr>
+          <a:xfrm>
+            <a:off x="8183880" y="3520440"/>
+            <a:ext cx="3291840" cy="594360"/>
           </a:xfrm>
           <a:prstGeom prst="rect">
             <a:avLst/>
           </a:prstGeom>
-        </p:spPr>
-      </p:pic>
+          <a:noFill/>
+        </p:spPr>
+        <p:txBody>
+          <a:bodyPr wrap="square" lIns="73152" rIns="73152" tIns="54864" bIns="54864">
+            <a:spAutoFit/>
+          </a:bodyPr>
+          <a:lstStyle/>
+          <a:p>
+            <a:pPr algn="l">
+              <a:defRPr sz="1400" b="0">
+                <a:solidFill>
+                  <a:srgbClr val="0F172A"/>
+                </a:solidFill>
+                <a:latin typeface="Arial"/>
+              </a:defRPr>
+            </a:pPr>
+            <a:r>
+              <a:t>• Nguy cơ chứa virus, mã độc</a:t>
+            </a:r>
+          </a:p>
+        </p:txBody>
+      </p:sp>
+      <p:sp>
+        <p:nvSpPr>
+          <p:cNvPr id="26" name="TextBox 25"/>
+          <p:cNvSpPr txBox="1"/>
+          <p:nvPr/>
+        </p:nvSpPr>
+        <p:spPr>
+          <a:xfrm>
+            <a:off x="8183880" y="4160520"/>
+            <a:ext cx="3291840" cy="594360"/>
+          </a:xfrm>
+          <a:prstGeom prst="rect">
+            <a:avLst/>
+          </a:prstGeom>
+          <a:noFill/>
+        </p:spPr>
+        <p:txBody>
+          <a:bodyPr wrap="square" lIns="73152" rIns="73152" tIns="54864" bIns="54864">
+            <a:spAutoFit/>
+          </a:bodyPr>
+          <a:lstStyle/>
+          <a:p>
+            <a:pPr algn="l">
+              <a:defRPr sz="1400" b="0">
+                <a:solidFill>
+                  <a:srgbClr val="0F172A"/>
+                </a:solidFill>
+                <a:latin typeface="Arial"/>
+              </a:defRPr>
+            </a:pPr>
+            <a:r>
+              <a:t>• Luôn quét virus trước khi mở</a:t>
+            </a:r>
+          </a:p>
+        </p:txBody>
+      </p:sp>
     </p:spTree>
   </p:cSld>
   <p:clrMapOvr>
@@ -4934,7 +5170,7 @@
               </a:defRPr>
             </a:pPr>
             <a:r>
-              <a:t>HOẠT ĐỘNG KHÁM PHÁ</a:t>
+              <a:t>QUY TRÌNH &amp; THAO TÁC</a:t>
             </a:r>
           </a:p>
         </p:txBody>
@@ -4970,32 +5206,30 @@
               </a:defRPr>
             </a:pPr>
             <a:r>
-              <a:t>Các thao tác quản lý tệp và thư mục cơ bản</a:t>
-            </a:r>
-          </a:p>
-        </p:txBody>
-      </p:sp>
-      <p:sp>
-        <p:nvSpPr>
-          <p:cNvPr id="6" name="Rounded Rectangle 5"/>
+              <a:t>Chiến lược Sao lưu dữ liệu &amp; Phòng chống Virus</a:t>
+            </a:r>
+          </a:p>
+        </p:txBody>
+      </p:sp>
+      <p:sp>
+        <p:nvSpPr>
+          <p:cNvPr id="6" name="Chevron 5"/>
           <p:cNvSpPr/>
           <p:nvPr/>
         </p:nvSpPr>
         <p:spPr>
           <a:xfrm>
             <a:off x="365760" y="1645920"/>
-            <a:ext cx="3840480" cy="3977639"/>
-          </a:xfrm>
-          <a:prstGeom prst="roundRect">
+            <a:ext cx="4754880" cy="868680"/>
+          </a:xfrm>
+          <a:prstGeom prst="chevron">
             <a:avLst/>
           </a:prstGeom>
           <a:solidFill>
-            <a:srgbClr val="FFFFFF"/>
+            <a:srgbClr val="0369A1"/>
           </a:solidFill>
-          <a:ln w="19050">
-            <a:solidFill>
-              <a:srgbClr val="0EA5E9"/>
-            </a:solidFill>
+          <a:ln>
+            <a:noFill/>
           </a:ln>
         </p:spPr>
         <p:style>
@@ -5022,16 +5256,52 @@
       </p:sp>
       <p:sp>
         <p:nvSpPr>
-          <p:cNvPr id="7" name="Rounded Rectangle 6"/>
+          <p:cNvPr id="7" name="TextBox 6"/>
+          <p:cNvSpPr txBox="1"/>
+          <p:nvPr/>
+        </p:nvSpPr>
+        <p:spPr>
+          <a:xfrm>
+            <a:off x="640080" y="1719072"/>
+            <a:ext cx="4206240" cy="731520"/>
+          </a:xfrm>
+          <a:prstGeom prst="rect">
+            <a:avLst/>
+          </a:prstGeom>
+          <a:noFill/>
+        </p:spPr>
+        <p:txBody>
+          <a:bodyPr wrap="square" lIns="73152" rIns="73152" tIns="54864" bIns="54864">
+            <a:spAutoFit/>
+          </a:bodyPr>
+          <a:lstStyle/>
+          <a:p>
+            <a:pPr algn="l">
+              <a:defRPr sz="1400" b="1">
+                <a:solidFill>
+                  <a:srgbClr val="FFFFFF"/>
+                </a:solidFill>
+                <a:latin typeface="Arial"/>
+              </a:defRPr>
+            </a:pPr>
+            <a:r>
+              <a:t>1. Sao lưu định kỳ (Backup) lên Cloud / Ổ cứng ngoài</a:t>
+            </a:r>
+          </a:p>
+        </p:txBody>
+      </p:sp>
+      <p:sp>
+        <p:nvSpPr>
+          <p:cNvPr id="8" name="Chevron 7"/>
           <p:cNvSpPr/>
           <p:nvPr/>
         </p:nvSpPr>
         <p:spPr>
           <a:xfrm>
-            <a:off x="365760" y="1645920"/>
-            <a:ext cx="164592" cy="3977639"/>
-          </a:xfrm>
-          <a:prstGeom prst="roundRect">
+            <a:off x="365760" y="2624328"/>
+            <a:ext cx="4754880" cy="868680"/>
+          </a:xfrm>
+          <a:prstGeom prst="chevron">
             <a:avLst/>
           </a:prstGeom>
           <a:solidFill>
@@ -5065,14 +5335,14 @@
       </p:sp>
       <p:sp>
         <p:nvSpPr>
-          <p:cNvPr id="8" name="TextBox 7"/>
+          <p:cNvPr id="9" name="TextBox 8"/>
           <p:cNvSpPr txBox="1"/>
           <p:nvPr/>
         </p:nvSpPr>
         <p:spPr>
           <a:xfrm>
-            <a:off x="640080" y="1783080"/>
-            <a:ext cx="3429000" cy="640080"/>
+            <a:off x="640080" y="2697480"/>
+            <a:ext cx="4206240" cy="731519"/>
           </a:xfrm>
           <a:prstGeom prst="rect">
             <a:avLst/>
@@ -5086,29 +5356,72 @@
           <a:lstStyle/>
           <a:p>
             <a:pPr algn="l">
-              <a:defRPr sz="1500" b="1">
+              <a:defRPr sz="1400" b="1">
                 <a:solidFill>
-                  <a:srgbClr val="0F172A"/>
+                  <a:srgbClr val="FFFFFF"/>
                 </a:solidFill>
                 <a:latin typeface="Arial"/>
               </a:defRPr>
             </a:pPr>
             <a:r>
-              <a:t>• Tạo mới (New Folder): Phím tắt Ctrl + Shift + N</a:t>
-            </a:r>
-          </a:p>
-        </p:txBody>
-      </p:sp>
-      <p:sp>
-        <p:nvSpPr>
-          <p:cNvPr id="9" name="TextBox 8"/>
+              <a:t>2. Đặt mật khẩu mạnh và không chia sẻ cho người khác</a:t>
+            </a:r>
+          </a:p>
+        </p:txBody>
+      </p:sp>
+      <p:sp>
+        <p:nvSpPr>
+          <p:cNvPr id="10" name="Chevron 9"/>
+          <p:cNvSpPr/>
+          <p:nvPr/>
+        </p:nvSpPr>
+        <p:spPr>
+          <a:xfrm>
+            <a:off x="365760" y="3602736"/>
+            <a:ext cx="4754880" cy="868679"/>
+          </a:xfrm>
+          <a:prstGeom prst="chevron">
+            <a:avLst/>
+          </a:prstGeom>
+          <a:solidFill>
+            <a:srgbClr val="0D9488"/>
+          </a:solidFill>
+          <a:ln>
+            <a:noFill/>
+          </a:ln>
+        </p:spPr>
+        <p:style>
+          <a:lnRef idx="1">
+            <a:schemeClr val="accent1"/>
+          </a:lnRef>
+          <a:fillRef idx="3">
+            <a:schemeClr val="accent1"/>
+          </a:fillRef>
+          <a:effectRef idx="2">
+            <a:schemeClr val="accent1"/>
+          </a:effectRef>
+          <a:fontRef idx="minor">
+            <a:schemeClr val="lt1"/>
+          </a:fontRef>
+        </p:style>
+        <p:txBody>
+          <a:bodyPr rtlCol="0" anchor="ctr"/>
+          <a:lstStyle/>
+          <a:p>
+            <a:pPr algn="ctr"/>
+          </a:p>
+        </p:txBody>
+      </p:sp>
+      <p:sp>
+        <p:nvSpPr>
+          <p:cNvPr id="11" name="TextBox 10"/>
           <p:cNvSpPr txBox="1"/>
           <p:nvPr/>
         </p:nvSpPr>
         <p:spPr>
           <a:xfrm>
-            <a:off x="640080" y="2468880"/>
-            <a:ext cx="3429000" cy="640080"/>
+            <a:off x="640080" y="3675887"/>
+            <a:ext cx="4206240" cy="731519"/>
           </a:xfrm>
           <a:prstGeom prst="rect">
             <a:avLst/>
@@ -5122,29 +5435,72 @@
           <a:lstStyle/>
           <a:p>
             <a:pPr algn="l">
-              <a:defRPr sz="1500" b="1">
+              <a:defRPr sz="1400" b="1">
                 <a:solidFill>
-                  <a:srgbClr val="0F172A"/>
+                  <a:srgbClr val="FFFFFF"/>
                 </a:solidFill>
                 <a:latin typeface="Arial"/>
               </a:defRPr>
             </a:pPr>
             <a:r>
-              <a:t>• Đổi tên (Rename): Phím F2 hoặc chuột phải chọn Rename</a:t>
-            </a:r>
-          </a:p>
-        </p:txBody>
-      </p:sp>
-      <p:sp>
-        <p:nvSpPr>
-          <p:cNvPr id="10" name="TextBox 9"/>
+              <a:t>3. Bật phần mềm diệt virus (Windows Defender)</a:t>
+            </a:r>
+          </a:p>
+        </p:txBody>
+      </p:sp>
+      <p:sp>
+        <p:nvSpPr>
+          <p:cNvPr id="12" name="Chevron 11"/>
+          <p:cNvSpPr/>
+          <p:nvPr/>
+        </p:nvSpPr>
+        <p:spPr>
+          <a:xfrm>
+            <a:off x="365760" y="4581144"/>
+            <a:ext cx="4754880" cy="868680"/>
+          </a:xfrm>
+          <a:prstGeom prst="chevron">
+            <a:avLst/>
+          </a:prstGeom>
+          <a:solidFill>
+            <a:srgbClr val="D97706"/>
+          </a:solidFill>
+          <a:ln>
+            <a:noFill/>
+          </a:ln>
+        </p:spPr>
+        <p:style>
+          <a:lnRef idx="1">
+            <a:schemeClr val="accent1"/>
+          </a:lnRef>
+          <a:fillRef idx="3">
+            <a:schemeClr val="accent1"/>
+          </a:fillRef>
+          <a:effectRef idx="2">
+            <a:schemeClr val="accent1"/>
+          </a:effectRef>
+          <a:fontRef idx="minor">
+            <a:schemeClr val="lt1"/>
+          </a:fontRef>
+        </p:style>
+        <p:txBody>
+          <a:bodyPr rtlCol="0" anchor="ctr"/>
+          <a:lstStyle/>
+          <a:p>
+            <a:pPr algn="ctr"/>
+          </a:p>
+        </p:txBody>
+      </p:sp>
+      <p:sp>
+        <p:nvSpPr>
+          <p:cNvPr id="13" name="TextBox 12"/>
           <p:cNvSpPr txBox="1"/>
           <p:nvPr/>
         </p:nvSpPr>
         <p:spPr>
           <a:xfrm>
-            <a:off x="640080" y="3154680"/>
-            <a:ext cx="3429000" cy="640080"/>
+            <a:off x="640080" y="4654296"/>
+            <a:ext cx="4206240" cy="731519"/>
           </a:xfrm>
           <a:prstGeom prst="rect">
             <a:avLst/>
@@ -5158,65 +5514,29 @@
           <a:lstStyle/>
           <a:p>
             <a:pPr algn="l">
-              <a:defRPr sz="1500" b="1">
+              <a:defRPr sz="1400" b="1">
                 <a:solidFill>
-                  <a:srgbClr val="0F172A"/>
+                  <a:srgbClr val="FFFFFF"/>
                 </a:solidFill>
                 <a:latin typeface="Arial"/>
               </a:defRPr>
             </a:pPr>
             <a:r>
-              <a:t>• Sao chép (Copy) / Cắt (Cut): Ctrl + C / Ctrl + X</a:t>
-            </a:r>
-          </a:p>
-        </p:txBody>
-      </p:sp>
-      <p:sp>
-        <p:nvSpPr>
-          <p:cNvPr id="11" name="TextBox 10"/>
-          <p:cNvSpPr txBox="1"/>
-          <p:nvPr/>
-        </p:nvSpPr>
-        <p:spPr>
-          <a:xfrm>
-            <a:off x="640080" y="3840480"/>
-            <a:ext cx="3429000" cy="640080"/>
-          </a:xfrm>
-          <a:prstGeom prst="rect">
-            <a:avLst/>
-          </a:prstGeom>
-          <a:noFill/>
-        </p:spPr>
-        <p:txBody>
-          <a:bodyPr wrap="square" lIns="73152" rIns="73152" tIns="54864" bIns="54864">
-            <a:spAutoFit/>
-          </a:bodyPr>
-          <a:lstStyle/>
-          <a:p>
-            <a:pPr algn="l">
-              <a:defRPr sz="1500" b="1">
-                <a:solidFill>
-                  <a:srgbClr val="0F172A"/>
-                </a:solidFill>
-                <a:latin typeface="Arial"/>
-              </a:defRPr>
-            </a:pPr>
-            <a:r>
-              <a:t>• Dán (Paste) / Xóa (Delete): Ctrl + V / Delete</a:t>
-            </a:r>
-          </a:p>
-        </p:txBody>
-      </p:sp>
-      <p:sp>
-        <p:nvSpPr>
-          <p:cNvPr id="12" name="Rounded Rectangle 11"/>
+              <a:t>4. Tuyệt đối không mở liên kết lạ, tệp đính kèm đáng ngờ</a:t>
+            </a:r>
+          </a:p>
+        </p:txBody>
+      </p:sp>
+      <p:sp>
+        <p:nvSpPr>
+          <p:cNvPr id="14" name="Rounded Rectangle 13"/>
           <p:cNvSpPr/>
           <p:nvPr/>
         </p:nvSpPr>
         <p:spPr>
           <a:xfrm>
-            <a:off x="4480560" y="1645920"/>
-            <a:ext cx="7223760" cy="3977639"/>
+            <a:off x="5394960" y="1645920"/>
+            <a:ext cx="6309360" cy="3977639"/>
           </a:xfrm>
           <a:prstGeom prst="roundRect">
             <a:avLst/>
@@ -5254,7 +5574,7 @@
       </p:sp>
       <p:pic>
         <p:nvPicPr>
-          <p:cNvPr id="13" name="Picture 12" descr="sgk_lop7_bai3_hinh36_lenh_thao_tac.png"/>
+          <p:cNvPr id="15" name="Picture 14" descr="ai_lop7_bai3_data_hub.jpg"/>
           <p:cNvPicPr>
             <a:picLocks noChangeAspect="1"/>
           </p:cNvPicPr>
@@ -5268,8 +5588,8 @@
         </p:blipFill>
         <p:spPr>
           <a:xfrm>
-            <a:off x="4572000" y="1737360"/>
-            <a:ext cx="7040880" cy="3794760"/>
+            <a:off x="5486400" y="1737360"/>
+            <a:ext cx="6126480" cy="3794760"/>
           </a:xfrm>
           <a:prstGeom prst="rect">
             <a:avLst/>
@@ -5450,7 +5770,7 @@
               </a:defRPr>
             </a:pPr>
             <a:r>
-              <a:t>Sao lưu dữ liệu &amp; Phòng chống Virus máy tính</a:t>
+              <a:t>Bộ phím tắt thần tốc quản lý tệp tin</a:t>
             </a:r>
           </a:p>
         </p:txBody>
@@ -5464,7 +5784,7 @@
         <p:spPr>
           <a:xfrm>
             <a:off x="365760" y="1645920"/>
-            <a:ext cx="3840480" cy="3977639"/>
+            <a:ext cx="4023360" cy="3977639"/>
           </a:xfrm>
           <a:prstGeom prst="roundRect">
             <a:avLst/>
@@ -5552,7 +5872,7 @@
         <p:spPr>
           <a:xfrm>
             <a:off x="640080" y="1783080"/>
-            <a:ext cx="3429000" cy="640080"/>
+            <a:ext cx="3611880" cy="640080"/>
           </a:xfrm>
           <a:prstGeom prst="rect">
             <a:avLst/>
@@ -5574,7 +5894,7 @@
               </a:defRPr>
             </a:pPr>
             <a:r>
-              <a:t>• Sao lưu định kỳ (Backup) ra USB, ổ cứng ngoài, Cloud</a:t>
+              <a:t>• F2: Đổi tên tệp / thư mục (Rename)</a:t>
             </a:r>
           </a:p>
         </p:txBody>
@@ -5588,7 +5908,7 @@
         <p:spPr>
           <a:xfrm>
             <a:off x="640080" y="2468880"/>
-            <a:ext cx="3429000" cy="640080"/>
+            <a:ext cx="3611880" cy="640080"/>
           </a:xfrm>
           <a:prstGeom prst="rect">
             <a:avLst/>
@@ -5610,7 +5930,7 @@
               </a:defRPr>
             </a:pPr>
             <a:r>
-              <a:t>• Tránh mất dữ liệu khi máy tính bị hỏng hóc</a:t>
+              <a:t>• Ctrl + Shift + N: Tạo nhanh thư mục mới</a:t>
             </a:r>
           </a:p>
         </p:txBody>
@@ -5624,7 +5944,7 @@
         <p:spPr>
           <a:xfrm>
             <a:off x="640080" y="3154680"/>
-            <a:ext cx="3429000" cy="640080"/>
+            <a:ext cx="3611880" cy="640080"/>
           </a:xfrm>
           <a:prstGeom prst="rect">
             <a:avLst/>
@@ -5646,7 +5966,7 @@
               </a:defRPr>
             </a:pPr>
             <a:r>
-              <a:t>• Bật tường lửa và phần mềm diệt virus (Windows Defender)</a:t>
+              <a:t>• Ctrl + C / Ctrl + X: Sao chép / Cắt tệp</a:t>
             </a:r>
           </a:p>
         </p:txBody>
@@ -5660,7 +5980,7 @@
         <p:spPr>
           <a:xfrm>
             <a:off x="640080" y="3840480"/>
-            <a:ext cx="3429000" cy="640080"/>
+            <a:ext cx="3611880" cy="640080"/>
           </a:xfrm>
           <a:prstGeom prst="rect">
             <a:avLst/>
@@ -5682,21 +6002,57 @@
               </a:defRPr>
             </a:pPr>
             <a:r>
-              <a:t>• Tuyệt đối không mở các tệp đính kèm lạ có đuôi .exe, .bat</a:t>
-            </a:r>
-          </a:p>
-        </p:txBody>
-      </p:sp>
-      <p:sp>
-        <p:nvSpPr>
-          <p:cNvPr id="12" name="Rounded Rectangle 11"/>
+              <a:t>• Ctrl + V: Dán tệp vào thư mục đích</a:t>
+            </a:r>
+          </a:p>
+        </p:txBody>
+      </p:sp>
+      <p:sp>
+        <p:nvSpPr>
+          <p:cNvPr id="12" name="TextBox 11"/>
+          <p:cNvSpPr txBox="1"/>
+          <p:nvPr/>
+        </p:nvSpPr>
+        <p:spPr>
+          <a:xfrm>
+            <a:off x="640080" y="4526280"/>
+            <a:ext cx="3611880" cy="640080"/>
+          </a:xfrm>
+          <a:prstGeom prst="rect">
+            <a:avLst/>
+          </a:prstGeom>
+          <a:noFill/>
+        </p:spPr>
+        <p:txBody>
+          <a:bodyPr wrap="square" lIns="73152" rIns="73152" tIns="54864" bIns="54864">
+            <a:spAutoFit/>
+          </a:bodyPr>
+          <a:lstStyle/>
+          <a:p>
+            <a:pPr algn="l">
+              <a:defRPr sz="1500" b="1">
+                <a:solidFill>
+                  <a:srgbClr val="0F172A"/>
+                </a:solidFill>
+                <a:latin typeface="Arial"/>
+              </a:defRPr>
+            </a:pPr>
+            <a:r>
+              <a:t>• Shift + Delete: Xóa vĩnh viễn tệp rác</a:t>
+            </a:r>
+          </a:p>
+        </p:txBody>
+      </p:sp>
+      <p:sp>
+        <p:nvSpPr>
+          <p:cNvPr id="13" name="Rounded Rectangle 12"/>
           <p:cNvSpPr/>
           <p:nvPr/>
         </p:nvSpPr>
         <p:spPr>
           <a:xfrm>
-            <a:off x="4480560" y="1645920"/>
-            <a:ext cx="7223760" cy="3977639"/>
+            <a:off x="4663440" y="1645920"/>
+            <a:ext cx="7040880" cy="3977639"/>
           </a:xfrm>
           <a:prstGeom prst="roundRect">
             <a:avLst/>
@@ -5734,7 +6090,7 @@
       </p:sp>
       <p:pic>
         <p:nvPicPr>
-          <p:cNvPr id="13" name="Picture 12" descr="sgk_lop7_bai3_hinh33_sao_luu_du_lieu.png"/>
+          <p:cNvPr id="14" name="Picture 13" descr="ai_lop7_bai3_data_hub.jpg"/>
           <p:cNvPicPr>
             <a:picLocks noChangeAspect="1"/>
           </p:cNvPicPr>
@@ -5748,8 +6104,8 @@
         </p:blipFill>
         <p:spPr>
           <a:xfrm>
-            <a:off x="4572000" y="1737360"/>
-            <a:ext cx="7040880" cy="3794760"/>
+            <a:off x="4754880" y="1737360"/>
+            <a:ext cx="6858000" cy="3794760"/>
           </a:xfrm>
           <a:prstGeom prst="rect">
             <a:avLst/>
@@ -6106,7 +6462,7 @@
       </p:sp>
       <p:pic>
         <p:nvPicPr>
-          <p:cNvPr id="10" name="Picture 9" descr="sgk_lop7_bai3_hinh33_sao_luu_du_lieu.png"/>
+          <p:cNvPr id="10" name="Picture 9" descr="ai_lop7_bai3_data_hub.jpg"/>
           <p:cNvPicPr>
             <a:picLocks noChangeAspect="1"/>
           </p:cNvPicPr>
@@ -6238,7 +6594,7 @@
               </a:defRPr>
             </a:pPr>
             <a:r>
-              <a:t>Quản lý dữ liệu khoa học và sao lưu dự phòng thường xuyên là nguyên tắc sống còn của người dùng máy tính!</a:t>
+              <a:t>Quản lý dữ liệu khoa học kết hợp với sao lưu dự phòng thường xuyên là kỹ năng sống còn của mọi công dân số!</a:t>
             </a:r>
           </a:p>
         </p:txBody>
@@ -6505,7 +6861,7 @@
               </a:defRPr>
             </a:pPr>
             <a:r>
-              <a:t>❓ Đâu là phần mềm diệt virus và bảo vệ máy tính tích hợp sẵn trong Windows?</a:t>
+              <a:t>❓ Đâu là phần mềm diệt virus và bảo vệ máy tính được tích hợp sẵn trong Windows?</a:t>
             </a:r>
           </a:p>
         </p:txBody>

--- a/KHBD_Tin_học/Lớp_7/Tuần_04/Slide_Tin_hoc_Lớp_7_Tiet03_Bai_3_Quan_ly_du_lieu_trong_may_tinh.pptx
+++ b/KHBD_Tin_học/Lớp_7/Tuần_04/Slide_Tin_hoc_Lớp_7_Tiet03_Bai_3_Quan_ly_du_lieu_trong_may_tinh.pptx
@@ -5206,7 +5206,7 @@
               </a:defRPr>
             </a:pPr>
             <a:r>
-              <a:t>Chiến lược Sao lưu dữ liệu &amp; Phòng chống Virus</a:t>
+              <a:t>Bảng phím tắt thao tác nhanh trên tệp &amp; thư mục</a:t>
             </a:r>
           </a:p>
         </p:txBody>
@@ -5220,7 +5220,7 @@
         <p:spPr>
           <a:xfrm>
             <a:off x="365760" y="1645920"/>
-            <a:ext cx="4754880" cy="868680"/>
+            <a:ext cx="4389120" cy="685799"/>
           </a:xfrm>
           <a:prstGeom prst="chevron">
             <a:avLst/>
@@ -5262,8 +5262,8 @@
         </p:nvSpPr>
         <p:spPr>
           <a:xfrm>
-            <a:off x="640080" y="1719072"/>
-            <a:ext cx="4206240" cy="731520"/>
+            <a:off x="594360" y="1719072"/>
+            <a:ext cx="3840480" cy="548639"/>
           </a:xfrm>
           <a:prstGeom prst="rect">
             <a:avLst/>
@@ -5285,7 +5285,7 @@
               </a:defRPr>
             </a:pPr>
             <a:r>
-              <a:t>1. Sao lưu định kỳ (Backup) lên Cloud / Ổ cứng ngoài</a:t>
+              <a:t>F2: Đổi tên (Rename)</a:t>
             </a:r>
           </a:p>
         </p:txBody>
@@ -5298,8 +5298,8 @@
         </p:nvSpPr>
         <p:spPr>
           <a:xfrm>
-            <a:off x="365760" y="2624328"/>
-            <a:ext cx="4754880" cy="868680"/>
+            <a:off x="365760" y="2441448"/>
+            <a:ext cx="4389120" cy="685800"/>
           </a:xfrm>
           <a:prstGeom prst="chevron">
             <a:avLst/>
@@ -5341,8 +5341,8 @@
         </p:nvSpPr>
         <p:spPr>
           <a:xfrm>
-            <a:off x="640080" y="2697480"/>
-            <a:ext cx="4206240" cy="731519"/>
+            <a:off x="594360" y="2514600"/>
+            <a:ext cx="3840480" cy="548640"/>
           </a:xfrm>
           <a:prstGeom prst="rect">
             <a:avLst/>
@@ -5364,7 +5364,7 @@
               </a:defRPr>
             </a:pPr>
             <a:r>
-              <a:t>2. Đặt mật khẩu mạnh và không chia sẻ cho người khác</a:t>
+              <a:t>Ctrl+Shift+N: Tạo mới</a:t>
             </a:r>
           </a:p>
         </p:txBody>
@@ -5377,8 +5377,8 @@
         </p:nvSpPr>
         <p:spPr>
           <a:xfrm>
-            <a:off x="365760" y="3602736"/>
-            <a:ext cx="4754880" cy="868679"/>
+            <a:off x="365760" y="3236976"/>
+            <a:ext cx="4389120" cy="685800"/>
           </a:xfrm>
           <a:prstGeom prst="chevron">
             <a:avLst/>
@@ -5420,8 +5420,8 @@
         </p:nvSpPr>
         <p:spPr>
           <a:xfrm>
-            <a:off x="640080" y="3675887"/>
-            <a:ext cx="4206240" cy="731519"/>
+            <a:off x="594360" y="3310128"/>
+            <a:ext cx="3840480" cy="548639"/>
           </a:xfrm>
           <a:prstGeom prst="rect">
             <a:avLst/>
@@ -5443,7 +5443,7 @@
               </a:defRPr>
             </a:pPr>
             <a:r>
-              <a:t>3. Bật phần mềm diệt virus (Windows Defender)</a:t>
+              <a:t>Ctrl+C / Ctrl+X: Copy/Cut</a:t>
             </a:r>
           </a:p>
         </p:txBody>
@@ -5456,8 +5456,8 @@
         </p:nvSpPr>
         <p:spPr>
           <a:xfrm>
-            <a:off x="365760" y="4581144"/>
-            <a:ext cx="4754880" cy="868680"/>
+            <a:off x="365760" y="4032504"/>
+            <a:ext cx="4389120" cy="685800"/>
           </a:xfrm>
           <a:prstGeom prst="chevron">
             <a:avLst/>
@@ -5499,8 +5499,8 @@
         </p:nvSpPr>
         <p:spPr>
           <a:xfrm>
-            <a:off x="640080" y="4654296"/>
-            <a:ext cx="4206240" cy="731519"/>
+            <a:off x="594360" y="4105656"/>
+            <a:ext cx="3840480" cy="548639"/>
           </a:xfrm>
           <a:prstGeom prst="rect">
             <a:avLst/>
@@ -5522,21 +5522,100 @@
               </a:defRPr>
             </a:pPr>
             <a:r>
-              <a:t>4. Tuyệt đối không mở liên kết lạ, tệp đính kèm đáng ngờ</a:t>
-            </a:r>
-          </a:p>
-        </p:txBody>
-      </p:sp>
-      <p:sp>
-        <p:nvSpPr>
-          <p:cNvPr id="14" name="Rounded Rectangle 13"/>
+              <a:t>Ctrl+V: Dán tệp (Paste)</a:t>
+            </a:r>
+          </a:p>
+        </p:txBody>
+      </p:sp>
+      <p:sp>
+        <p:nvSpPr>
+          <p:cNvPr id="14" name="Chevron 13"/>
           <p:cNvSpPr/>
           <p:nvPr/>
         </p:nvSpPr>
         <p:spPr>
           <a:xfrm>
-            <a:off x="5394960" y="1645920"/>
-            <a:ext cx="6309360" cy="3977639"/>
+            <a:off x="365760" y="4828032"/>
+            <a:ext cx="4389120" cy="685800"/>
+          </a:xfrm>
+          <a:prstGeom prst="chevron">
+            <a:avLst/>
+          </a:prstGeom>
+          <a:solidFill>
+            <a:srgbClr val="7C3AED"/>
+          </a:solidFill>
+          <a:ln>
+            <a:noFill/>
+          </a:ln>
+        </p:spPr>
+        <p:style>
+          <a:lnRef idx="1">
+            <a:schemeClr val="accent1"/>
+          </a:lnRef>
+          <a:fillRef idx="3">
+            <a:schemeClr val="accent1"/>
+          </a:fillRef>
+          <a:effectRef idx="2">
+            <a:schemeClr val="accent1"/>
+          </a:effectRef>
+          <a:fontRef idx="minor">
+            <a:schemeClr val="lt1"/>
+          </a:fontRef>
+        </p:style>
+        <p:txBody>
+          <a:bodyPr rtlCol="0" anchor="ctr"/>
+          <a:lstStyle/>
+          <a:p>
+            <a:pPr algn="ctr"/>
+          </a:p>
+        </p:txBody>
+      </p:sp>
+      <p:sp>
+        <p:nvSpPr>
+          <p:cNvPr id="15" name="TextBox 14"/>
+          <p:cNvSpPr txBox="1"/>
+          <p:nvPr/>
+        </p:nvSpPr>
+        <p:spPr>
+          <a:xfrm>
+            <a:off x="594360" y="4901184"/>
+            <a:ext cx="3840480" cy="548639"/>
+          </a:xfrm>
+          <a:prstGeom prst="rect">
+            <a:avLst/>
+          </a:prstGeom>
+          <a:noFill/>
+        </p:spPr>
+        <p:txBody>
+          <a:bodyPr wrap="square" lIns="73152" rIns="73152" tIns="54864" bIns="54864">
+            <a:spAutoFit/>
+          </a:bodyPr>
+          <a:lstStyle/>
+          <a:p>
+            <a:pPr algn="l">
+              <a:defRPr sz="1400" b="1">
+                <a:solidFill>
+                  <a:srgbClr val="FFFFFF"/>
+                </a:solidFill>
+                <a:latin typeface="Arial"/>
+              </a:defRPr>
+            </a:pPr>
+            <a:r>
+              <a:t>Delete: Xóa vào Thùng rác</a:t>
+            </a:r>
+          </a:p>
+        </p:txBody>
+      </p:sp>
+      <p:sp>
+        <p:nvSpPr>
+          <p:cNvPr id="16" name="Rounded Rectangle 15"/>
+          <p:cNvSpPr/>
+          <p:nvPr/>
+        </p:nvSpPr>
+        <p:spPr>
+          <a:xfrm>
+            <a:off x="5029200" y="1645920"/>
+            <a:ext cx="6675120" cy="3977639"/>
           </a:xfrm>
           <a:prstGeom prst="roundRect">
             <a:avLst/>
@@ -5574,7 +5653,7 @@
       </p:sp>
       <p:pic>
         <p:nvPicPr>
-          <p:cNvPr id="15" name="Picture 14" descr="ai_lop7_bai3_data_hub.jpg"/>
+          <p:cNvPr id="17" name="Picture 16" descr="lop7_bai3_phim_tat_thao_tac.png"/>
           <p:cNvPicPr>
             <a:picLocks noChangeAspect="1"/>
           </p:cNvPicPr>
@@ -5588,8 +5667,8 @@
         </p:blipFill>
         <p:spPr>
           <a:xfrm>
-            <a:off x="5486400" y="1737360"/>
-            <a:ext cx="6126480" cy="3794760"/>
+            <a:off x="5120640" y="1737360"/>
+            <a:ext cx="6492240" cy="3794760"/>
           </a:xfrm>
           <a:prstGeom prst="rect">
             <a:avLst/>
@@ -5770,7 +5849,7 @@
               </a:defRPr>
             </a:pPr>
             <a:r>
-              <a:t>Bộ phím tắt thần tốc quản lý tệp tin</a:t>
+              <a:t>Chiến lược Sao lưu dữ liệu &amp; Phòng chống Virus</a:t>
             </a:r>
           </a:p>
         </p:txBody>
@@ -5894,7 +5973,7 @@
               </a:defRPr>
             </a:pPr>
             <a:r>
-              <a:t>• F2: Đổi tên tệp / thư mục (Rename)</a:t>
+              <a:t>• Sao lưu định kỳ (Backup) lên Cloud / Ổ cứng ngoài</a:t>
             </a:r>
           </a:p>
         </p:txBody>
@@ -5930,7 +6009,7 @@
               </a:defRPr>
             </a:pPr>
             <a:r>
-              <a:t>• Ctrl + Shift + N: Tạo nhanh thư mục mới</a:t>
+              <a:t>• Đặt mật khẩu mạnh và không chia sẻ cho người khác</a:t>
             </a:r>
           </a:p>
         </p:txBody>
@@ -5966,7 +6045,7 @@
               </a:defRPr>
             </a:pPr>
             <a:r>
-              <a:t>• Ctrl + C / Ctrl + X: Sao chép / Cắt tệp</a:t>
+              <a:t>• Bật phần mềm diệt virus (Windows Defender)</a:t>
             </a:r>
           </a:p>
         </p:txBody>
@@ -6002,50 +6081,14 @@
               </a:defRPr>
             </a:pPr>
             <a:r>
-              <a:t>• Ctrl + V: Dán tệp vào thư mục đích</a:t>
-            </a:r>
-          </a:p>
-        </p:txBody>
-      </p:sp>
-      <p:sp>
-        <p:nvSpPr>
-          <p:cNvPr id="12" name="TextBox 11"/>
-          <p:cNvSpPr txBox="1"/>
-          <p:nvPr/>
-        </p:nvSpPr>
-        <p:spPr>
-          <a:xfrm>
-            <a:off x="640080" y="4526280"/>
-            <a:ext cx="3611880" cy="640080"/>
-          </a:xfrm>
-          <a:prstGeom prst="rect">
-            <a:avLst/>
-          </a:prstGeom>
-          <a:noFill/>
-        </p:spPr>
-        <p:txBody>
-          <a:bodyPr wrap="square" lIns="73152" rIns="73152" tIns="54864" bIns="54864">
-            <a:spAutoFit/>
-          </a:bodyPr>
-          <a:lstStyle/>
-          <a:p>
-            <a:pPr algn="l">
-              <a:defRPr sz="1500" b="1">
-                <a:solidFill>
-                  <a:srgbClr val="0F172A"/>
-                </a:solidFill>
-                <a:latin typeface="Arial"/>
-              </a:defRPr>
-            </a:pPr>
-            <a:r>
-              <a:t>• Shift + Delete: Xóa vĩnh viễn tệp rác</a:t>
-            </a:r>
-          </a:p>
-        </p:txBody>
-      </p:sp>
-      <p:sp>
-        <p:nvSpPr>
-          <p:cNvPr id="13" name="Rounded Rectangle 12"/>
+              <a:t>• Tuyệt đối không mở liên kết lạ, tệp đính kèm đáng ngờ</a:t>
+            </a:r>
+          </a:p>
+        </p:txBody>
+      </p:sp>
+      <p:sp>
+        <p:nvSpPr>
+          <p:cNvPr id="12" name="Rounded Rectangle 11"/>
           <p:cNvSpPr/>
           <p:nvPr/>
         </p:nvSpPr>
@@ -6090,7 +6133,7 @@
       </p:sp>
       <p:pic>
         <p:nvPicPr>
-          <p:cNvPr id="14" name="Picture 13" descr="ai_lop7_bai3_data_hub.jpg"/>
+          <p:cNvPr id="13" name="Picture 12" descr="ai_lop7_bai3_data_hub.jpg"/>
           <p:cNvPicPr>
             <a:picLocks noChangeAspect="1"/>
           </p:cNvPicPr>

--- a/KHBD_Tin_học/Lớp_7/Tuần_04/Slide_Tin_hoc_Lớp_7_Tiet03_Bai_3_Quan_ly_du_lieu_trong_may_tinh.pptx
+++ b/KHBD_Tin_học/Lớp_7/Tuần_04/Slide_Tin_hoc_Lớp_7_Tiet03_Bai_3_Quan_ly_du_lieu_trong_may_tinh.pptx
@@ -5206,7 +5206,7 @@
               </a:defRPr>
             </a:pPr>
             <a:r>
-              <a:t>Bảng phím tắt thao tác nhanh trên tệp &amp; thư mục</a:t>
+              <a:t>Bộ phím tắt thao tác nhanh trên tệp &amp; thư mục</a:t>
             </a:r>
           </a:p>
         </p:txBody>
@@ -5653,7 +5653,7 @@
       </p:sp>
       <p:pic>
         <p:nvPicPr>
-          <p:cNvPr id="17" name="Picture 16" descr="lop7_bai3_phim_tat_thao_tac.png"/>
+          <p:cNvPr id="17" name="Picture 16" descr="ai_lop7_bai3_shortcuts.jpg"/>
           <p:cNvPicPr>
             <a:picLocks noChangeAspect="1"/>
           </p:cNvPicPr>
